--- a/포트폴리오/진성준/진성준_기획_포트폴리오_v2.pptx
+++ b/포트폴리오/진성준/진성준_기획_포트폴리오_v2.pptx
@@ -1,33 +1,33 @@
 
 <file path=ppt/presentation.xml><?xml version="1.0" encoding="utf-8"?>
-<p:presentation xmlns:r="http://schemas.openxmlformats.org/officeDocument/2006/relationships" xmlns:c="http://schemas.openxmlformats.org/drawingml/2006/chart" xmlns:a="http://schemas.openxmlformats.org/drawingml/2006/main" xmlns:dgm="http://schemas.openxmlformats.org/drawingml/2006/diagram" xmlns:dsp="http://schemas.microsoft.com/office/drawing/2008/diagram" xmlns:p="http://schemas.openxmlformats.org/presentationml/2006/main" autoCompressPictures="0">
+<p:presentation xmlns:a="http://schemas.openxmlformats.org/drawingml/2006/main" xmlns:r="http://schemas.openxmlformats.org/officeDocument/2006/relationships" xmlns:p="http://schemas.openxmlformats.org/presentationml/2006/main" autoCompressPictures="0">
   <p:sldMasterIdLst>
     <p:sldMasterId id="2147483654" r:id="rId1"/>
   </p:sldMasterIdLst>
   <p:notesMasterIdLst>
-    <p:notesMasterId r:id="rId2"/>
+    <p:notesMasterId r:id="rId22"/>
   </p:notesMasterIdLst>
   <p:sldIdLst>
-    <p:sldId id="256" r:id="rId3"/>
-    <p:sldId id="257" r:id="rId4"/>
-    <p:sldId id="258" r:id="rId5"/>
-    <p:sldId id="259" r:id="rId6"/>
-    <p:sldId id="260" r:id="rId7"/>
-    <p:sldId id="261" r:id="rId8"/>
-    <p:sldId id="262" r:id="rId9"/>
-    <p:sldId id="263" r:id="rId10"/>
-    <p:sldId id="264" r:id="rId11"/>
-    <p:sldId id="265" r:id="rId12"/>
-    <p:sldId id="266" r:id="rId13"/>
-    <p:sldId id="267" r:id="rId14"/>
-    <p:sldId id="268" r:id="rId15"/>
-    <p:sldId id="269" r:id="rId16"/>
-    <p:sldId id="270" r:id="rId17"/>
-    <p:sldId id="271" r:id="rId18"/>
-    <p:sldId id="272" r:id="rId19"/>
-    <p:sldId id="273" r:id="rId20"/>
-    <p:sldId id="274" r:id="rId21"/>
-    <p:sldId id="275" r:id="rId22"/>
+    <p:sldId id="256" r:id="rId2"/>
+    <p:sldId id="257" r:id="rId3"/>
+    <p:sldId id="258" r:id="rId4"/>
+    <p:sldId id="259" r:id="rId5"/>
+    <p:sldId id="260" r:id="rId6"/>
+    <p:sldId id="261" r:id="rId7"/>
+    <p:sldId id="262" r:id="rId8"/>
+    <p:sldId id="263" r:id="rId9"/>
+    <p:sldId id="264" r:id="rId10"/>
+    <p:sldId id="265" r:id="rId11"/>
+    <p:sldId id="266" r:id="rId12"/>
+    <p:sldId id="267" r:id="rId13"/>
+    <p:sldId id="268" r:id="rId14"/>
+    <p:sldId id="269" r:id="rId15"/>
+    <p:sldId id="270" r:id="rId16"/>
+    <p:sldId id="271" r:id="rId17"/>
+    <p:sldId id="272" r:id="rId18"/>
+    <p:sldId id="273" r:id="rId19"/>
+    <p:sldId id="274" r:id="rId20"/>
+    <p:sldId id="275" r:id="rId21"/>
   </p:sldIdLst>
   <p:sldSz cx="12192000" cy="6858000"/>
   <p:notesSz cx="6858000" cy="12192000"/>
@@ -123,11 +123,16 @@
       </a:defRPr>
     </a:lvl9pPr>
   </p:defaultTextStyle>
+  <p:extLst>
+    <p:ext uri="{EFAFB233-063F-42B5-8137-9DF3F51BA10A}">
+      <p15:sldGuideLst xmlns:p15="http://schemas.microsoft.com/office/powerpoint/2012/main"/>
+    </p:ext>
+  </p:extLst>
 </p:presentation>
 </file>
 
 <file path=ppt/notesMasters/notesMaster1.xml><?xml version="1.0" encoding="utf-8"?>
-<p:notesMaster xmlns:r="http://schemas.openxmlformats.org/officeDocument/2006/relationships" xmlns:c="http://schemas.openxmlformats.org/drawingml/2006/chart" xmlns:a="http://schemas.openxmlformats.org/drawingml/2006/main" xmlns:dgm="http://schemas.openxmlformats.org/drawingml/2006/diagram" xmlns:dsp="http://schemas.microsoft.com/office/drawing/2008/diagram" xmlns:p="http://schemas.openxmlformats.org/presentationml/2006/main">
+<p:notesMaster xmlns:a="http://schemas.openxmlformats.org/drawingml/2006/main" xmlns:r="http://schemas.openxmlformats.org/officeDocument/2006/relationships" xmlns:p="http://schemas.openxmlformats.org/presentationml/2006/main">
   <p:cSld>
     <p:bg>
       <p:bgRef idx="1001">
@@ -155,7 +160,7 @@
             <a:spLocks noGrp="1"/>
           </p:cNvSpPr>
           <p:nvPr>
-            <p:ph type="hdr" sz="quarter" idx="0"/>
+            <p:ph type="hdr" sz="quarter"/>
           </p:nvPr>
         </p:nvSpPr>
         <p:spPr>
@@ -178,10 +183,6 @@
             <a:pPr lvl="0">
               <a:defRPr/>
             </a:pPr>
-            <a:r>
-              <a:rPr lang="ko-KR" altLang="en-US"/>
-              <a:t/>
-            </a:r>
             <a:endParaRPr lang="ko-KR" altLang="en-US"/>
           </a:p>
         </p:txBody>
@@ -293,7 +294,6 @@
               <a:rPr lang="en-US"/>
               <a:t>Click to edit Master text styles</a:t>
             </a:r>
-            <a:endParaRPr lang="en-US"/>
           </a:p>
           <a:p>
             <a:pPr lvl="1">
@@ -303,7 +303,6 @@
               <a:rPr lang="en-US"/>
               <a:t>Second level</a:t>
             </a:r>
-            <a:endParaRPr lang="en-US"/>
           </a:p>
           <a:p>
             <a:pPr lvl="2">
@@ -313,7 +312,6 @@
               <a:rPr lang="en-US"/>
               <a:t>Third level</a:t>
             </a:r>
-            <a:endParaRPr lang="en-US"/>
           </a:p>
           <a:p>
             <a:pPr lvl="3">
@@ -323,7 +321,6 @@
               <a:rPr lang="en-US"/>
               <a:t>Fourth level</a:t>
             </a:r>
-            <a:endParaRPr lang="en-US"/>
           </a:p>
           <a:p>
             <a:pPr lvl="4">
@@ -333,7 +330,6 @@
               <a:rPr lang="en-US"/>
               <a:t>Fifth level</a:t>
             </a:r>
-            <a:endParaRPr lang="en-US"/>
           </a:p>
         </p:txBody>
       </p:sp>
@@ -367,10 +363,6 @@
             <a:pPr lvl="0">
               <a:defRPr/>
             </a:pPr>
-            <a:r>
-              <a:rPr lang="ko-KR" altLang="en-US"/>
-              <a:t/>
-            </a:r>
             <a:endParaRPr lang="ko-KR" altLang="en-US"/>
           </a:p>
         </p:txBody>
@@ -516,7 +508,7 @@
 </file>
 
 <file path=ppt/notesSlides/notesSlide1.xml><?xml version="1.0" encoding="utf-8"?>
-<p:notes xmlns:r="http://schemas.openxmlformats.org/officeDocument/2006/relationships" xmlns:c="http://schemas.openxmlformats.org/drawingml/2006/chart" xmlns:a="http://schemas.openxmlformats.org/drawingml/2006/main" xmlns:dgm="http://schemas.openxmlformats.org/drawingml/2006/diagram" xmlns:dsp="http://schemas.microsoft.com/office/drawing/2008/diagram" xmlns:p="http://schemas.openxmlformats.org/presentationml/2006/main">
+<p:notes xmlns:a="http://schemas.openxmlformats.org/drawingml/2006/main" xmlns:r="http://schemas.openxmlformats.org/officeDocument/2006/relationships" xmlns:p="http://schemas.openxmlformats.org/presentationml/2006/main">
   <p:cSld>
     <p:spTree>
       <p:nvGrpSpPr>
@@ -539,7 +531,7 @@
             <a:spLocks noGrp="1" noRot="1" noChangeAspect="1" noTextEdit="1"/>
           </p:cNvSpPr>
           <p:nvPr>
-            <p:ph type="sldImg" idx="0"/>
+            <p:ph type="sldImg"/>
           </p:nvPr>
         </p:nvSpPr>
         <p:spPr/>
@@ -562,10 +554,6 @@
             <a:pPr lvl="0">
               <a:defRPr/>
             </a:pPr>
-            <a:r>
-              <a:rPr lang="ko-KR" altLang="en-US"/>
-              <a:t/>
-            </a:r>
             <a:endParaRPr lang="ko-KR" altLang="en-US"/>
           </a:p>
         </p:txBody>
@@ -608,7 +596,7 @@
 </file>
 
 <file path=ppt/notesSlides/notesSlide10.xml><?xml version="1.0" encoding="utf-8"?>
-<p:notes xmlns:r="http://schemas.openxmlformats.org/officeDocument/2006/relationships" xmlns:c="http://schemas.openxmlformats.org/drawingml/2006/chart" xmlns:a="http://schemas.openxmlformats.org/drawingml/2006/main" xmlns:dgm="http://schemas.openxmlformats.org/drawingml/2006/diagram" xmlns:dsp="http://schemas.microsoft.com/office/drawing/2008/diagram" xmlns:p="http://schemas.openxmlformats.org/presentationml/2006/main">
+<p:notes xmlns:a="http://schemas.openxmlformats.org/drawingml/2006/main" xmlns:r="http://schemas.openxmlformats.org/officeDocument/2006/relationships" xmlns:p="http://schemas.openxmlformats.org/presentationml/2006/main">
   <p:cSld>
     <p:spTree>
       <p:nvGrpSpPr>
@@ -631,7 +619,7 @@
             <a:spLocks noGrp="1" noRot="1" noChangeAspect="1" noTextEdit="1"/>
           </p:cNvSpPr>
           <p:nvPr>
-            <p:ph type="sldImg" idx="0"/>
+            <p:ph type="sldImg"/>
           </p:nvPr>
         </p:nvSpPr>
         <p:spPr/>
@@ -654,10 +642,6 @@
             <a:pPr lvl="0">
               <a:defRPr/>
             </a:pPr>
-            <a:r>
-              <a:rPr lang="ko-KR" altLang="en-US"/>
-              <a:t/>
-            </a:r>
             <a:endParaRPr lang="ko-KR" altLang="en-US"/>
           </a:p>
         </p:txBody>
@@ -700,7 +684,7 @@
 </file>
 
 <file path=ppt/notesSlides/notesSlide11.xml><?xml version="1.0" encoding="utf-8"?>
-<p:notes xmlns:r="http://schemas.openxmlformats.org/officeDocument/2006/relationships" xmlns:c="http://schemas.openxmlformats.org/drawingml/2006/chart" xmlns:a="http://schemas.openxmlformats.org/drawingml/2006/main" xmlns:dgm="http://schemas.openxmlformats.org/drawingml/2006/diagram" xmlns:dsp="http://schemas.microsoft.com/office/drawing/2008/diagram" xmlns:p="http://schemas.openxmlformats.org/presentationml/2006/main">
+<p:notes xmlns:a="http://schemas.openxmlformats.org/drawingml/2006/main" xmlns:r="http://schemas.openxmlformats.org/officeDocument/2006/relationships" xmlns:p="http://schemas.openxmlformats.org/presentationml/2006/main">
   <p:cSld>
     <p:spTree>
       <p:nvGrpSpPr>
@@ -723,7 +707,7 @@
             <a:spLocks noGrp="1" noRot="1" noChangeAspect="1" noTextEdit="1"/>
           </p:cNvSpPr>
           <p:nvPr>
-            <p:ph type="sldImg" idx="0"/>
+            <p:ph type="sldImg"/>
           </p:nvPr>
         </p:nvSpPr>
         <p:spPr/>
@@ -746,10 +730,6 @@
             <a:pPr lvl="0">
               <a:defRPr/>
             </a:pPr>
-            <a:r>
-              <a:rPr lang="ko-KR" altLang="en-US"/>
-              <a:t/>
-            </a:r>
             <a:endParaRPr lang="ko-KR" altLang="en-US"/>
           </a:p>
         </p:txBody>
@@ -792,7 +772,7 @@
 </file>
 
 <file path=ppt/notesSlides/notesSlide12.xml><?xml version="1.0" encoding="utf-8"?>
-<p:notes xmlns:r="http://schemas.openxmlformats.org/officeDocument/2006/relationships" xmlns:c="http://schemas.openxmlformats.org/drawingml/2006/chart" xmlns:a="http://schemas.openxmlformats.org/drawingml/2006/main" xmlns:dgm="http://schemas.openxmlformats.org/drawingml/2006/diagram" xmlns:dsp="http://schemas.microsoft.com/office/drawing/2008/diagram" xmlns:p="http://schemas.openxmlformats.org/presentationml/2006/main">
+<p:notes xmlns:a="http://schemas.openxmlformats.org/drawingml/2006/main" xmlns:r="http://schemas.openxmlformats.org/officeDocument/2006/relationships" xmlns:p="http://schemas.openxmlformats.org/presentationml/2006/main">
   <p:cSld>
     <p:spTree>
       <p:nvGrpSpPr>
@@ -815,7 +795,7 @@
             <a:spLocks noGrp="1" noRot="1" noChangeAspect="1" noTextEdit="1"/>
           </p:cNvSpPr>
           <p:nvPr>
-            <p:ph type="sldImg" idx="0"/>
+            <p:ph type="sldImg"/>
           </p:nvPr>
         </p:nvSpPr>
         <p:spPr/>
@@ -838,10 +818,6 @@
             <a:pPr lvl="0">
               <a:defRPr/>
             </a:pPr>
-            <a:r>
-              <a:rPr lang="ko-KR" altLang="en-US"/>
-              <a:t/>
-            </a:r>
             <a:endParaRPr lang="ko-KR" altLang="en-US"/>
           </a:p>
         </p:txBody>
@@ -884,7 +860,7 @@
 </file>
 
 <file path=ppt/notesSlides/notesSlide13.xml><?xml version="1.0" encoding="utf-8"?>
-<p:notes xmlns:r="http://schemas.openxmlformats.org/officeDocument/2006/relationships" xmlns:c="http://schemas.openxmlformats.org/drawingml/2006/chart" xmlns:a="http://schemas.openxmlformats.org/drawingml/2006/main" xmlns:dgm="http://schemas.openxmlformats.org/drawingml/2006/diagram" xmlns:dsp="http://schemas.microsoft.com/office/drawing/2008/diagram" xmlns:p="http://schemas.openxmlformats.org/presentationml/2006/main">
+<p:notes xmlns:a="http://schemas.openxmlformats.org/drawingml/2006/main" xmlns:r="http://schemas.openxmlformats.org/officeDocument/2006/relationships" xmlns:p="http://schemas.openxmlformats.org/presentationml/2006/main">
   <p:cSld>
     <p:spTree>
       <p:nvGrpSpPr>
@@ -907,7 +883,7 @@
             <a:spLocks noGrp="1" noRot="1" noChangeAspect="1" noTextEdit="1"/>
           </p:cNvSpPr>
           <p:nvPr>
-            <p:ph type="sldImg" idx="0"/>
+            <p:ph type="sldImg"/>
           </p:nvPr>
         </p:nvSpPr>
         <p:spPr/>
@@ -930,10 +906,6 @@
             <a:pPr lvl="0">
               <a:defRPr/>
             </a:pPr>
-            <a:r>
-              <a:rPr lang="ko-KR" altLang="en-US"/>
-              <a:t/>
-            </a:r>
             <a:endParaRPr lang="ko-KR" altLang="en-US"/>
           </a:p>
         </p:txBody>
@@ -976,7 +948,7 @@
 </file>
 
 <file path=ppt/notesSlides/notesSlide14.xml><?xml version="1.0" encoding="utf-8"?>
-<p:notes xmlns:r="http://schemas.openxmlformats.org/officeDocument/2006/relationships" xmlns:c="http://schemas.openxmlformats.org/drawingml/2006/chart" xmlns:a="http://schemas.openxmlformats.org/drawingml/2006/main" xmlns:dgm="http://schemas.openxmlformats.org/drawingml/2006/diagram" xmlns:dsp="http://schemas.microsoft.com/office/drawing/2008/diagram" xmlns:p="http://schemas.openxmlformats.org/presentationml/2006/main">
+<p:notes xmlns:a="http://schemas.openxmlformats.org/drawingml/2006/main" xmlns:r="http://schemas.openxmlformats.org/officeDocument/2006/relationships" xmlns:p="http://schemas.openxmlformats.org/presentationml/2006/main">
   <p:cSld>
     <p:spTree>
       <p:nvGrpSpPr>
@@ -999,7 +971,7 @@
             <a:spLocks noGrp="1" noRot="1" noChangeAspect="1" noTextEdit="1"/>
           </p:cNvSpPr>
           <p:nvPr>
-            <p:ph type="sldImg" idx="0"/>
+            <p:ph type="sldImg"/>
           </p:nvPr>
         </p:nvSpPr>
         <p:spPr/>
@@ -1022,10 +994,6 @@
             <a:pPr lvl="0">
               <a:defRPr/>
             </a:pPr>
-            <a:r>
-              <a:rPr lang="ko-KR" altLang="en-US"/>
-              <a:t/>
-            </a:r>
             <a:endParaRPr lang="ko-KR" altLang="en-US"/>
           </a:p>
         </p:txBody>
@@ -1068,7 +1036,7 @@
 </file>
 
 <file path=ppt/notesSlides/notesSlide15.xml><?xml version="1.0" encoding="utf-8"?>
-<p:notes xmlns:r="http://schemas.openxmlformats.org/officeDocument/2006/relationships" xmlns:c="http://schemas.openxmlformats.org/drawingml/2006/chart" xmlns:a="http://schemas.openxmlformats.org/drawingml/2006/main" xmlns:dgm="http://schemas.openxmlformats.org/drawingml/2006/diagram" xmlns:dsp="http://schemas.microsoft.com/office/drawing/2008/diagram" xmlns:p="http://schemas.openxmlformats.org/presentationml/2006/main">
+<p:notes xmlns:a="http://schemas.openxmlformats.org/drawingml/2006/main" xmlns:r="http://schemas.openxmlformats.org/officeDocument/2006/relationships" xmlns:p="http://schemas.openxmlformats.org/presentationml/2006/main">
   <p:cSld>
     <p:spTree>
       <p:nvGrpSpPr>
@@ -1091,7 +1059,7 @@
             <a:spLocks noGrp="1" noRot="1" noChangeAspect="1" noTextEdit="1"/>
           </p:cNvSpPr>
           <p:nvPr>
-            <p:ph type="sldImg" idx="0"/>
+            <p:ph type="sldImg"/>
           </p:nvPr>
         </p:nvSpPr>
         <p:spPr/>
@@ -1114,10 +1082,6 @@
             <a:pPr lvl="0">
               <a:defRPr/>
             </a:pPr>
-            <a:r>
-              <a:rPr lang="ko-KR" altLang="en-US"/>
-              <a:t/>
-            </a:r>
             <a:endParaRPr lang="ko-KR" altLang="en-US"/>
           </a:p>
         </p:txBody>
@@ -1160,7 +1124,7 @@
 </file>
 
 <file path=ppt/notesSlides/notesSlide16.xml><?xml version="1.0" encoding="utf-8"?>
-<p:notes xmlns:r="http://schemas.openxmlformats.org/officeDocument/2006/relationships" xmlns:c="http://schemas.openxmlformats.org/drawingml/2006/chart" xmlns:a="http://schemas.openxmlformats.org/drawingml/2006/main" xmlns:dgm="http://schemas.openxmlformats.org/drawingml/2006/diagram" xmlns:dsp="http://schemas.microsoft.com/office/drawing/2008/diagram" xmlns:p="http://schemas.openxmlformats.org/presentationml/2006/main">
+<p:notes xmlns:a="http://schemas.openxmlformats.org/drawingml/2006/main" xmlns:r="http://schemas.openxmlformats.org/officeDocument/2006/relationships" xmlns:p="http://schemas.openxmlformats.org/presentationml/2006/main">
   <p:cSld>
     <p:spTree>
       <p:nvGrpSpPr>
@@ -1183,7 +1147,7 @@
             <a:spLocks noGrp="1" noRot="1" noChangeAspect="1" noTextEdit="1"/>
           </p:cNvSpPr>
           <p:nvPr>
-            <p:ph type="sldImg" idx="0"/>
+            <p:ph type="sldImg"/>
           </p:nvPr>
         </p:nvSpPr>
         <p:spPr/>
@@ -1206,10 +1170,6 @@
             <a:pPr lvl="0">
               <a:defRPr/>
             </a:pPr>
-            <a:r>
-              <a:rPr lang="ko-KR" altLang="en-US"/>
-              <a:t/>
-            </a:r>
             <a:endParaRPr lang="ko-KR" altLang="en-US"/>
           </a:p>
         </p:txBody>
@@ -1252,7 +1212,7 @@
 </file>
 
 <file path=ppt/notesSlides/notesSlide2.xml><?xml version="1.0" encoding="utf-8"?>
-<p:notes xmlns:r="http://schemas.openxmlformats.org/officeDocument/2006/relationships" xmlns:c="http://schemas.openxmlformats.org/drawingml/2006/chart" xmlns:a="http://schemas.openxmlformats.org/drawingml/2006/main" xmlns:dgm="http://schemas.openxmlformats.org/drawingml/2006/diagram" xmlns:dsp="http://schemas.microsoft.com/office/drawing/2008/diagram" xmlns:p="http://schemas.openxmlformats.org/presentationml/2006/main">
+<p:notes xmlns:a="http://schemas.openxmlformats.org/drawingml/2006/main" xmlns:r="http://schemas.openxmlformats.org/officeDocument/2006/relationships" xmlns:p="http://schemas.openxmlformats.org/presentationml/2006/main">
   <p:cSld>
     <p:spTree>
       <p:nvGrpSpPr>
@@ -1275,7 +1235,7 @@
             <a:spLocks noGrp="1" noRot="1" noChangeAspect="1" noTextEdit="1"/>
           </p:cNvSpPr>
           <p:nvPr>
-            <p:ph type="sldImg" idx="0"/>
+            <p:ph type="sldImg"/>
           </p:nvPr>
         </p:nvSpPr>
         <p:spPr/>
@@ -1298,10 +1258,6 @@
             <a:pPr lvl="0">
               <a:defRPr/>
             </a:pPr>
-            <a:r>
-              <a:rPr lang="ko-KR" altLang="en-US"/>
-              <a:t/>
-            </a:r>
             <a:endParaRPr lang="ko-KR" altLang="en-US"/>
           </a:p>
         </p:txBody>
@@ -1344,7 +1300,7 @@
 </file>
 
 <file path=ppt/notesSlides/notesSlide3.xml><?xml version="1.0" encoding="utf-8"?>
-<p:notes xmlns:r="http://schemas.openxmlformats.org/officeDocument/2006/relationships" xmlns:c="http://schemas.openxmlformats.org/drawingml/2006/chart" xmlns:a="http://schemas.openxmlformats.org/drawingml/2006/main" xmlns:dgm="http://schemas.openxmlformats.org/drawingml/2006/diagram" xmlns:dsp="http://schemas.microsoft.com/office/drawing/2008/diagram" xmlns:p="http://schemas.openxmlformats.org/presentationml/2006/main">
+<p:notes xmlns:a="http://schemas.openxmlformats.org/drawingml/2006/main" xmlns:r="http://schemas.openxmlformats.org/officeDocument/2006/relationships" xmlns:p="http://schemas.openxmlformats.org/presentationml/2006/main">
   <p:cSld>
     <p:spTree>
       <p:nvGrpSpPr>
@@ -1367,7 +1323,7 @@
             <a:spLocks noGrp="1" noRot="1" noChangeAspect="1" noTextEdit="1"/>
           </p:cNvSpPr>
           <p:nvPr>
-            <p:ph type="sldImg" idx="0"/>
+            <p:ph type="sldImg"/>
           </p:nvPr>
         </p:nvSpPr>
         <p:spPr/>
@@ -1390,10 +1346,6 @@
             <a:pPr lvl="0">
               <a:defRPr/>
             </a:pPr>
-            <a:r>
-              <a:rPr lang="ko-KR" altLang="en-US"/>
-              <a:t/>
-            </a:r>
             <a:endParaRPr lang="ko-KR" altLang="en-US"/>
           </a:p>
         </p:txBody>
@@ -1436,7 +1388,7 @@
 </file>
 
 <file path=ppt/notesSlides/notesSlide4.xml><?xml version="1.0" encoding="utf-8"?>
-<p:notes xmlns:r="http://schemas.openxmlformats.org/officeDocument/2006/relationships" xmlns:c="http://schemas.openxmlformats.org/drawingml/2006/chart" xmlns:a="http://schemas.openxmlformats.org/drawingml/2006/main" xmlns:dgm="http://schemas.openxmlformats.org/drawingml/2006/diagram" xmlns:dsp="http://schemas.microsoft.com/office/drawing/2008/diagram" xmlns:p="http://schemas.openxmlformats.org/presentationml/2006/main">
+<p:notes xmlns:a="http://schemas.openxmlformats.org/drawingml/2006/main" xmlns:r="http://schemas.openxmlformats.org/officeDocument/2006/relationships" xmlns:p="http://schemas.openxmlformats.org/presentationml/2006/main">
   <p:cSld>
     <p:spTree>
       <p:nvGrpSpPr>
@@ -1459,7 +1411,7 @@
             <a:spLocks noGrp="1" noRot="1" noChangeAspect="1" noTextEdit="1"/>
           </p:cNvSpPr>
           <p:nvPr>
-            <p:ph type="sldImg" idx="0"/>
+            <p:ph type="sldImg"/>
           </p:nvPr>
         </p:nvSpPr>
         <p:spPr/>
@@ -1482,10 +1434,6 @@
             <a:pPr lvl="0">
               <a:defRPr/>
             </a:pPr>
-            <a:r>
-              <a:rPr lang="ko-KR" altLang="en-US"/>
-              <a:t/>
-            </a:r>
             <a:endParaRPr lang="ko-KR" altLang="en-US"/>
           </a:p>
         </p:txBody>
@@ -1528,7 +1476,7 @@
 </file>
 
 <file path=ppt/notesSlides/notesSlide5.xml><?xml version="1.0" encoding="utf-8"?>
-<p:notes xmlns:r="http://schemas.openxmlformats.org/officeDocument/2006/relationships" xmlns:c="http://schemas.openxmlformats.org/drawingml/2006/chart" xmlns:a="http://schemas.openxmlformats.org/drawingml/2006/main" xmlns:dgm="http://schemas.openxmlformats.org/drawingml/2006/diagram" xmlns:dsp="http://schemas.microsoft.com/office/drawing/2008/diagram" xmlns:p="http://schemas.openxmlformats.org/presentationml/2006/main">
+<p:notes xmlns:a="http://schemas.openxmlformats.org/drawingml/2006/main" xmlns:r="http://schemas.openxmlformats.org/officeDocument/2006/relationships" xmlns:p="http://schemas.openxmlformats.org/presentationml/2006/main">
   <p:cSld>
     <p:spTree>
       <p:nvGrpSpPr>
@@ -1551,7 +1499,7 @@
             <a:spLocks noGrp="1" noRot="1" noChangeAspect="1" noTextEdit="1"/>
           </p:cNvSpPr>
           <p:nvPr>
-            <p:ph type="sldImg" idx="0"/>
+            <p:ph type="sldImg"/>
           </p:nvPr>
         </p:nvSpPr>
         <p:spPr/>
@@ -1574,10 +1522,6 @@
             <a:pPr lvl="0">
               <a:defRPr/>
             </a:pPr>
-            <a:r>
-              <a:rPr lang="ko-KR" altLang="en-US"/>
-              <a:t/>
-            </a:r>
             <a:endParaRPr lang="ko-KR" altLang="en-US"/>
           </a:p>
         </p:txBody>
@@ -1620,7 +1564,7 @@
 </file>
 
 <file path=ppt/notesSlides/notesSlide6.xml><?xml version="1.0" encoding="utf-8"?>
-<p:notes xmlns:r="http://schemas.openxmlformats.org/officeDocument/2006/relationships" xmlns:c="http://schemas.openxmlformats.org/drawingml/2006/chart" xmlns:a="http://schemas.openxmlformats.org/drawingml/2006/main" xmlns:dgm="http://schemas.openxmlformats.org/drawingml/2006/diagram" xmlns:dsp="http://schemas.microsoft.com/office/drawing/2008/diagram" xmlns:p="http://schemas.openxmlformats.org/presentationml/2006/main">
+<p:notes xmlns:a="http://schemas.openxmlformats.org/drawingml/2006/main" xmlns:r="http://schemas.openxmlformats.org/officeDocument/2006/relationships" xmlns:p="http://schemas.openxmlformats.org/presentationml/2006/main">
   <p:cSld>
     <p:spTree>
       <p:nvGrpSpPr>
@@ -1643,7 +1587,7 @@
             <a:spLocks noGrp="1" noRot="1" noChangeAspect="1" noTextEdit="1"/>
           </p:cNvSpPr>
           <p:nvPr>
-            <p:ph type="sldImg" idx="0"/>
+            <p:ph type="sldImg"/>
           </p:nvPr>
         </p:nvSpPr>
         <p:spPr/>
@@ -1666,10 +1610,6 @@
             <a:pPr lvl="0">
               <a:defRPr/>
             </a:pPr>
-            <a:r>
-              <a:rPr lang="ko-KR" altLang="en-US"/>
-              <a:t/>
-            </a:r>
             <a:endParaRPr lang="ko-KR" altLang="en-US"/>
           </a:p>
         </p:txBody>
@@ -1712,7 +1652,7 @@
 </file>
 
 <file path=ppt/notesSlides/notesSlide7.xml><?xml version="1.0" encoding="utf-8"?>
-<p:notes xmlns:r="http://schemas.openxmlformats.org/officeDocument/2006/relationships" xmlns:c="http://schemas.openxmlformats.org/drawingml/2006/chart" xmlns:a="http://schemas.openxmlformats.org/drawingml/2006/main" xmlns:dgm="http://schemas.openxmlformats.org/drawingml/2006/diagram" xmlns:dsp="http://schemas.microsoft.com/office/drawing/2008/diagram" xmlns:p="http://schemas.openxmlformats.org/presentationml/2006/main">
+<p:notes xmlns:a="http://schemas.openxmlformats.org/drawingml/2006/main" xmlns:r="http://schemas.openxmlformats.org/officeDocument/2006/relationships" xmlns:p="http://schemas.openxmlformats.org/presentationml/2006/main">
   <p:cSld>
     <p:spTree>
       <p:nvGrpSpPr>
@@ -1735,7 +1675,7 @@
             <a:spLocks noGrp="1" noRot="1" noChangeAspect="1" noTextEdit="1"/>
           </p:cNvSpPr>
           <p:nvPr>
-            <p:ph type="sldImg" idx="0"/>
+            <p:ph type="sldImg"/>
           </p:nvPr>
         </p:nvSpPr>
         <p:spPr/>
@@ -1758,10 +1698,6 @@
             <a:pPr lvl="0">
               <a:defRPr/>
             </a:pPr>
-            <a:r>
-              <a:rPr lang="ko-KR" altLang="en-US"/>
-              <a:t/>
-            </a:r>
             <a:endParaRPr lang="ko-KR" altLang="en-US"/>
           </a:p>
         </p:txBody>
@@ -1804,7 +1740,7 @@
 </file>
 
 <file path=ppt/notesSlides/notesSlide8.xml><?xml version="1.0" encoding="utf-8"?>
-<p:notes xmlns:r="http://schemas.openxmlformats.org/officeDocument/2006/relationships" xmlns:c="http://schemas.openxmlformats.org/drawingml/2006/chart" xmlns:a="http://schemas.openxmlformats.org/drawingml/2006/main" xmlns:dgm="http://schemas.openxmlformats.org/drawingml/2006/diagram" xmlns:dsp="http://schemas.microsoft.com/office/drawing/2008/diagram" xmlns:p="http://schemas.openxmlformats.org/presentationml/2006/main">
+<p:notes xmlns:a="http://schemas.openxmlformats.org/drawingml/2006/main" xmlns:r="http://schemas.openxmlformats.org/officeDocument/2006/relationships" xmlns:p="http://schemas.openxmlformats.org/presentationml/2006/main">
   <p:cSld>
     <p:spTree>
       <p:nvGrpSpPr>
@@ -1827,7 +1763,7 @@
             <a:spLocks noGrp="1" noRot="1" noChangeAspect="1" noTextEdit="1"/>
           </p:cNvSpPr>
           <p:nvPr>
-            <p:ph type="sldImg" idx="0"/>
+            <p:ph type="sldImg"/>
           </p:nvPr>
         </p:nvSpPr>
         <p:spPr/>
@@ -1850,10 +1786,6 @@
             <a:pPr lvl="0">
               <a:defRPr/>
             </a:pPr>
-            <a:r>
-              <a:rPr lang="ko-KR" altLang="en-US"/>
-              <a:t/>
-            </a:r>
             <a:endParaRPr lang="ko-KR" altLang="en-US"/>
           </a:p>
         </p:txBody>
@@ -1896,7 +1828,7 @@
 </file>
 
 <file path=ppt/notesSlides/notesSlide9.xml><?xml version="1.0" encoding="utf-8"?>
-<p:notes xmlns:r="http://schemas.openxmlformats.org/officeDocument/2006/relationships" xmlns:c="http://schemas.openxmlformats.org/drawingml/2006/chart" xmlns:a="http://schemas.openxmlformats.org/drawingml/2006/main" xmlns:dgm="http://schemas.openxmlformats.org/drawingml/2006/diagram" xmlns:dsp="http://schemas.microsoft.com/office/drawing/2008/diagram" xmlns:p="http://schemas.openxmlformats.org/presentationml/2006/main">
+<p:notes xmlns:a="http://schemas.openxmlformats.org/drawingml/2006/main" xmlns:r="http://schemas.openxmlformats.org/officeDocument/2006/relationships" xmlns:p="http://schemas.openxmlformats.org/presentationml/2006/main">
   <p:cSld>
     <p:spTree>
       <p:nvGrpSpPr>
@@ -1919,7 +1851,7 @@
             <a:spLocks noGrp="1" noRot="1" noChangeAspect="1" noTextEdit="1"/>
           </p:cNvSpPr>
           <p:nvPr>
-            <p:ph type="sldImg" idx="0"/>
+            <p:ph type="sldImg"/>
           </p:nvPr>
         </p:nvSpPr>
         <p:spPr/>
@@ -1942,10 +1874,6 @@
             <a:pPr lvl="0">
               <a:defRPr/>
             </a:pPr>
-            <a:r>
-              <a:rPr lang="ko-KR" altLang="en-US"/>
-              <a:t/>
-            </a:r>
             <a:endParaRPr lang="ko-KR" altLang="en-US"/>
           </a:p>
         </p:txBody>
@@ -2590,7 +2518,7 @@
     <mc:Choice Requires="p14">
       <p:transition/>
     </mc:Choice>
-    <mc:Fallback xmlns:dsp="http://schemas.microsoft.com/office/drawing/2008/diagram" xmlns:dgm="http://schemas.openxmlformats.org/drawingml/2006/diagram" xmlns:c="http://schemas.openxmlformats.org/drawingml/2006/chart" xmlns="">
+    <mc:Fallback xmlns="" xmlns:c="http://schemas.openxmlformats.org/drawingml/2006/chart" xmlns:dgm="http://schemas.openxmlformats.org/drawingml/2006/diagram" xmlns:dsp="http://schemas.microsoft.com/office/drawing/2008/diagram">
       <p:transition/>
     </mc:Fallback>
   </mc:AlternateContent>
@@ -2598,13 +2526,14 @@
 </file>
 
 <file path=ppt/slides/slide10.xml><?xml version="1.0" encoding="utf-8"?>
-<p:sld xmlns:r="http://schemas.openxmlformats.org/officeDocument/2006/relationships" xmlns:c="http://schemas.openxmlformats.org/drawingml/2006/chart" xmlns:a="http://schemas.openxmlformats.org/drawingml/2006/main" xmlns:dgm="http://schemas.openxmlformats.org/drawingml/2006/diagram" xmlns:dsp="http://schemas.microsoft.com/office/drawing/2008/diagram" xmlns:p="http://schemas.openxmlformats.org/presentationml/2006/main">
+<p:sld xmlns:a="http://schemas.openxmlformats.org/drawingml/2006/main" xmlns:r="http://schemas.openxmlformats.org/officeDocument/2006/relationships" xmlns:p="http://schemas.openxmlformats.org/presentationml/2006/main">
   <p:cSld name="Slide 11">
     <p:bg>
-      <p:bgPr shadeToTitle="0">
+      <p:bgPr>
         <a:solidFill>
-          <a:srgbClr val="ffffff"/>
+          <a:srgbClr val="FFFFFF"/>
         </a:solidFill>
+        <a:effectLst/>
       </p:bgPr>
     </p:bg>
     <p:spTree>
@@ -2649,7 +2578,7 @@
             <a:r>
               <a:rPr lang="en-US" sz="1200" b="1" kern="0" spc="200">
                 <a:solidFill>
-                  <a:srgbClr val="c8622e"/>
+                  <a:srgbClr val="C8622E"/>
                 </a:solidFill>
                 <a:latin typeface="맑은 고딕"/>
                 <a:ea typeface="맑은 고딕"/>
@@ -2689,7 +2618,7 @@
             <a:r>
               <a:rPr lang="en-US" sz="2900" b="1">
                 <a:solidFill>
-                  <a:srgbClr val="1f2637"/>
+                  <a:srgbClr val="1F2637"/>
                 </a:solidFill>
                 <a:latin typeface="맑은 고딕"/>
                 <a:ea typeface="맑은 고딕"/>
@@ -2729,7 +2658,7 @@
             <a:r>
               <a:rPr lang="en-US" sz="1350" i="1">
                 <a:solidFill>
-                  <a:srgbClr val="24324f"/>
+                  <a:srgbClr val="24324F"/>
                 </a:solidFill>
                 <a:latin typeface="맑은 고딕"/>
                 <a:ea typeface="맑은 고딕"/>
@@ -2756,14 +2685,28 @@
         <a:graphic>
           <a:graphicData uri="http://schemas.openxmlformats.org/drawingml/2006/table">
             <a:tbl>
+              <a:tblPr/>
               <a:tblGrid>
-                <a:gridCol w="1554480"/>
-                <a:gridCol w="4389120"/>
+                <a:gridCol w="1554480">
+                  <a:extLst>
+                    <a:ext uri="{9D8B030D-6E8A-4147-A177-3AD203B41FA5}">
+                      <a16:colId xmlns:a16="http://schemas.microsoft.com/office/drawing/2014/main" val="20000"/>
+                    </a:ext>
+                  </a:extLst>
+                </a:gridCol>
+                <a:gridCol w="4389120">
+                  <a:extLst>
+                    <a:ext uri="{9D8B030D-6E8A-4147-A177-3AD203B41FA5}">
+                      <a16:colId xmlns:a16="http://schemas.microsoft.com/office/drawing/2014/main" val="20001"/>
+                    </a:ext>
+                  </a:extLst>
+                </a:gridCol>
               </a:tblGrid>
               <a:tr h="384048">
                 <a:tc>
                   <a:txBody>
-                    <a:bodyPr vert="horz" lIns="38100" tIns="38100" rIns="38100" bIns="38100" anchor="ctr" anchorCtr="0"/>
+                    <a:bodyPr/>
+                    <a:lstStyle/>
                     <a:p>
                       <a:pPr marL="0" indent="0" algn="l">
                         <a:buNone/>
@@ -2772,7 +2715,7 @@
                       <a:r>
                         <a:rPr lang="en-US" sz="1200" b="1">
                           <a:solidFill>
-                            <a:srgbClr val="ffffff"/>
+                            <a:srgbClr val="FFFFFF"/>
                           </a:solidFill>
                           <a:latin typeface="맑은 고딕"/>
                           <a:ea typeface="맑은 고딕"/>
@@ -2790,7 +2733,7 @@
                   <a:tcPr marL="38100" marR="38100" marT="38100" marB="38100" anchor="ctr">
                     <a:lnL w="12700" cap="flat" cmpd="sng" algn="ctr">
                       <a:solidFill>
-                        <a:srgbClr val="d9dee6"/>
+                        <a:srgbClr val="D9DEE6"/>
                       </a:solidFill>
                       <a:prstDash val="solid"/>
                       <a:round/>
@@ -2799,7 +2742,7 @@
                     </a:lnL>
                     <a:lnR w="12700" cap="flat" cmpd="sng" algn="ctr">
                       <a:solidFill>
-                        <a:srgbClr val="d9dee6"/>
+                        <a:srgbClr val="D9DEE6"/>
                       </a:solidFill>
                       <a:prstDash val="solid"/>
                       <a:round/>
@@ -2808,7 +2751,7 @@
                     </a:lnR>
                     <a:lnT w="12700" cap="flat" cmpd="sng" algn="ctr">
                       <a:solidFill>
-                        <a:srgbClr val="d9dee6"/>
+                        <a:srgbClr val="D9DEE6"/>
                       </a:solidFill>
                       <a:prstDash val="solid"/>
                       <a:round/>
@@ -2817,7 +2760,7 @@
                     </a:lnT>
                     <a:lnB w="12700" cap="flat" cmpd="sng" algn="ctr">
                       <a:solidFill>
-                        <a:srgbClr val="d9dee6"/>
+                        <a:srgbClr val="D9DEE6"/>
                       </a:solidFill>
                       <a:prstDash val="solid"/>
                       <a:round/>
@@ -2825,13 +2768,14 @@
                       <a:tailEnd w="med" len="med"/>
                     </a:lnB>
                     <a:solidFill>
-                      <a:srgbClr val="16223b"/>
+                      <a:srgbClr val="16223B"/>
                     </a:solidFill>
                   </a:tcPr>
                 </a:tc>
                 <a:tc>
                   <a:txBody>
-                    <a:bodyPr vert="horz" lIns="38100" tIns="38100" rIns="38100" bIns="38100" anchor="ctr" anchorCtr="0"/>
+                    <a:bodyPr/>
+                    <a:lstStyle/>
                     <a:p>
                       <a:pPr marL="0" indent="0" algn="l">
                         <a:buNone/>
@@ -2840,7 +2784,7 @@
                       <a:r>
                         <a:rPr lang="en-US" sz="1200">
                           <a:solidFill>
-                            <a:srgbClr val="1f2637"/>
+                            <a:srgbClr val="1F2637"/>
                           </a:solidFill>
                           <a:latin typeface="맑은 고딕"/>
                           <a:ea typeface="맑은 고딕"/>
@@ -2858,7 +2802,7 @@
                   <a:tcPr marL="38100" marR="38100" marT="38100" marB="38100" anchor="ctr">
                     <a:lnL w="12700" cap="flat" cmpd="sng" algn="ctr">
                       <a:solidFill>
-                        <a:srgbClr val="d9dee6"/>
+                        <a:srgbClr val="D9DEE6"/>
                       </a:solidFill>
                       <a:prstDash val="solid"/>
                       <a:round/>
@@ -2867,7 +2811,7 @@
                     </a:lnL>
                     <a:lnR w="12700" cap="flat" cmpd="sng" algn="ctr">
                       <a:solidFill>
-                        <a:srgbClr val="d9dee6"/>
+                        <a:srgbClr val="D9DEE6"/>
                       </a:solidFill>
                       <a:prstDash val="solid"/>
                       <a:round/>
@@ -2876,7 +2820,7 @@
                     </a:lnR>
                     <a:lnT w="12700" cap="flat" cmpd="sng" algn="ctr">
                       <a:solidFill>
-                        <a:srgbClr val="d9dee6"/>
+                        <a:srgbClr val="D9DEE6"/>
                       </a:solidFill>
                       <a:prstDash val="solid"/>
                       <a:round/>
@@ -2885,7 +2829,7 @@
                     </a:lnT>
                     <a:lnB w="12700" cap="flat" cmpd="sng" algn="ctr">
                       <a:solidFill>
-                        <a:srgbClr val="d9dee6"/>
+                        <a:srgbClr val="D9DEE6"/>
                       </a:solidFill>
                       <a:prstDash val="solid"/>
                       <a:round/>
@@ -2893,15 +2837,21 @@
                       <a:tailEnd w="med" len="med"/>
                     </a:lnB>
                     <a:solidFill>
-                      <a:srgbClr val="ffffff"/>
+                      <a:srgbClr val="FFFFFF"/>
                     </a:solidFill>
                   </a:tcPr>
                 </a:tc>
+                <a:extLst>
+                  <a:ext uri="{0D108BD9-81ED-4DB2-BD59-A6C34878D82A}">
+                    <a16:rowId xmlns:a16="http://schemas.microsoft.com/office/drawing/2014/main" val="10000"/>
+                  </a:ext>
+                </a:extLst>
               </a:tr>
               <a:tr h="384048">
                 <a:tc>
                   <a:txBody>
-                    <a:bodyPr vert="horz" lIns="38100" tIns="38100" rIns="38100" bIns="38100" anchor="ctr" anchorCtr="0"/>
+                    <a:bodyPr/>
+                    <a:lstStyle/>
                     <a:p>
                       <a:pPr marL="0" indent="0" algn="l">
                         <a:buNone/>
@@ -2910,7 +2860,7 @@
                       <a:r>
                         <a:rPr lang="en-US" sz="1200" b="1">
                           <a:solidFill>
-                            <a:srgbClr val="ffffff"/>
+                            <a:srgbClr val="FFFFFF"/>
                           </a:solidFill>
                           <a:latin typeface="맑은 고딕"/>
                           <a:ea typeface="맑은 고딕"/>
@@ -2928,7 +2878,7 @@
                   <a:tcPr marL="38100" marR="38100" marT="38100" marB="38100" anchor="ctr">
                     <a:lnL w="12700" cap="flat" cmpd="sng" algn="ctr">
                       <a:solidFill>
-                        <a:srgbClr val="d9dee6"/>
+                        <a:srgbClr val="D9DEE6"/>
                       </a:solidFill>
                       <a:prstDash val="solid"/>
                       <a:round/>
@@ -2937,7 +2887,7 @@
                     </a:lnL>
                     <a:lnR w="12700" cap="flat" cmpd="sng" algn="ctr">
                       <a:solidFill>
-                        <a:srgbClr val="d9dee6"/>
+                        <a:srgbClr val="D9DEE6"/>
                       </a:solidFill>
                       <a:prstDash val="solid"/>
                       <a:round/>
@@ -2946,7 +2896,7 @@
                     </a:lnR>
                     <a:lnT w="12700" cap="flat" cmpd="sng" algn="ctr">
                       <a:solidFill>
-                        <a:srgbClr val="d9dee6"/>
+                        <a:srgbClr val="D9DEE6"/>
                       </a:solidFill>
                       <a:prstDash val="solid"/>
                       <a:round/>
@@ -2955,7 +2905,7 @@
                     </a:lnT>
                     <a:lnB w="12700" cap="flat" cmpd="sng" algn="ctr">
                       <a:solidFill>
-                        <a:srgbClr val="d9dee6"/>
+                        <a:srgbClr val="D9DEE6"/>
                       </a:solidFill>
                       <a:prstDash val="solid"/>
                       <a:round/>
@@ -2963,13 +2913,14 @@
                       <a:tailEnd w="med" len="med"/>
                     </a:lnB>
                     <a:solidFill>
-                      <a:srgbClr val="16223b"/>
+                      <a:srgbClr val="16223B"/>
                     </a:solidFill>
                   </a:tcPr>
                 </a:tc>
                 <a:tc>
                   <a:txBody>
-                    <a:bodyPr vert="horz" lIns="38100" tIns="38100" rIns="38100" bIns="38100" anchor="ctr" anchorCtr="0"/>
+                    <a:bodyPr/>
+                    <a:lstStyle/>
                     <a:p>
                       <a:pPr marL="0" indent="0" algn="l">
                         <a:buNone/>
@@ -2978,7 +2929,7 @@
                       <a:r>
                         <a:rPr lang="en-US" sz="1200">
                           <a:solidFill>
-                            <a:srgbClr val="1f2637"/>
+                            <a:srgbClr val="1F2637"/>
                           </a:solidFill>
                           <a:latin typeface="맑은 고딕"/>
                           <a:ea typeface="맑은 고딕"/>
@@ -2996,7 +2947,7 @@
                   <a:tcPr marL="38100" marR="38100" marT="38100" marB="38100" anchor="ctr">
                     <a:lnL w="12700" cap="flat" cmpd="sng" algn="ctr">
                       <a:solidFill>
-                        <a:srgbClr val="d9dee6"/>
+                        <a:srgbClr val="D9DEE6"/>
                       </a:solidFill>
                       <a:prstDash val="solid"/>
                       <a:round/>
@@ -3005,7 +2956,7 @@
                     </a:lnL>
                     <a:lnR w="12700" cap="flat" cmpd="sng" algn="ctr">
                       <a:solidFill>
-                        <a:srgbClr val="d9dee6"/>
+                        <a:srgbClr val="D9DEE6"/>
                       </a:solidFill>
                       <a:prstDash val="solid"/>
                       <a:round/>
@@ -3014,7 +2965,7 @@
                     </a:lnR>
                     <a:lnT w="12700" cap="flat" cmpd="sng" algn="ctr">
                       <a:solidFill>
-                        <a:srgbClr val="d9dee6"/>
+                        <a:srgbClr val="D9DEE6"/>
                       </a:solidFill>
                       <a:prstDash val="solid"/>
                       <a:round/>
@@ -3023,7 +2974,7 @@
                     </a:lnT>
                     <a:lnB w="12700" cap="flat" cmpd="sng" algn="ctr">
                       <a:solidFill>
-                        <a:srgbClr val="d9dee6"/>
+                        <a:srgbClr val="D9DEE6"/>
                       </a:solidFill>
                       <a:prstDash val="solid"/>
                       <a:round/>
@@ -3031,15 +2982,21 @@
                       <a:tailEnd w="med" len="med"/>
                     </a:lnB>
                     <a:solidFill>
-                      <a:srgbClr val="ffffff"/>
+                      <a:srgbClr val="FFFFFF"/>
                     </a:solidFill>
                   </a:tcPr>
                 </a:tc>
+                <a:extLst>
+                  <a:ext uri="{0D108BD9-81ED-4DB2-BD59-A6C34878D82A}">
+                    <a16:rowId xmlns:a16="http://schemas.microsoft.com/office/drawing/2014/main" val="10001"/>
+                  </a:ext>
+                </a:extLst>
               </a:tr>
               <a:tr h="384048">
                 <a:tc>
                   <a:txBody>
-                    <a:bodyPr vert="horz" lIns="38100" tIns="38100" rIns="38100" bIns="38100" anchor="ctr" anchorCtr="0"/>
+                    <a:bodyPr/>
+                    <a:lstStyle/>
                     <a:p>
                       <a:pPr marL="0" indent="0" algn="l">
                         <a:buNone/>
@@ -3048,7 +3005,7 @@
                       <a:r>
                         <a:rPr lang="en-US" sz="1200" b="1">
                           <a:solidFill>
-                            <a:srgbClr val="ffffff"/>
+                            <a:srgbClr val="FFFFFF"/>
                           </a:solidFill>
                           <a:latin typeface="맑은 고딕"/>
                           <a:ea typeface="맑은 고딕"/>
@@ -3066,7 +3023,7 @@
                   <a:tcPr marL="38100" marR="38100" marT="38100" marB="38100" anchor="ctr">
                     <a:lnL w="12700" cap="flat" cmpd="sng" algn="ctr">
                       <a:solidFill>
-                        <a:srgbClr val="d9dee6"/>
+                        <a:srgbClr val="D9DEE6"/>
                       </a:solidFill>
                       <a:prstDash val="solid"/>
                       <a:round/>
@@ -3075,7 +3032,7 @@
                     </a:lnL>
                     <a:lnR w="12700" cap="flat" cmpd="sng" algn="ctr">
                       <a:solidFill>
-                        <a:srgbClr val="d9dee6"/>
+                        <a:srgbClr val="D9DEE6"/>
                       </a:solidFill>
                       <a:prstDash val="solid"/>
                       <a:round/>
@@ -3084,7 +3041,7 @@
                     </a:lnR>
                     <a:lnT w="12700" cap="flat" cmpd="sng" algn="ctr">
                       <a:solidFill>
-                        <a:srgbClr val="d9dee6"/>
+                        <a:srgbClr val="D9DEE6"/>
                       </a:solidFill>
                       <a:prstDash val="solid"/>
                       <a:round/>
@@ -3093,7 +3050,7 @@
                     </a:lnT>
                     <a:lnB w="12700" cap="flat" cmpd="sng" algn="ctr">
                       <a:solidFill>
-                        <a:srgbClr val="d9dee6"/>
+                        <a:srgbClr val="D9DEE6"/>
                       </a:solidFill>
                       <a:prstDash val="solid"/>
                       <a:round/>
@@ -3101,13 +3058,14 @@
                       <a:tailEnd w="med" len="med"/>
                     </a:lnB>
                     <a:solidFill>
-                      <a:srgbClr val="16223b"/>
+                      <a:srgbClr val="16223B"/>
                     </a:solidFill>
                   </a:tcPr>
                 </a:tc>
                 <a:tc>
                   <a:txBody>
-                    <a:bodyPr vert="horz" lIns="38100" tIns="38100" rIns="38100" bIns="38100" anchor="ctr" anchorCtr="0"/>
+                    <a:bodyPr/>
+                    <a:lstStyle/>
                     <a:p>
                       <a:pPr marL="0" indent="0" algn="l">
                         <a:buNone/>
@@ -3116,7 +3074,7 @@
                       <a:r>
                         <a:rPr lang="en-US" sz="1200">
                           <a:solidFill>
-                            <a:srgbClr val="1f2637"/>
+                            <a:srgbClr val="1F2637"/>
                           </a:solidFill>
                           <a:latin typeface="맑은 고딕"/>
                           <a:ea typeface="맑은 고딕"/>
@@ -3134,7 +3092,7 @@
                   <a:tcPr marL="38100" marR="38100" marT="38100" marB="38100" anchor="ctr">
                     <a:lnL w="12700" cap="flat" cmpd="sng" algn="ctr">
                       <a:solidFill>
-                        <a:srgbClr val="d9dee6"/>
+                        <a:srgbClr val="D9DEE6"/>
                       </a:solidFill>
                       <a:prstDash val="solid"/>
                       <a:round/>
@@ -3143,7 +3101,7 @@
                     </a:lnL>
                     <a:lnR w="12700" cap="flat" cmpd="sng" algn="ctr">
                       <a:solidFill>
-                        <a:srgbClr val="d9dee6"/>
+                        <a:srgbClr val="D9DEE6"/>
                       </a:solidFill>
                       <a:prstDash val="solid"/>
                       <a:round/>
@@ -3152,7 +3110,7 @@
                     </a:lnR>
                     <a:lnT w="12700" cap="flat" cmpd="sng" algn="ctr">
                       <a:solidFill>
-                        <a:srgbClr val="d9dee6"/>
+                        <a:srgbClr val="D9DEE6"/>
                       </a:solidFill>
                       <a:prstDash val="solid"/>
                       <a:round/>
@@ -3161,7 +3119,7 @@
                     </a:lnT>
                     <a:lnB w="12700" cap="flat" cmpd="sng" algn="ctr">
                       <a:solidFill>
-                        <a:srgbClr val="d9dee6"/>
+                        <a:srgbClr val="D9DEE6"/>
                       </a:solidFill>
                       <a:prstDash val="solid"/>
                       <a:round/>
@@ -3169,15 +3127,21 @@
                       <a:tailEnd w="med" len="med"/>
                     </a:lnB>
                     <a:solidFill>
-                      <a:srgbClr val="ffffff"/>
+                      <a:srgbClr val="FFFFFF"/>
                     </a:solidFill>
                   </a:tcPr>
                 </a:tc>
+                <a:extLst>
+                  <a:ext uri="{0D108BD9-81ED-4DB2-BD59-A6C34878D82A}">
+                    <a16:rowId xmlns:a16="http://schemas.microsoft.com/office/drawing/2014/main" val="10002"/>
+                  </a:ext>
+                </a:extLst>
               </a:tr>
               <a:tr h="384048">
                 <a:tc>
                   <a:txBody>
-                    <a:bodyPr vert="horz" lIns="38100" tIns="38100" rIns="38100" bIns="38100" anchor="ctr" anchorCtr="0"/>
+                    <a:bodyPr/>
+                    <a:lstStyle/>
                     <a:p>
                       <a:pPr marL="0" indent="0" algn="l">
                         <a:buNone/>
@@ -3186,7 +3150,7 @@
                       <a:r>
                         <a:rPr lang="en-US" sz="1200" b="1">
                           <a:solidFill>
-                            <a:srgbClr val="ffffff"/>
+                            <a:srgbClr val="FFFFFF"/>
                           </a:solidFill>
                           <a:latin typeface="맑은 고딕"/>
                           <a:ea typeface="맑은 고딕"/>
@@ -3204,7 +3168,7 @@
                   <a:tcPr marL="38100" marR="38100" marT="38100" marB="38100" anchor="ctr">
                     <a:lnL w="12700" cap="flat" cmpd="sng" algn="ctr">
                       <a:solidFill>
-                        <a:srgbClr val="d9dee6"/>
+                        <a:srgbClr val="D9DEE6"/>
                       </a:solidFill>
                       <a:prstDash val="solid"/>
                       <a:round/>
@@ -3213,7 +3177,7 @@
                     </a:lnL>
                     <a:lnR w="12700" cap="flat" cmpd="sng" algn="ctr">
                       <a:solidFill>
-                        <a:srgbClr val="d9dee6"/>
+                        <a:srgbClr val="D9DEE6"/>
                       </a:solidFill>
                       <a:prstDash val="solid"/>
                       <a:round/>
@@ -3222,7 +3186,7 @@
                     </a:lnR>
                     <a:lnT w="12700" cap="flat" cmpd="sng" algn="ctr">
                       <a:solidFill>
-                        <a:srgbClr val="d9dee6"/>
+                        <a:srgbClr val="D9DEE6"/>
                       </a:solidFill>
                       <a:prstDash val="solid"/>
                       <a:round/>
@@ -3231,7 +3195,7 @@
                     </a:lnT>
                     <a:lnB w="12700" cap="flat" cmpd="sng" algn="ctr">
                       <a:solidFill>
-                        <a:srgbClr val="d9dee6"/>
+                        <a:srgbClr val="D9DEE6"/>
                       </a:solidFill>
                       <a:prstDash val="solid"/>
                       <a:round/>
@@ -3239,13 +3203,14 @@
                       <a:tailEnd w="med" len="med"/>
                     </a:lnB>
                     <a:solidFill>
-                      <a:srgbClr val="16223b"/>
+                      <a:srgbClr val="16223B"/>
                     </a:solidFill>
                   </a:tcPr>
                 </a:tc>
                 <a:tc>
                   <a:txBody>
-                    <a:bodyPr vert="horz" lIns="38100" tIns="38100" rIns="38100" bIns="38100" anchor="ctr" anchorCtr="0"/>
+                    <a:bodyPr/>
+                    <a:lstStyle/>
                     <a:p>
                       <a:pPr marL="0" indent="0" algn="l">
                         <a:buNone/>
@@ -3254,7 +3219,7 @@
                       <a:r>
                         <a:rPr lang="en-US" sz="1200">
                           <a:solidFill>
-                            <a:srgbClr val="1f2637"/>
+                            <a:srgbClr val="1F2637"/>
                           </a:solidFill>
                           <a:latin typeface="맑은 고딕"/>
                           <a:ea typeface="맑은 고딕"/>
@@ -3272,7 +3237,7 @@
                   <a:tcPr marL="38100" marR="38100" marT="38100" marB="38100" anchor="ctr">
                     <a:lnL w="12700" cap="flat" cmpd="sng" algn="ctr">
                       <a:solidFill>
-                        <a:srgbClr val="d9dee6"/>
+                        <a:srgbClr val="D9DEE6"/>
                       </a:solidFill>
                       <a:prstDash val="solid"/>
                       <a:round/>
@@ -3281,7 +3246,7 @@
                     </a:lnL>
                     <a:lnR w="12700" cap="flat" cmpd="sng" algn="ctr">
                       <a:solidFill>
-                        <a:srgbClr val="d9dee6"/>
+                        <a:srgbClr val="D9DEE6"/>
                       </a:solidFill>
                       <a:prstDash val="solid"/>
                       <a:round/>
@@ -3290,7 +3255,7 @@
                     </a:lnR>
                     <a:lnT w="12700" cap="flat" cmpd="sng" algn="ctr">
                       <a:solidFill>
-                        <a:srgbClr val="d9dee6"/>
+                        <a:srgbClr val="D9DEE6"/>
                       </a:solidFill>
                       <a:prstDash val="solid"/>
                       <a:round/>
@@ -3299,7 +3264,7 @@
                     </a:lnT>
                     <a:lnB w="12700" cap="flat" cmpd="sng" algn="ctr">
                       <a:solidFill>
-                        <a:srgbClr val="d9dee6"/>
+                        <a:srgbClr val="D9DEE6"/>
                       </a:solidFill>
                       <a:prstDash val="solid"/>
                       <a:round/>
@@ -3307,10 +3272,15 @@
                       <a:tailEnd w="med" len="med"/>
                     </a:lnB>
                     <a:solidFill>
-                      <a:srgbClr val="ffffff"/>
+                      <a:srgbClr val="FFFFFF"/>
                     </a:solidFill>
                   </a:tcPr>
                 </a:tc>
+                <a:extLst>
+                  <a:ext uri="{0D108BD9-81ED-4DB2-BD59-A6C34878D82A}">
+                    <a16:rowId xmlns:a16="http://schemas.microsoft.com/office/drawing/2014/main" val="10003"/>
+                  </a:ext>
+                </a:extLst>
               </a:tr>
             </a:tbl>
           </a:graphicData>
@@ -3333,11 +3303,11 @@
             </a:avLst>
           </a:prstGeom>
           <a:solidFill>
-            <a:srgbClr val="f4f6fa"/>
+            <a:srgbClr val="F4F6FA"/>
           </a:solidFill>
           <a:ln w="12700">
             <a:solidFill>
-              <a:srgbClr val="d9dee6"/>
+              <a:srgbClr val="D9DEE6"/>
             </a:solidFill>
             <a:prstDash val="solid"/>
           </a:ln>
@@ -3412,7 +3382,7 @@
             <a:r>
               <a:rPr lang="en-US" sz="1100" i="1">
                 <a:solidFill>
-                  <a:srgbClr val="6c7686"/>
+                  <a:srgbClr val="6C7686"/>
                 </a:solidFill>
                 <a:latin typeface="맑은 고딕"/>
                 <a:ea typeface="맑은 고딕"/>
@@ -3452,7 +3422,7 @@
             <a:r>
               <a:rPr lang="en-US" sz="900">
                 <a:solidFill>
-                  <a:srgbClr val="6c7686"/>
+                  <a:srgbClr val="6C7686"/>
                 </a:solidFill>
                 <a:latin typeface="맑은 고딕"/>
                 <a:ea typeface="맑은 고딕"/>
@@ -3492,7 +3462,7 @@
             <a:r>
               <a:rPr lang="en-US" sz="900">
                 <a:solidFill>
-                  <a:srgbClr val="6c7686"/>
+                  <a:srgbClr val="6C7686"/>
                 </a:solidFill>
                 <a:latin typeface="맑은 고딕"/>
                 <a:ea typeface="맑은 고딕"/>
@@ -3509,11 +3479,11 @@
   <p:clrMapOvr>
     <a:masterClrMapping/>
   </p:clrMapOvr>
-  <mc:AlternateContent xmlns:mc="http://schemas.openxmlformats.org/markup-compatibility/2006">
-    <mc:Choice xmlns:p14="http://schemas.microsoft.com/office/powerpoint/2010/main" Requires="p14">
-      <p:transition xmlns:mc="http://schemas.openxmlformats.org/markup-compatibility/2006" xmlns:p14="http://schemas.microsoft.com/office/powerpoint/2010/main" mc:Ignorable="p14" p14:dur="500"/>
+  <mc:AlternateContent xmlns:mc="http://schemas.openxmlformats.org/markup-compatibility/2006" xmlns:p14="http://schemas.microsoft.com/office/powerpoint/2010/main">
+    <mc:Choice Requires="p14">
+      <p:transition/>
     </mc:Choice>
-    <mc:Fallback>
+    <mc:Fallback xmlns:dsp="http://schemas.microsoft.com/office/drawing/2008/diagram" xmlns:dgm="http://schemas.openxmlformats.org/drawingml/2006/diagram" xmlns:c="http://schemas.openxmlformats.org/drawingml/2006/chart" xmlns="">
       <p:transition/>
     </mc:Fallback>
   </mc:AlternateContent>
@@ -4361,7 +4331,7 @@
     <mc:Choice Requires="p14">
       <p:transition/>
     </mc:Choice>
-    <mc:Fallback xmlns:dsp="http://schemas.microsoft.com/office/drawing/2008/diagram" xmlns:dgm="http://schemas.openxmlformats.org/drawingml/2006/diagram" xmlns:c="http://schemas.openxmlformats.org/drawingml/2006/chart" xmlns="">
+    <mc:Fallback xmlns="" xmlns:c="http://schemas.openxmlformats.org/drawingml/2006/chart" xmlns:dgm="http://schemas.openxmlformats.org/drawingml/2006/diagram" xmlns:dsp="http://schemas.microsoft.com/office/drawing/2008/diagram">
       <p:transition/>
     </mc:Fallback>
   </mc:AlternateContent>
@@ -5658,7 +5628,7 @@
     <mc:Choice Requires="p14">
       <p:transition/>
     </mc:Choice>
-    <mc:Fallback xmlns:dsp="http://schemas.microsoft.com/office/drawing/2008/diagram" xmlns:dgm="http://schemas.openxmlformats.org/drawingml/2006/diagram" xmlns:c="http://schemas.openxmlformats.org/drawingml/2006/chart" xmlns="">
+    <mc:Fallback xmlns="" xmlns:c="http://schemas.openxmlformats.org/drawingml/2006/chart" xmlns:dgm="http://schemas.openxmlformats.org/drawingml/2006/diagram" xmlns:dsp="http://schemas.microsoft.com/office/drawing/2008/diagram">
       <p:transition/>
     </mc:Fallback>
   </mc:AlternateContent>
@@ -6839,7 +6809,7 @@
     <mc:Choice Requires="p14">
       <p:transition/>
     </mc:Choice>
-    <mc:Fallback xmlns:dsp="http://schemas.microsoft.com/office/drawing/2008/diagram" xmlns:dgm="http://schemas.openxmlformats.org/drawingml/2006/diagram" xmlns:c="http://schemas.openxmlformats.org/drawingml/2006/chart" xmlns="">
+    <mc:Fallback xmlns="" xmlns:c="http://schemas.openxmlformats.org/drawingml/2006/chart" xmlns:dgm="http://schemas.openxmlformats.org/drawingml/2006/diagram" xmlns:dsp="http://schemas.microsoft.com/office/drawing/2008/diagram">
       <p:transition/>
     </mc:Fallback>
   </mc:AlternateContent>
@@ -6847,13 +6817,14 @@
 </file>
 
 <file path=ppt/slides/slide15.xml><?xml version="1.0" encoding="utf-8"?>
-<p:sld xmlns:r="http://schemas.openxmlformats.org/officeDocument/2006/relationships" xmlns:c="http://schemas.openxmlformats.org/drawingml/2006/chart" xmlns:a="http://schemas.openxmlformats.org/drawingml/2006/main" xmlns:dgm="http://schemas.openxmlformats.org/drawingml/2006/diagram" xmlns:dsp="http://schemas.microsoft.com/office/drawing/2008/diagram" xmlns:p="http://schemas.openxmlformats.org/presentationml/2006/main">
+<p:sld xmlns:a="http://schemas.openxmlformats.org/drawingml/2006/main" xmlns:r="http://schemas.openxmlformats.org/officeDocument/2006/relationships" xmlns:p="http://schemas.openxmlformats.org/presentationml/2006/main">
   <p:cSld>
     <p:bg>
-      <p:bgPr shadeToTitle="0">
+      <p:bgPr>
         <a:solidFill>
-          <a:srgbClr val="ffffff"/>
+          <a:srgbClr val="FFFFFF"/>
         </a:solidFill>
+        <a:effectLst/>
       </p:bgPr>
     </p:bg>
     <p:spTree>
@@ -6898,7 +6869,7 @@
             <a:r>
               <a:rPr lang="ko-KR" altLang="en-US" sz="1200" b="1" spc="200">
                 <a:solidFill>
-                  <a:srgbClr val="c8622e"/>
+                  <a:srgbClr val="C8622E"/>
                 </a:solidFill>
                 <a:latin typeface="맑은 고딕"/>
                 <a:ea typeface="맑은 고딕"/>
@@ -6906,14 +6877,6 @@
               </a:rPr>
               <a:t>04  PROJECT — PulseCity</a:t>
             </a:r>
-            <a:endParaRPr lang="ko-KR" altLang="en-US" sz="1200" b="1" spc="200">
-              <a:solidFill>
-                <a:srgbClr val="c8622e"/>
-              </a:solidFill>
-              <a:latin typeface="맑은 고딕"/>
-              <a:ea typeface="맑은 고딕"/>
-              <a:cs typeface="맑은 고딕"/>
-            </a:endParaRPr>
           </a:p>
         </p:txBody>
       </p:sp>
@@ -6945,7 +6908,7 @@
             <a:r>
               <a:rPr lang="ko-KR" altLang="en-US" sz="2900" b="1">
                 <a:solidFill>
-                  <a:srgbClr val="1f2637"/>
+                  <a:srgbClr val="1F2637"/>
                 </a:solidFill>
                 <a:latin typeface="맑은 고딕"/>
                 <a:ea typeface="맑은 고딕"/>
@@ -6953,14 +6916,6 @@
               </a:rPr>
               <a:t>PulseCity</a:t>
             </a:r>
-            <a:endParaRPr lang="ko-KR" altLang="en-US" sz="2900" b="1">
-              <a:solidFill>
-                <a:srgbClr val="1f2637"/>
-              </a:solidFill>
-              <a:latin typeface="맑은 고딕"/>
-              <a:ea typeface="맑은 고딕"/>
-              <a:cs typeface="맑은 고딕"/>
-            </a:endParaRPr>
           </a:p>
         </p:txBody>
       </p:sp>
@@ -6992,7 +6947,7 @@
             <a:r>
               <a:rPr lang="ko-KR" altLang="en-US" sz="1350">
                 <a:solidFill>
-                  <a:srgbClr val="24324f"/>
+                  <a:srgbClr val="24324F"/>
                 </a:solidFill>
                 <a:latin typeface="맑은 고딕"/>
                 <a:ea typeface="맑은 고딕"/>
@@ -7000,14 +6955,6 @@
               </a:rPr>
               <a:t>근미래의 거대도시에서 용병이 되어 의뢰를 해결하고 던전을 클리어하는 다중 접속 슈팅 RPG</a:t>
             </a:r>
-            <a:endParaRPr lang="ko-KR" altLang="en-US" sz="1350">
-              <a:solidFill>
-                <a:srgbClr val="24324f"/>
-              </a:solidFill>
-              <a:latin typeface="맑은 고딕"/>
-              <a:ea typeface="맑은 고딕"/>
-              <a:cs typeface="맑은 고딕"/>
-            </a:endParaRPr>
           </a:p>
         </p:txBody>
       </p:sp>
@@ -7026,14 +6973,28 @@
         <a:graphic>
           <a:graphicData uri="http://schemas.openxmlformats.org/drawingml/2006/table">
             <a:tbl>
+              <a:tblPr/>
               <a:tblGrid>
-                <a:gridCol w="1554480"/>
-                <a:gridCol w="4389120"/>
+                <a:gridCol w="1554480">
+                  <a:extLst>
+                    <a:ext uri="{9D8B030D-6E8A-4147-A177-3AD203B41FA5}">
+                      <a16:colId xmlns:a16="http://schemas.microsoft.com/office/drawing/2014/main" val="20000"/>
+                    </a:ext>
+                  </a:extLst>
+                </a:gridCol>
+                <a:gridCol w="4389120">
+                  <a:extLst>
+                    <a:ext uri="{9D8B030D-6E8A-4147-A177-3AD203B41FA5}">
+                      <a16:colId xmlns:a16="http://schemas.microsoft.com/office/drawing/2014/main" val="20001"/>
+                    </a:ext>
+                  </a:extLst>
+                </a:gridCol>
               </a:tblGrid>
               <a:tr h="384048">
                 <a:tc>
                   <a:txBody>
-                    <a:bodyPr vert="horz" lIns="91440" tIns="36576" rIns="73152" bIns="36576" anchor="ctr" anchorCtr="0"/>
+                    <a:bodyPr/>
+                    <a:lstStyle/>
                     <a:p>
                       <a:pPr marL="0" indent="0" algn="l">
                         <a:buNone/>
@@ -7042,7 +7003,7 @@
                       <a:r>
                         <a:rPr lang="ko-KR" altLang="en-US" sz="1200" b="1">
                           <a:solidFill>
-                            <a:srgbClr val="ffffff"/>
+                            <a:srgbClr val="FFFFFF"/>
                           </a:solidFill>
                           <a:latin typeface="맑은 고딕"/>
                           <a:ea typeface="맑은 고딕"/>
@@ -7050,20 +7011,12 @@
                         </a:rPr>
                         <a:t>장르</a:t>
                       </a:r>
-                      <a:endParaRPr lang="ko-KR" altLang="en-US" sz="1200" b="1">
-                        <a:solidFill>
-                          <a:srgbClr val="ffffff"/>
-                        </a:solidFill>
-                        <a:latin typeface="맑은 고딕"/>
-                        <a:ea typeface="맑은 고딕"/>
-                        <a:cs typeface="맑은 고딕"/>
-                      </a:endParaRPr>
                     </a:p>
                   </a:txBody>
-                  <a:tcPr marL="91440" marR="73152" marT="36576" marB="36576" anchor="ctr">
+                  <a:tcPr marR="73152" marT="36576" marB="36576" anchor="ctr">
                     <a:lnL w="12700" cap="flat" cmpd="sng" algn="ctr">
                       <a:solidFill>
-                        <a:srgbClr val="d9dee6"/>
+                        <a:srgbClr val="D9DEE6"/>
                       </a:solidFill>
                       <a:prstDash val="solid"/>
                       <a:round/>
@@ -7072,7 +7025,7 @@
                     </a:lnL>
                     <a:lnR w="12700" cap="flat" cmpd="sng" algn="ctr">
                       <a:solidFill>
-                        <a:srgbClr val="d9dee6"/>
+                        <a:srgbClr val="D9DEE6"/>
                       </a:solidFill>
                       <a:prstDash val="solid"/>
                       <a:round/>
@@ -7081,7 +7034,7 @@
                     </a:lnR>
                     <a:lnT w="12700" cap="flat" cmpd="sng" algn="ctr">
                       <a:solidFill>
-                        <a:srgbClr val="d9dee6"/>
+                        <a:srgbClr val="D9DEE6"/>
                       </a:solidFill>
                       <a:prstDash val="solid"/>
                       <a:round/>
@@ -7090,7 +7043,7 @@
                     </a:lnT>
                     <a:lnB w="12700" cap="flat" cmpd="sng" algn="ctr">
                       <a:solidFill>
-                        <a:srgbClr val="d9dee6"/>
+                        <a:srgbClr val="D9DEE6"/>
                       </a:solidFill>
                       <a:prstDash val="solid"/>
                       <a:round/>
@@ -7098,13 +7051,14 @@
                       <a:tailEnd w="med" len="med"/>
                     </a:lnB>
                     <a:solidFill>
-                      <a:srgbClr val="16223b"/>
+                      <a:srgbClr val="16223B"/>
                     </a:solidFill>
                   </a:tcPr>
                 </a:tc>
                 <a:tc>
                   <a:txBody>
-                    <a:bodyPr vert="horz" lIns="91440" tIns="36576" rIns="73152" bIns="36576" anchor="ctr" anchorCtr="0"/>
+                    <a:bodyPr/>
+                    <a:lstStyle/>
                     <a:p>
                       <a:pPr marL="0" indent="0" algn="l">
                         <a:buNone/>
@@ -7113,7 +7067,7 @@
                       <a:r>
                         <a:rPr lang="ko-KR" altLang="en-US" sz="1200">
                           <a:solidFill>
-                            <a:srgbClr val="1f2637"/>
+                            <a:srgbClr val="1F2637"/>
                           </a:solidFill>
                           <a:latin typeface="맑은 고딕"/>
                           <a:ea typeface="맑은 고딕"/>
@@ -7121,20 +7075,12 @@
                         </a:rPr>
                         <a:t>다중 접속 RPG · 슈터 · 오픈월드</a:t>
                       </a:r>
-                      <a:endParaRPr lang="ko-KR" altLang="en-US" sz="1200">
-                        <a:solidFill>
-                          <a:srgbClr val="1f2637"/>
-                        </a:solidFill>
-                        <a:latin typeface="맑은 고딕"/>
-                        <a:ea typeface="맑은 고딕"/>
-                        <a:cs typeface="맑은 고딕"/>
-                      </a:endParaRPr>
                     </a:p>
                   </a:txBody>
-                  <a:tcPr marL="91440" marR="73152" marT="36576" marB="36576" anchor="ctr">
+                  <a:tcPr marR="73152" marT="36576" marB="36576" anchor="ctr">
                     <a:lnL w="12700" cap="flat" cmpd="sng" algn="ctr">
                       <a:solidFill>
-                        <a:srgbClr val="d9dee6"/>
+                        <a:srgbClr val="D9DEE6"/>
                       </a:solidFill>
                       <a:prstDash val="solid"/>
                       <a:round/>
@@ -7143,7 +7089,7 @@
                     </a:lnL>
                     <a:lnR w="12700" cap="flat" cmpd="sng" algn="ctr">
                       <a:solidFill>
-                        <a:srgbClr val="d9dee6"/>
+                        <a:srgbClr val="D9DEE6"/>
                       </a:solidFill>
                       <a:prstDash val="solid"/>
                       <a:round/>
@@ -7152,7 +7098,7 @@
                     </a:lnR>
                     <a:lnT w="12700" cap="flat" cmpd="sng" algn="ctr">
                       <a:solidFill>
-                        <a:srgbClr val="d9dee6"/>
+                        <a:srgbClr val="D9DEE6"/>
                       </a:solidFill>
                       <a:prstDash val="solid"/>
                       <a:round/>
@@ -7161,7 +7107,7 @@
                     </a:lnT>
                     <a:lnB w="12700" cap="flat" cmpd="sng" algn="ctr">
                       <a:solidFill>
-                        <a:srgbClr val="d9dee6"/>
+                        <a:srgbClr val="D9DEE6"/>
                       </a:solidFill>
                       <a:prstDash val="solid"/>
                       <a:round/>
@@ -7169,15 +7115,21 @@
                       <a:tailEnd w="med" len="med"/>
                     </a:lnB>
                     <a:solidFill>
-                      <a:srgbClr val="ffffff"/>
+                      <a:srgbClr val="FFFFFF"/>
                     </a:solidFill>
                   </a:tcPr>
                 </a:tc>
+                <a:extLst>
+                  <a:ext uri="{0D108BD9-81ED-4DB2-BD59-A6C34878D82A}">
+                    <a16:rowId xmlns:a16="http://schemas.microsoft.com/office/drawing/2014/main" val="10000"/>
+                  </a:ext>
+                </a:extLst>
               </a:tr>
               <a:tr h="384048">
                 <a:tc>
                   <a:txBody>
-                    <a:bodyPr vert="horz" lIns="91440" tIns="36576" rIns="73152" bIns="36576" anchor="ctr" anchorCtr="0"/>
+                    <a:bodyPr/>
+                    <a:lstStyle/>
                     <a:p>
                       <a:pPr marL="0" indent="0" algn="l">
                         <a:buNone/>
@@ -7186,7 +7138,7 @@
                       <a:r>
                         <a:rPr lang="ko-KR" altLang="en-US" sz="1200" b="1">
                           <a:solidFill>
-                            <a:srgbClr val="ffffff"/>
+                            <a:srgbClr val="FFFFFF"/>
                           </a:solidFill>
                           <a:latin typeface="맑은 고딕"/>
                           <a:ea typeface="맑은 고딕"/>
@@ -7194,20 +7146,12 @@
                         </a:rPr>
                         <a:t>담당 역할</a:t>
                       </a:r>
-                      <a:endParaRPr lang="ko-KR" altLang="en-US" sz="1200" b="1">
-                        <a:solidFill>
-                          <a:srgbClr val="ffffff"/>
-                        </a:solidFill>
-                        <a:latin typeface="맑은 고딕"/>
-                        <a:ea typeface="맑은 고딕"/>
-                        <a:cs typeface="맑은 고딕"/>
-                      </a:endParaRPr>
                     </a:p>
                   </a:txBody>
-                  <a:tcPr marL="91440" marR="73152" marT="36576" marB="36576" anchor="ctr">
+                  <a:tcPr marR="73152" marT="36576" marB="36576" anchor="ctr">
                     <a:lnL w="12700" cap="flat" cmpd="sng" algn="ctr">
                       <a:solidFill>
-                        <a:srgbClr val="d9dee6"/>
+                        <a:srgbClr val="D9DEE6"/>
                       </a:solidFill>
                       <a:prstDash val="solid"/>
                       <a:round/>
@@ -7216,7 +7160,7 @@
                     </a:lnL>
                     <a:lnR w="12700" cap="flat" cmpd="sng" algn="ctr">
                       <a:solidFill>
-                        <a:srgbClr val="d9dee6"/>
+                        <a:srgbClr val="D9DEE6"/>
                       </a:solidFill>
                       <a:prstDash val="solid"/>
                       <a:round/>
@@ -7225,7 +7169,7 @@
                     </a:lnR>
                     <a:lnT w="12700" cap="flat" cmpd="sng" algn="ctr">
                       <a:solidFill>
-                        <a:srgbClr val="d9dee6"/>
+                        <a:srgbClr val="D9DEE6"/>
                       </a:solidFill>
                       <a:prstDash val="solid"/>
                       <a:round/>
@@ -7234,7 +7178,7 @@
                     </a:lnT>
                     <a:lnB w="12700" cap="flat" cmpd="sng" algn="ctr">
                       <a:solidFill>
-                        <a:srgbClr val="d9dee6"/>
+                        <a:srgbClr val="D9DEE6"/>
                       </a:solidFill>
                       <a:prstDash val="solid"/>
                       <a:round/>
@@ -7242,13 +7186,14 @@
                       <a:tailEnd w="med" len="med"/>
                     </a:lnB>
                     <a:solidFill>
-                      <a:srgbClr val="16223b"/>
+                      <a:srgbClr val="16223B"/>
                     </a:solidFill>
                   </a:tcPr>
                 </a:tc>
                 <a:tc>
                   <a:txBody>
-                    <a:bodyPr vert="horz" lIns="91440" tIns="36576" rIns="73152" bIns="36576" anchor="ctr" anchorCtr="0"/>
+                    <a:bodyPr/>
+                    <a:lstStyle/>
                     <a:p>
                       <a:pPr marL="0" indent="0" algn="l">
                         <a:buNone/>
@@ -7257,7 +7202,7 @@
                       <a:r>
                         <a:rPr lang="ko-KR" altLang="en-US" sz="1200">
                           <a:solidFill>
-                            <a:srgbClr val="1f2637"/>
+                            <a:srgbClr val="1F2637"/>
                           </a:solidFill>
                           <a:latin typeface="맑은 고딕"/>
                           <a:ea typeface="맑은 고딕"/>
@@ -7265,20 +7210,12 @@
                         </a:rPr>
                         <a:t>기획 + 서버 (3인 팀 · 졸업작품)</a:t>
                       </a:r>
-                      <a:endParaRPr lang="ko-KR" altLang="en-US" sz="1200">
-                        <a:solidFill>
-                          <a:srgbClr val="1f2637"/>
-                        </a:solidFill>
-                        <a:latin typeface="맑은 고딕"/>
-                        <a:ea typeface="맑은 고딕"/>
-                        <a:cs typeface="맑은 고딕"/>
-                      </a:endParaRPr>
                     </a:p>
                   </a:txBody>
-                  <a:tcPr marL="91440" marR="73152" marT="36576" marB="36576" anchor="ctr">
+                  <a:tcPr marR="73152" marT="36576" marB="36576" anchor="ctr">
                     <a:lnL w="12700" cap="flat" cmpd="sng" algn="ctr">
                       <a:solidFill>
-                        <a:srgbClr val="d9dee6"/>
+                        <a:srgbClr val="D9DEE6"/>
                       </a:solidFill>
                       <a:prstDash val="solid"/>
                       <a:round/>
@@ -7287,7 +7224,7 @@
                     </a:lnL>
                     <a:lnR w="12700" cap="flat" cmpd="sng" algn="ctr">
                       <a:solidFill>
-                        <a:srgbClr val="d9dee6"/>
+                        <a:srgbClr val="D9DEE6"/>
                       </a:solidFill>
                       <a:prstDash val="solid"/>
                       <a:round/>
@@ -7296,7 +7233,7 @@
                     </a:lnR>
                     <a:lnT w="12700" cap="flat" cmpd="sng" algn="ctr">
                       <a:solidFill>
-                        <a:srgbClr val="d9dee6"/>
+                        <a:srgbClr val="D9DEE6"/>
                       </a:solidFill>
                       <a:prstDash val="solid"/>
                       <a:round/>
@@ -7305,7 +7242,7 @@
                     </a:lnT>
                     <a:lnB w="12700" cap="flat" cmpd="sng" algn="ctr">
                       <a:solidFill>
-                        <a:srgbClr val="d9dee6"/>
+                        <a:srgbClr val="D9DEE6"/>
                       </a:solidFill>
                       <a:prstDash val="solid"/>
                       <a:round/>
@@ -7313,15 +7250,21 @@
                       <a:tailEnd w="med" len="med"/>
                     </a:lnB>
                     <a:solidFill>
-                      <a:srgbClr val="ffffff"/>
+                      <a:srgbClr val="FFFFFF"/>
                     </a:solidFill>
                   </a:tcPr>
                 </a:tc>
+                <a:extLst>
+                  <a:ext uri="{0D108BD9-81ED-4DB2-BD59-A6C34878D82A}">
+                    <a16:rowId xmlns:a16="http://schemas.microsoft.com/office/drawing/2014/main" val="10001"/>
+                  </a:ext>
+                </a:extLst>
               </a:tr>
               <a:tr h="384048">
                 <a:tc>
                   <a:txBody>
-                    <a:bodyPr vert="horz" lIns="91440" tIns="36576" rIns="73152" bIns="36576" anchor="ctr" anchorCtr="0"/>
+                    <a:bodyPr/>
+                    <a:lstStyle/>
                     <a:p>
                       <a:pPr marL="0" indent="0" algn="l">
                         <a:buNone/>
@@ -7330,7 +7273,7 @@
                       <a:r>
                         <a:rPr lang="ko-KR" altLang="en-US" sz="1200" b="1">
                           <a:solidFill>
-                            <a:srgbClr val="ffffff"/>
+                            <a:srgbClr val="FFFFFF"/>
                           </a:solidFill>
                           <a:latin typeface="맑은 고딕"/>
                           <a:ea typeface="맑은 고딕"/>
@@ -7338,20 +7281,12 @@
                         </a:rPr>
                         <a:t>수록 범위</a:t>
                       </a:r>
-                      <a:endParaRPr lang="ko-KR" altLang="en-US" sz="1200" b="1">
-                        <a:solidFill>
-                          <a:srgbClr val="ffffff"/>
-                        </a:solidFill>
-                        <a:latin typeface="맑은 고딕"/>
-                        <a:ea typeface="맑은 고딕"/>
-                        <a:cs typeface="맑은 고딕"/>
-                      </a:endParaRPr>
                     </a:p>
                   </a:txBody>
-                  <a:tcPr marL="91440" marR="73152" marT="36576" marB="36576" anchor="ctr">
+                  <a:tcPr marR="73152" marT="36576" marB="36576" anchor="ctr">
                     <a:lnL w="12700" cap="flat" cmpd="sng" algn="ctr">
                       <a:solidFill>
-                        <a:srgbClr val="d9dee6"/>
+                        <a:srgbClr val="D9DEE6"/>
                       </a:solidFill>
                       <a:prstDash val="solid"/>
                       <a:round/>
@@ -7360,7 +7295,7 @@
                     </a:lnL>
                     <a:lnR w="12700" cap="flat" cmpd="sng" algn="ctr">
                       <a:solidFill>
-                        <a:srgbClr val="d9dee6"/>
+                        <a:srgbClr val="D9DEE6"/>
                       </a:solidFill>
                       <a:prstDash val="solid"/>
                       <a:round/>
@@ -7369,7 +7304,7 @@
                     </a:lnR>
                     <a:lnT w="12700" cap="flat" cmpd="sng" algn="ctr">
                       <a:solidFill>
-                        <a:srgbClr val="d9dee6"/>
+                        <a:srgbClr val="D9DEE6"/>
                       </a:solidFill>
                       <a:prstDash val="solid"/>
                       <a:round/>
@@ -7378,7 +7313,7 @@
                     </a:lnT>
                     <a:lnB w="12700" cap="flat" cmpd="sng" algn="ctr">
                       <a:solidFill>
-                        <a:srgbClr val="d9dee6"/>
+                        <a:srgbClr val="D9DEE6"/>
                       </a:solidFill>
                       <a:prstDash val="solid"/>
                       <a:round/>
@@ -7386,13 +7321,14 @@
                       <a:tailEnd w="med" len="med"/>
                     </a:lnB>
                     <a:solidFill>
-                      <a:srgbClr val="16223b"/>
+                      <a:srgbClr val="16223B"/>
                     </a:solidFill>
                   </a:tcPr>
                 </a:tc>
                 <a:tc>
                   <a:txBody>
-                    <a:bodyPr vert="horz" lIns="91440" tIns="36576" rIns="73152" bIns="36576" anchor="ctr" anchorCtr="0"/>
+                    <a:bodyPr/>
+                    <a:lstStyle/>
                     <a:p>
                       <a:pPr marL="0" indent="0" algn="l">
                         <a:buNone/>
@@ -7401,7 +7337,7 @@
                       <a:r>
                         <a:rPr lang="ko-KR" altLang="en-US" sz="1200">
                           <a:solidFill>
-                            <a:srgbClr val="1f2637"/>
+                            <a:srgbClr val="1F2637"/>
                           </a:solidFill>
                           <a:latin typeface="맑은 고딕"/>
                           <a:ea typeface="맑은 고딕"/>
@@ -7409,20 +7345,12 @@
                         </a:rPr>
                         <a:t>던전 구조 · 몹 배치 · 직업군 설계</a:t>
                       </a:r>
-                      <a:endParaRPr lang="ko-KR" altLang="en-US" sz="1200">
-                        <a:solidFill>
-                          <a:srgbClr val="1f2637"/>
-                        </a:solidFill>
-                        <a:latin typeface="맑은 고딕"/>
-                        <a:ea typeface="맑은 고딕"/>
-                        <a:cs typeface="맑은 고딕"/>
-                      </a:endParaRPr>
                     </a:p>
                   </a:txBody>
-                  <a:tcPr marL="91440" marR="73152" marT="36576" marB="36576" anchor="ctr">
+                  <a:tcPr marR="73152" marT="36576" marB="36576" anchor="ctr">
                     <a:lnL w="12700" cap="flat" cmpd="sng" algn="ctr">
                       <a:solidFill>
-                        <a:srgbClr val="d9dee6"/>
+                        <a:srgbClr val="D9DEE6"/>
                       </a:solidFill>
                       <a:prstDash val="solid"/>
                       <a:round/>
@@ -7431,7 +7359,7 @@
                     </a:lnL>
                     <a:lnR w="12700" cap="flat" cmpd="sng" algn="ctr">
                       <a:solidFill>
-                        <a:srgbClr val="d9dee6"/>
+                        <a:srgbClr val="D9DEE6"/>
                       </a:solidFill>
                       <a:prstDash val="solid"/>
                       <a:round/>
@@ -7440,7 +7368,7 @@
                     </a:lnR>
                     <a:lnT w="12700" cap="flat" cmpd="sng" algn="ctr">
                       <a:solidFill>
-                        <a:srgbClr val="d9dee6"/>
+                        <a:srgbClr val="D9DEE6"/>
                       </a:solidFill>
                       <a:prstDash val="solid"/>
                       <a:round/>
@@ -7449,7 +7377,7 @@
                     </a:lnT>
                     <a:lnB w="12700" cap="flat" cmpd="sng" algn="ctr">
                       <a:solidFill>
-                        <a:srgbClr val="d9dee6"/>
+                        <a:srgbClr val="D9DEE6"/>
                       </a:solidFill>
                       <a:prstDash val="solid"/>
                       <a:round/>
@@ -7457,10 +7385,15 @@
                       <a:tailEnd w="med" len="med"/>
                     </a:lnB>
                     <a:solidFill>
-                      <a:srgbClr val="ffffff"/>
+                      <a:srgbClr val="FFFFFF"/>
                     </a:solidFill>
                   </a:tcPr>
                 </a:tc>
+                <a:extLst>
+                  <a:ext uri="{0D108BD9-81ED-4DB2-BD59-A6C34878D82A}">
+                    <a16:rowId xmlns:a16="http://schemas.microsoft.com/office/drawing/2014/main" val="10002"/>
+                  </a:ext>
+                </a:extLst>
               </a:tr>
             </a:tbl>
           </a:graphicData>
@@ -7483,11 +7416,11 @@
             </a:avLst>
           </a:prstGeom>
           <a:solidFill>
-            <a:srgbClr val="f4f6fa"/>
+            <a:srgbClr val="F4F6FA"/>
           </a:solidFill>
           <a:ln w="12700">
             <a:solidFill>
-              <a:srgbClr val="d9dee6"/>
+              <a:srgbClr val="D9DEE6"/>
             </a:solidFill>
             <a:prstDash val="solid"/>
           </a:ln>
@@ -7538,7 +7471,7 @@
             <a:r>
               <a:rPr lang="ko-KR" altLang="en-US" sz="1250" b="1">
                 <a:solidFill>
-                  <a:srgbClr val="1f2637"/>
+                  <a:srgbClr val="1F2637"/>
                 </a:solidFill>
                 <a:latin typeface="맑은 고딕"/>
                 <a:ea typeface="맑은 고딕"/>
@@ -7546,14 +7479,6 @@
               </a:rPr>
               <a:t>플레이 흐름</a:t>
             </a:r>
-            <a:endParaRPr lang="ko-KR" altLang="en-US" sz="1250" b="1">
-              <a:solidFill>
-                <a:srgbClr val="1f2637"/>
-              </a:solidFill>
-              <a:latin typeface="맑은 고딕"/>
-              <a:ea typeface="맑은 고딕"/>
-              <a:cs typeface="맑은 고딕"/>
-            </a:endParaRPr>
           </a:p>
         </p:txBody>
       </p:sp>
@@ -7574,11 +7499,11 @@
             </a:avLst>
           </a:prstGeom>
           <a:solidFill>
-            <a:srgbClr val="ffffff"/>
+            <a:srgbClr val="FFFFFF"/>
           </a:solidFill>
           <a:ln w="12700">
             <a:solidFill>
-              <a:srgbClr val="d9dee6"/>
+              <a:srgbClr val="D9DEE6"/>
             </a:solidFill>
             <a:prstDash val="solid"/>
           </a:ln>
@@ -7622,7 +7547,7 @@
             <a:r>
               <a:rPr lang="ko-KR" altLang="en-US" sz="1200" b="1">
                 <a:solidFill>
-                  <a:srgbClr val="c8622e"/>
+                  <a:srgbClr val="C8622E"/>
                 </a:solidFill>
                 <a:latin typeface="맑은 고딕"/>
                 <a:ea typeface="맑은 고딕"/>
@@ -7630,14 +7555,6 @@
               </a:rPr>
               <a:t>의뢰 수락</a:t>
             </a:r>
-            <a:endParaRPr lang="ko-KR" altLang="en-US" sz="1200" b="1">
-              <a:solidFill>
-                <a:srgbClr val="c8622e"/>
-              </a:solidFill>
-              <a:latin typeface="맑은 고딕"/>
-              <a:ea typeface="맑은 고딕"/>
-              <a:cs typeface="맑은 고딕"/>
-            </a:endParaRPr>
           </a:p>
         </p:txBody>
       </p:sp>
@@ -7672,7 +7589,7 @@
             <a:r>
               <a:rPr lang="ko-KR" altLang="en-US" sz="950">
                 <a:solidFill>
-                  <a:srgbClr val="6c7686"/>
+                  <a:srgbClr val="6C7686"/>
                 </a:solidFill>
                 <a:latin typeface="맑은 고딕"/>
                 <a:ea typeface="맑은 고딕"/>
@@ -7680,14 +7597,6 @@
               </a:rPr>
               <a:t>경찰 · 기업 · 갱단 · 개인 의뢰</a:t>
             </a:r>
-            <a:endParaRPr lang="ko-KR" altLang="en-US" sz="950">
-              <a:solidFill>
-                <a:srgbClr val="6c7686"/>
-              </a:solidFill>
-              <a:latin typeface="맑은 고딕"/>
-              <a:ea typeface="맑은 고딕"/>
-              <a:cs typeface="맑은 고딕"/>
-            </a:endParaRPr>
           </a:p>
         </p:txBody>
       </p:sp>
@@ -7719,7 +7628,7 @@
             <a:r>
               <a:rPr lang="ko-KR" altLang="en-US" sz="1600" b="1">
                 <a:solidFill>
-                  <a:srgbClr val="c8622e"/>
+                  <a:srgbClr val="C8622E"/>
                 </a:solidFill>
                 <a:latin typeface="맑은 고딕"/>
                 <a:ea typeface="맑은 고딕"/>
@@ -7727,14 +7636,6 @@
               </a:rPr>
               <a:t>→</a:t>
             </a:r>
-            <a:endParaRPr lang="ko-KR" altLang="en-US" sz="1600" b="1">
-              <a:solidFill>
-                <a:srgbClr val="c8622e"/>
-              </a:solidFill>
-              <a:latin typeface="맑은 고딕"/>
-              <a:ea typeface="맑은 고딕"/>
-              <a:cs typeface="맑은 고딕"/>
-            </a:endParaRPr>
           </a:p>
         </p:txBody>
       </p:sp>
@@ -7755,11 +7656,11 @@
             </a:avLst>
           </a:prstGeom>
           <a:solidFill>
-            <a:srgbClr val="ffffff"/>
+            <a:srgbClr val="FFFFFF"/>
           </a:solidFill>
           <a:ln w="12700">
             <a:solidFill>
-              <a:srgbClr val="d9dee6"/>
+              <a:srgbClr val="D9DEE6"/>
             </a:solidFill>
             <a:prstDash val="solid"/>
           </a:ln>
@@ -7803,7 +7704,7 @@
             <a:r>
               <a:rPr lang="ko-KR" altLang="en-US" sz="1200" b="1">
                 <a:solidFill>
-                  <a:srgbClr val="c8622e"/>
+                  <a:srgbClr val="C8622E"/>
                 </a:solidFill>
                 <a:latin typeface="맑은 고딕"/>
                 <a:ea typeface="맑은 고딕"/>
@@ -7811,14 +7712,6 @@
               </a:rPr>
               <a:t>던전 클리어</a:t>
             </a:r>
-            <a:endParaRPr lang="ko-KR" altLang="en-US" sz="1200" b="1">
-              <a:solidFill>
-                <a:srgbClr val="c8622e"/>
-              </a:solidFill>
-              <a:latin typeface="맑은 고딕"/>
-              <a:ea typeface="맑은 고딕"/>
-              <a:cs typeface="맑은 고딕"/>
-            </a:endParaRPr>
           </a:p>
         </p:txBody>
       </p:sp>
@@ -7853,7 +7746,7 @@
             <a:r>
               <a:rPr lang="ko-KR" altLang="en-US" sz="950">
                 <a:solidFill>
-                  <a:srgbClr val="6c7686"/>
+                  <a:srgbClr val="6C7686"/>
                 </a:solidFill>
                 <a:latin typeface="맑은 고딕"/>
                 <a:ea typeface="맑은 고딕"/>
@@ -7861,14 +7754,6 @@
               </a:rPr>
               <a:t>메인 의뢰는 던전 수행 필수</a:t>
             </a:r>
-            <a:endParaRPr lang="ko-KR" altLang="en-US" sz="950">
-              <a:solidFill>
-                <a:srgbClr val="6c7686"/>
-              </a:solidFill>
-              <a:latin typeface="맑은 고딕"/>
-              <a:ea typeface="맑은 고딕"/>
-              <a:cs typeface="맑은 고딕"/>
-            </a:endParaRPr>
           </a:p>
         </p:txBody>
       </p:sp>
@@ -7900,7 +7785,7 @@
             <a:r>
               <a:rPr lang="ko-KR" altLang="en-US" sz="1600" b="1">
                 <a:solidFill>
-                  <a:srgbClr val="c8622e"/>
+                  <a:srgbClr val="C8622E"/>
                 </a:solidFill>
                 <a:latin typeface="맑은 고딕"/>
                 <a:ea typeface="맑은 고딕"/>
@@ -7908,14 +7793,6 @@
               </a:rPr>
               <a:t>→</a:t>
             </a:r>
-            <a:endParaRPr lang="ko-KR" altLang="en-US" sz="1600" b="1">
-              <a:solidFill>
-                <a:srgbClr val="c8622e"/>
-              </a:solidFill>
-              <a:latin typeface="맑은 고딕"/>
-              <a:ea typeface="맑은 고딕"/>
-              <a:cs typeface="맑은 고딕"/>
-            </a:endParaRPr>
           </a:p>
         </p:txBody>
       </p:sp>
@@ -7936,11 +7813,11 @@
             </a:avLst>
           </a:prstGeom>
           <a:solidFill>
-            <a:srgbClr val="ffffff"/>
+            <a:srgbClr val="FFFFFF"/>
           </a:solidFill>
           <a:ln w="12700">
             <a:solidFill>
-              <a:srgbClr val="d9dee6"/>
+              <a:srgbClr val="D9DEE6"/>
             </a:solidFill>
             <a:prstDash val="solid"/>
           </a:ln>
@@ -7984,7 +7861,7 @@
             <a:r>
               <a:rPr lang="ko-KR" altLang="en-US" sz="1200" b="1">
                 <a:solidFill>
-                  <a:srgbClr val="c8622e"/>
+                  <a:srgbClr val="C8622E"/>
                 </a:solidFill>
                 <a:latin typeface="맑은 고딕"/>
                 <a:ea typeface="맑은 고딕"/>
@@ -7992,14 +7869,6 @@
               </a:rPr>
               <a:t>스토리 진행</a:t>
             </a:r>
-            <a:endParaRPr lang="ko-KR" altLang="en-US" sz="1200" b="1">
-              <a:solidFill>
-                <a:srgbClr val="c8622e"/>
-              </a:solidFill>
-              <a:latin typeface="맑은 고딕"/>
-              <a:ea typeface="맑은 고딕"/>
-              <a:cs typeface="맑은 고딕"/>
-            </a:endParaRPr>
           </a:p>
         </p:txBody>
       </p:sp>
@@ -8034,7 +7903,7 @@
             <a:r>
               <a:rPr lang="ko-KR" altLang="en-US" sz="950">
                 <a:solidFill>
-                  <a:srgbClr val="6c7686"/>
+                  <a:srgbClr val="6C7686"/>
                 </a:solidFill>
                 <a:latin typeface="맑은 고딕"/>
                 <a:ea typeface="맑은 고딕"/>
@@ -8042,14 +7911,6 @@
               </a:rPr>
               <a:t>메인스토리를 밀고 엔딩까지</a:t>
             </a:r>
-            <a:endParaRPr lang="ko-KR" altLang="en-US" sz="950">
-              <a:solidFill>
-                <a:srgbClr val="6c7686"/>
-              </a:solidFill>
-              <a:latin typeface="맑은 고딕"/>
-              <a:ea typeface="맑은 고딕"/>
-              <a:cs typeface="맑은 고딕"/>
-            </a:endParaRPr>
           </a:p>
         </p:txBody>
       </p:sp>
@@ -8070,11 +7931,11 @@
             </a:avLst>
           </a:prstGeom>
           <a:solidFill>
-            <a:srgbClr val="f4f6fa"/>
+            <a:srgbClr val="F4F6FA"/>
           </a:solidFill>
           <a:ln w="12700">
             <a:solidFill>
-              <a:srgbClr val="d9dee6"/>
+              <a:srgbClr val="D9DEE6"/>
             </a:solidFill>
             <a:prstDash val="solid"/>
           </a:ln>
@@ -8149,7 +8010,7 @@
             <a:r>
               <a:rPr lang="ko-KR" altLang="en-US" sz="1100" i="1">
                 <a:solidFill>
-                  <a:srgbClr val="6c7686"/>
+                  <a:srgbClr val="6C7686"/>
                 </a:solidFill>
                 <a:latin typeface="맑은 고딕"/>
                 <a:ea typeface="맑은 고딕"/>
@@ -8157,14 +8018,6 @@
               </a:rPr>
               <a:t>컨셉 아트 — 용병집단에 소속된 플레이어</a:t>
             </a:r>
-            <a:endParaRPr lang="ko-KR" altLang="en-US" sz="1100" i="1">
-              <a:solidFill>
-                <a:srgbClr val="6c7686"/>
-              </a:solidFill>
-              <a:latin typeface="맑은 고딕"/>
-              <a:ea typeface="맑은 고딕"/>
-              <a:cs typeface="맑은 고딕"/>
-            </a:endParaRPr>
           </a:p>
         </p:txBody>
       </p:sp>
@@ -8196,7 +8049,7 @@
             <a:r>
               <a:rPr lang="ko-KR" altLang="en-US" sz="900">
                 <a:solidFill>
-                  <a:srgbClr val="6c7686"/>
+                  <a:srgbClr val="6C7686"/>
                 </a:solidFill>
                 <a:latin typeface="맑은 고딕"/>
                 <a:ea typeface="맑은 고딕"/>
@@ -8204,14 +8057,6 @@
               </a:rPr>
               <a:t>진성준  ·  게임 시스템 기획 포트폴리오</a:t>
             </a:r>
-            <a:endParaRPr lang="ko-KR" altLang="en-US" sz="900">
-              <a:solidFill>
-                <a:srgbClr val="6c7686"/>
-              </a:solidFill>
-              <a:latin typeface="맑은 고딕"/>
-              <a:ea typeface="맑은 고딕"/>
-              <a:cs typeface="맑은 고딕"/>
-            </a:endParaRPr>
           </a:p>
         </p:txBody>
       </p:sp>
@@ -8243,7 +8088,7 @@
             <a:r>
               <a:rPr lang="ko-KR" altLang="en-US" sz="900">
                 <a:solidFill>
-                  <a:srgbClr val="6c7686"/>
+                  <a:srgbClr val="6C7686"/>
                 </a:solidFill>
                 <a:latin typeface="맑은 고딕"/>
                 <a:ea typeface="맑은 고딕"/>
@@ -8251,14 +8096,6 @@
               </a:rPr>
               <a:t>15</a:t>
             </a:r>
-            <a:endParaRPr lang="ko-KR" altLang="en-US" sz="900">
-              <a:solidFill>
-                <a:srgbClr val="6c7686"/>
-              </a:solidFill>
-              <a:latin typeface="맑은 고딕"/>
-              <a:ea typeface="맑은 고딕"/>
-              <a:cs typeface="맑은 고딕"/>
-            </a:endParaRPr>
           </a:p>
         </p:txBody>
       </p:sp>
@@ -8267,11 +8104,11 @@
   <p:clrMapOvr>
     <a:masterClrMapping/>
   </p:clrMapOvr>
-  <mc:AlternateContent xmlns:mc="http://schemas.openxmlformats.org/markup-compatibility/2006">
-    <mc:Choice xmlns:p14="http://schemas.microsoft.com/office/powerpoint/2010/main" Requires="p14">
-      <p:transition xmlns:mc="http://schemas.openxmlformats.org/markup-compatibility/2006" xmlns:p14="http://schemas.microsoft.com/office/powerpoint/2010/main" mc:Ignorable="p14" p14:dur="500"/>
+  <mc:AlternateContent xmlns:mc="http://schemas.openxmlformats.org/markup-compatibility/2006" xmlns:p14="http://schemas.microsoft.com/office/powerpoint/2010/main">
+    <mc:Choice Requires="p14">
+      <p:transition/>
     </mc:Choice>
-    <mc:Fallback>
+    <mc:Fallback xmlns:dsp="http://schemas.microsoft.com/office/drawing/2008/diagram" xmlns:dgm="http://schemas.openxmlformats.org/drawingml/2006/diagram" xmlns:c="http://schemas.openxmlformats.org/drawingml/2006/chart" xmlns="">
       <p:transition/>
     </mc:Fallback>
   </mc:AlternateContent>
@@ -8279,13 +8116,14 @@
 </file>
 
 <file path=ppt/slides/slide16.xml><?xml version="1.0" encoding="utf-8"?>
-<p:sld xmlns:r="http://schemas.openxmlformats.org/officeDocument/2006/relationships" xmlns:c="http://schemas.openxmlformats.org/drawingml/2006/chart" xmlns:a="http://schemas.openxmlformats.org/drawingml/2006/main" xmlns:dgm="http://schemas.openxmlformats.org/drawingml/2006/diagram" xmlns:dsp="http://schemas.microsoft.com/office/drawing/2008/diagram" xmlns:p="http://schemas.openxmlformats.org/presentationml/2006/main">
+<p:sld xmlns:a="http://schemas.openxmlformats.org/drawingml/2006/main" xmlns:r="http://schemas.openxmlformats.org/officeDocument/2006/relationships" xmlns:p="http://schemas.openxmlformats.org/presentationml/2006/main">
   <p:cSld>
     <p:bg>
-      <p:bgPr shadeToTitle="0">
+      <p:bgPr>
         <a:solidFill>
-          <a:srgbClr val="ffffff"/>
+          <a:srgbClr val="FFFFFF"/>
         </a:solidFill>
+        <a:effectLst/>
       </p:bgPr>
     </p:bg>
     <p:spTree>
@@ -8330,7 +8168,7 @@
             <a:r>
               <a:rPr lang="ko-KR" altLang="en-US" sz="1200" b="1" spc="200">
                 <a:solidFill>
-                  <a:srgbClr val="c8622e"/>
+                  <a:srgbClr val="C8622E"/>
                 </a:solidFill>
                 <a:latin typeface="맑은 고딕"/>
                 <a:ea typeface="맑은 고딕"/>
@@ -8338,14 +8176,6 @@
               </a:rPr>
               <a:t>04  PulseCity — 던전 구조</a:t>
             </a:r>
-            <a:endParaRPr lang="ko-KR" altLang="en-US" sz="1200" b="1" spc="200">
-              <a:solidFill>
-                <a:srgbClr val="c8622e"/>
-              </a:solidFill>
-              <a:latin typeface="맑은 고딕"/>
-              <a:ea typeface="맑은 고딕"/>
-              <a:cs typeface="맑은 고딕"/>
-            </a:endParaRPr>
           </a:p>
         </p:txBody>
       </p:sp>
@@ -8377,7 +8207,7 @@
             <a:r>
               <a:rPr lang="ko-KR" altLang="en-US" sz="2900" b="1">
                 <a:solidFill>
-                  <a:srgbClr val="1f2637"/>
+                  <a:srgbClr val="1F2637"/>
                 </a:solidFill>
                 <a:latin typeface="맑은 고딕"/>
                 <a:ea typeface="맑은 고딕"/>
@@ -8385,14 +8215,6 @@
               </a:rPr>
               <a:t>회사 건물 던전: 로비 → 사무실 → 보스방</a:t>
             </a:r>
-            <a:endParaRPr lang="ko-KR" altLang="en-US" sz="2900" b="1">
-              <a:solidFill>
-                <a:srgbClr val="1f2637"/>
-              </a:solidFill>
-              <a:latin typeface="맑은 고딕"/>
-              <a:ea typeface="맑은 고딕"/>
-              <a:cs typeface="맑은 고딕"/>
-            </a:endParaRPr>
           </a:p>
         </p:txBody>
       </p:sp>
@@ -8413,11 +8235,11 @@
             </a:avLst>
           </a:prstGeom>
           <a:solidFill>
-            <a:srgbClr val="f4f6fa"/>
+            <a:srgbClr val="F4F6FA"/>
           </a:solidFill>
           <a:ln w="12700">
             <a:solidFill>
-              <a:srgbClr val="d9dee6"/>
+              <a:srgbClr val="D9DEE6"/>
             </a:solidFill>
             <a:prstDash val="solid"/>
           </a:ln>
@@ -8492,7 +8314,7 @@
             <a:r>
               <a:rPr lang="ko-KR" altLang="en-US" sz="1000" i="1">
                 <a:solidFill>
-                  <a:srgbClr val="6c7686"/>
+                  <a:srgbClr val="6C7686"/>
                 </a:solidFill>
                 <a:latin typeface="맑은 고딕"/>
                 <a:ea typeface="맑은 고딕"/>
@@ -8500,14 +8322,6 @@
               </a:rPr>
               <a:t>던전 평면도 — 2층(위) · 1층(아래)</a:t>
             </a:r>
-            <a:endParaRPr lang="ko-KR" altLang="en-US" sz="1000" i="1">
-              <a:solidFill>
-                <a:srgbClr val="6c7686"/>
-              </a:solidFill>
-              <a:latin typeface="맑은 고딕"/>
-              <a:ea typeface="맑은 고딕"/>
-              <a:cs typeface="맑은 고딕"/>
-            </a:endParaRPr>
           </a:p>
         </p:txBody>
       </p:sp>
@@ -8528,11 +8342,11 @@
             </a:avLst>
           </a:prstGeom>
           <a:solidFill>
-            <a:srgbClr val="f4f6fa"/>
+            <a:srgbClr val="F4F6FA"/>
           </a:solidFill>
           <a:ln w="12700">
             <a:solidFill>
-              <a:srgbClr val="d9dee6"/>
+              <a:srgbClr val="D9DEE6"/>
             </a:solidFill>
             <a:prstDash val="solid"/>
           </a:ln>
@@ -8570,7 +8384,7 @@
             <a:avLst/>
           </a:prstGeom>
           <a:solidFill>
-            <a:srgbClr val="c8622e"/>
+            <a:srgbClr val="C8622E"/>
           </a:solidFill>
           <a:ln>
             <a:noFill/>
@@ -8587,7 +8401,7 @@
             <a:r>
               <a:rPr lang="ko-KR" altLang="en-US" sz="1300" b="1">
                 <a:solidFill>
-                  <a:srgbClr val="ffffff"/>
+                  <a:srgbClr val="FFFFFF"/>
                 </a:solidFill>
                 <a:latin typeface="맑은 고딕"/>
                 <a:ea typeface="맑은 고딕"/>
@@ -8595,14 +8409,6 @@
               </a:rPr>
               <a:t>1</a:t>
             </a:r>
-            <a:endParaRPr lang="ko-KR" altLang="en-US" sz="1300" b="1">
-              <a:solidFill>
-                <a:srgbClr val="ffffff"/>
-              </a:solidFill>
-              <a:latin typeface="맑은 고딕"/>
-              <a:ea typeface="맑은 고딕"/>
-              <a:cs typeface="맑은 고딕"/>
-            </a:endParaRPr>
           </a:p>
         </p:txBody>
       </p:sp>
@@ -8634,7 +8440,7 @@
             <a:r>
               <a:rPr lang="ko-KR" altLang="en-US" sz="1350" b="1">
                 <a:solidFill>
-                  <a:srgbClr val="c8622e"/>
+                  <a:srgbClr val="C8622E"/>
                 </a:solidFill>
                 <a:latin typeface="맑은 고딕"/>
                 <a:ea typeface="맑은 고딕"/>
@@ -8642,14 +8448,6 @@
               </a:rPr>
               <a:t>1층 · 로비 — 갈수록 넓어지는 방</a:t>
             </a:r>
-            <a:endParaRPr lang="ko-KR" altLang="en-US" sz="1350" b="1">
-              <a:solidFill>
-                <a:srgbClr val="c8622e"/>
-              </a:solidFill>
-              <a:latin typeface="맑은 고딕"/>
-              <a:ea typeface="맑은 고딕"/>
-              <a:cs typeface="맑은 고딕"/>
-            </a:endParaRPr>
           </a:p>
         </p:txBody>
       </p:sp>
@@ -8684,7 +8482,7 @@
             <a:r>
               <a:rPr lang="ko-KR" altLang="en-US" sz="1100">
                 <a:solidFill>
-                  <a:srgbClr val="1f2637"/>
+                  <a:srgbClr val="1F2637"/>
                 </a:solidFill>
                 <a:latin typeface="맑은 고딕"/>
                 <a:ea typeface="맑은 고딕"/>
@@ -8692,14 +8490,6 @@
               </a:rPr>
               <a:t>입구 → 대기실 → 광장 순으로 공간이 커진다. 좁은 곳에서 트인 곳으로 나아가는 확장감을 준다.</a:t>
             </a:r>
-            <a:endParaRPr lang="ko-KR" altLang="en-US" sz="1100">
-              <a:solidFill>
-                <a:srgbClr val="1f2637"/>
-              </a:solidFill>
-              <a:latin typeface="맑은 고딕"/>
-              <a:ea typeface="맑은 고딕"/>
-              <a:cs typeface="맑은 고딕"/>
-            </a:endParaRPr>
           </a:p>
         </p:txBody>
       </p:sp>
@@ -8720,11 +8510,11 @@
             </a:avLst>
           </a:prstGeom>
           <a:solidFill>
-            <a:srgbClr val="f4f6fa"/>
+            <a:srgbClr val="F4F6FA"/>
           </a:solidFill>
           <a:ln w="12700">
             <a:solidFill>
-              <a:srgbClr val="d9dee6"/>
+              <a:srgbClr val="D9DEE6"/>
             </a:solidFill>
             <a:prstDash val="solid"/>
           </a:ln>
@@ -8762,7 +8552,7 @@
             <a:avLst/>
           </a:prstGeom>
           <a:solidFill>
-            <a:srgbClr val="c8622e"/>
+            <a:srgbClr val="C8622E"/>
           </a:solidFill>
           <a:ln>
             <a:noFill/>
@@ -8779,7 +8569,7 @@
             <a:r>
               <a:rPr lang="ko-KR" altLang="en-US" sz="1300" b="1">
                 <a:solidFill>
-                  <a:srgbClr val="ffffff"/>
+                  <a:srgbClr val="FFFFFF"/>
                 </a:solidFill>
                 <a:latin typeface="맑은 고딕"/>
                 <a:ea typeface="맑은 고딕"/>
@@ -8787,14 +8577,6 @@
               </a:rPr>
               <a:t>2</a:t>
             </a:r>
-            <a:endParaRPr lang="ko-KR" altLang="en-US" sz="1300" b="1">
-              <a:solidFill>
-                <a:srgbClr val="ffffff"/>
-              </a:solidFill>
-              <a:latin typeface="맑은 고딕"/>
-              <a:ea typeface="맑은 고딕"/>
-              <a:cs typeface="맑은 고딕"/>
-            </a:endParaRPr>
           </a:p>
         </p:txBody>
       </p:sp>
@@ -8826,7 +8608,7 @@
             <a:r>
               <a:rPr lang="ko-KR" altLang="en-US" sz="1350" b="1">
                 <a:solidFill>
-                  <a:srgbClr val="c8622e"/>
+                  <a:srgbClr val="C8622E"/>
                 </a:solidFill>
                 <a:latin typeface="맑은 고딕"/>
                 <a:ea typeface="맑은 고딕"/>
@@ -8834,14 +8616,6 @@
               </a:rPr>
               <a:t>2층 · 사무실 — 방마다 다른 전투</a:t>
             </a:r>
-            <a:endParaRPr lang="ko-KR" altLang="en-US" sz="1350" b="1">
-              <a:solidFill>
-                <a:srgbClr val="c8622e"/>
-              </a:solidFill>
-              <a:latin typeface="맑은 고딕"/>
-              <a:ea typeface="맑은 고딕"/>
-              <a:cs typeface="맑은 고딕"/>
-            </a:endParaRPr>
           </a:p>
         </p:txBody>
       </p:sp>
@@ -8876,7 +8650,7 @@
             <a:r>
               <a:rPr lang="ko-KR" altLang="en-US" sz="1100">
                 <a:solidFill>
-                  <a:srgbClr val="1f2637"/>
+                  <a:srgbClr val="1F2637"/>
                 </a:solidFill>
                 <a:latin typeface="맑은 고딕"/>
                 <a:ea typeface="맑은 고딕"/>
@@ -8887,7 +8661,7 @@
             <a:r>
               <a:rPr lang="en-US" altLang="ko-KR" sz="1100">
                 <a:solidFill>
-                  <a:srgbClr val="1f2637"/>
+                  <a:srgbClr val="1F2637"/>
                 </a:solidFill>
                 <a:latin typeface="맑은 고딕"/>
                 <a:ea typeface="맑은 고딕"/>
@@ -8895,14 +8669,6 @@
               </a:rPr>
               <a:t>.</a:t>
             </a:r>
-            <a:endParaRPr lang="en-US" altLang="ko-KR" sz="1100">
-              <a:solidFill>
-                <a:srgbClr val="1f2637"/>
-              </a:solidFill>
-              <a:latin typeface="맑은 고딕"/>
-              <a:ea typeface="맑은 고딕"/>
-              <a:cs typeface="맑은 고딕"/>
-            </a:endParaRPr>
           </a:p>
         </p:txBody>
       </p:sp>
@@ -8923,11 +8689,11 @@
             </a:avLst>
           </a:prstGeom>
           <a:solidFill>
-            <a:srgbClr val="16223b"/>
+            <a:srgbClr val="16223B"/>
           </a:solidFill>
           <a:ln w="12700">
             <a:solidFill>
-              <a:srgbClr val="d9dee6"/>
+              <a:srgbClr val="D9DEE6"/>
             </a:solidFill>
             <a:prstDash val="solid"/>
           </a:ln>
@@ -8965,7 +8731,7 @@
             <a:avLst/>
           </a:prstGeom>
           <a:solidFill>
-            <a:srgbClr val="c8622e"/>
+            <a:srgbClr val="C8622E"/>
           </a:solidFill>
           <a:ln>
             <a:noFill/>
@@ -8982,7 +8748,7 @@
             <a:r>
               <a:rPr lang="ko-KR" altLang="en-US" sz="1300" b="1">
                 <a:solidFill>
-                  <a:srgbClr val="ffffff"/>
+                  <a:srgbClr val="FFFFFF"/>
                 </a:solidFill>
                 <a:latin typeface="맑은 고딕"/>
                 <a:ea typeface="맑은 고딕"/>
@@ -8990,14 +8756,6 @@
               </a:rPr>
               <a:t>3</a:t>
             </a:r>
-            <a:endParaRPr lang="ko-KR" altLang="en-US" sz="1300" b="1">
-              <a:solidFill>
-                <a:srgbClr val="ffffff"/>
-              </a:solidFill>
-              <a:latin typeface="맑은 고딕"/>
-              <a:ea typeface="맑은 고딕"/>
-              <a:cs typeface="맑은 고딕"/>
-            </a:endParaRPr>
           </a:p>
         </p:txBody>
       </p:sp>
@@ -9029,7 +8787,7 @@
             <a:r>
               <a:rPr lang="ko-KR" altLang="en-US" sz="1350" b="1">
                 <a:solidFill>
-                  <a:srgbClr val="e0a15a"/>
+                  <a:srgbClr val="E0A15A"/>
                 </a:solidFill>
                 <a:latin typeface="맑은 고딕"/>
                 <a:ea typeface="맑은 고딕"/>
@@ -9037,14 +8795,6 @@
               </a:rPr>
               <a:t>보스방 — 코어 3개를 부수고 보스 공략</a:t>
             </a:r>
-            <a:endParaRPr lang="ko-KR" altLang="en-US" sz="1350" b="1">
-              <a:solidFill>
-                <a:srgbClr val="e0a15a"/>
-              </a:solidFill>
-              <a:latin typeface="맑은 고딕"/>
-              <a:ea typeface="맑은 고딕"/>
-              <a:cs typeface="맑은 고딕"/>
-            </a:endParaRPr>
           </a:p>
         </p:txBody>
       </p:sp>
@@ -9079,7 +8829,7 @@
             <a:r>
               <a:rPr lang="ko-KR" altLang="en-US" sz="1100">
                 <a:solidFill>
-                  <a:srgbClr val="eaf0fa"/>
+                  <a:srgbClr val="EAF0FA"/>
                 </a:solidFill>
                 <a:latin typeface="맑은 고딕"/>
                 <a:ea typeface="맑은 고딕"/>
@@ -9087,14 +8837,6 @@
               </a:rPr>
               <a:t>넓은 단일 방, 보스방 중앙을 차지하는 거대한 고정형 포탑 보스. 코어 3개를 모두 파괴해야 보스에게 피해를 줄 수 있다.</a:t>
             </a:r>
-            <a:endParaRPr lang="ko-KR" altLang="en-US" sz="1100">
-              <a:solidFill>
-                <a:srgbClr val="eaf0fa"/>
-              </a:solidFill>
-              <a:latin typeface="맑은 고딕"/>
-              <a:ea typeface="맑은 고딕"/>
-              <a:cs typeface="맑은 고딕"/>
-            </a:endParaRPr>
           </a:p>
         </p:txBody>
       </p:sp>
@@ -9115,11 +8857,11 @@
             </a:avLst>
           </a:prstGeom>
           <a:solidFill>
-            <a:srgbClr val="16223b"/>
+            <a:srgbClr val="16223B"/>
           </a:solidFill>
           <a:ln w="12700">
             <a:solidFill>
-              <a:srgbClr val="d9dee6"/>
+              <a:srgbClr val="D9DEE6"/>
             </a:solidFill>
             <a:prstDash val="solid"/>
           </a:ln>
@@ -9166,7 +8908,7 @@
             <a:r>
               <a:rPr lang="ko-KR" altLang="en-US" sz="1200" b="1">
                 <a:solidFill>
-                  <a:srgbClr val="e0a15a"/>
+                  <a:srgbClr val="E0A15A"/>
                 </a:solidFill>
                 <a:latin typeface="맑은 고딕"/>
                 <a:ea typeface="맑은 고딕"/>
@@ -9177,7 +8919,7 @@
             <a:r>
               <a:rPr lang="ko-KR" altLang="en-US" sz="1200">
                 <a:solidFill>
-                  <a:srgbClr val="eaf0fa"/>
+                  <a:srgbClr val="EAF0FA"/>
                 </a:solidFill>
                 <a:latin typeface="맑은 고딕"/>
                 <a:ea typeface="맑은 고딕"/>
@@ -9185,14 +8927,6 @@
               </a:rPr>
               <a:t>공간이 넓어질수록 전투 규모도 함께 커지게 하여, 로비에서 보스방까지 긴장감이 쌓이는 흐름을 만들었다.</a:t>
             </a:r>
-            <a:endParaRPr lang="ko-KR" altLang="en-US" sz="1200">
-              <a:solidFill>
-                <a:srgbClr val="eaf0fa"/>
-              </a:solidFill>
-              <a:latin typeface="맑은 고딕"/>
-              <a:ea typeface="맑은 고딕"/>
-              <a:cs typeface="맑은 고딕"/>
-            </a:endParaRPr>
           </a:p>
         </p:txBody>
       </p:sp>
@@ -9224,7 +8958,7 @@
             <a:r>
               <a:rPr lang="ko-KR" altLang="en-US" sz="900">
                 <a:solidFill>
-                  <a:srgbClr val="6c7686"/>
+                  <a:srgbClr val="6C7686"/>
                 </a:solidFill>
                 <a:latin typeface="맑은 고딕"/>
                 <a:ea typeface="맑은 고딕"/>
@@ -9232,14 +8966,6 @@
               </a:rPr>
               <a:t>진성준  ·  게임 시스템 기획 포트폴리오</a:t>
             </a:r>
-            <a:endParaRPr lang="ko-KR" altLang="en-US" sz="900">
-              <a:solidFill>
-                <a:srgbClr val="6c7686"/>
-              </a:solidFill>
-              <a:latin typeface="맑은 고딕"/>
-              <a:ea typeface="맑은 고딕"/>
-              <a:cs typeface="맑은 고딕"/>
-            </a:endParaRPr>
           </a:p>
         </p:txBody>
       </p:sp>
@@ -9271,7 +8997,7 @@
             <a:r>
               <a:rPr lang="ko-KR" altLang="en-US" sz="900">
                 <a:solidFill>
-                  <a:srgbClr val="6c7686"/>
+                  <a:srgbClr val="6C7686"/>
                 </a:solidFill>
                 <a:latin typeface="맑은 고딕"/>
                 <a:ea typeface="맑은 고딕"/>
@@ -9279,14 +9005,6 @@
               </a:rPr>
               <a:t>16</a:t>
             </a:r>
-            <a:endParaRPr lang="ko-KR" altLang="en-US" sz="900">
-              <a:solidFill>
-                <a:srgbClr val="6c7686"/>
-              </a:solidFill>
-              <a:latin typeface="맑은 고딕"/>
-              <a:ea typeface="맑은 고딕"/>
-              <a:cs typeface="맑은 고딕"/>
-            </a:endParaRPr>
           </a:p>
         </p:txBody>
       </p:sp>
@@ -9295,11 +9013,11 @@
   <p:clrMapOvr>
     <a:masterClrMapping/>
   </p:clrMapOvr>
-  <mc:AlternateContent xmlns:mc="http://schemas.openxmlformats.org/markup-compatibility/2006">
-    <mc:Choice xmlns:p14="http://schemas.microsoft.com/office/powerpoint/2010/main" Requires="p14">
-      <p:transition xmlns:mc="http://schemas.openxmlformats.org/markup-compatibility/2006" xmlns:p14="http://schemas.microsoft.com/office/powerpoint/2010/main" mc:Ignorable="p14" p14:dur="500"/>
+  <mc:AlternateContent xmlns:mc="http://schemas.openxmlformats.org/markup-compatibility/2006" xmlns:p14="http://schemas.microsoft.com/office/powerpoint/2010/main">
+    <mc:Choice Requires="p14">
+      <p:transition/>
     </mc:Choice>
-    <mc:Fallback>
+    <mc:Fallback xmlns:dsp="http://schemas.microsoft.com/office/drawing/2008/diagram" xmlns:dgm="http://schemas.openxmlformats.org/drawingml/2006/diagram" xmlns:c="http://schemas.openxmlformats.org/drawingml/2006/chart" xmlns="">
       <p:transition/>
     </mc:Fallback>
   </mc:AlternateContent>
@@ -9307,13 +9025,14 @@
 </file>
 
 <file path=ppt/slides/slide17.xml><?xml version="1.0" encoding="utf-8"?>
-<p:sld xmlns:r="http://schemas.openxmlformats.org/officeDocument/2006/relationships" xmlns:c="http://schemas.openxmlformats.org/drawingml/2006/chart" xmlns:a="http://schemas.openxmlformats.org/drawingml/2006/main" xmlns:dgm="http://schemas.openxmlformats.org/drawingml/2006/diagram" xmlns:dsp="http://schemas.microsoft.com/office/drawing/2008/diagram" xmlns:p="http://schemas.openxmlformats.org/presentationml/2006/main">
+<p:sld xmlns:a="http://schemas.openxmlformats.org/drawingml/2006/main" xmlns:r="http://schemas.openxmlformats.org/officeDocument/2006/relationships" xmlns:p="http://schemas.openxmlformats.org/presentationml/2006/main">
   <p:cSld>
     <p:bg>
-      <p:bgPr shadeToTitle="0">
+      <p:bgPr>
         <a:solidFill>
-          <a:srgbClr val="ffffff"/>
+          <a:srgbClr val="FFFFFF"/>
         </a:solidFill>
+        <a:effectLst/>
       </p:bgPr>
     </p:bg>
     <p:spTree>
@@ -9358,7 +9077,7 @@
             <a:r>
               <a:rPr lang="ko-KR" altLang="en-US" sz="1200" b="1" spc="200">
                 <a:solidFill>
-                  <a:srgbClr val="c8622e"/>
+                  <a:srgbClr val="C8622E"/>
                 </a:solidFill>
                 <a:latin typeface="맑은 고딕"/>
                 <a:ea typeface="맑은 고딕"/>
@@ -9366,14 +9085,6 @@
               </a:rPr>
               <a:t>04  PulseCity — 몹 배치</a:t>
             </a:r>
-            <a:endParaRPr lang="ko-KR" altLang="en-US" sz="1200" b="1" spc="200">
-              <a:solidFill>
-                <a:srgbClr val="c8622e"/>
-              </a:solidFill>
-              <a:latin typeface="맑은 고딕"/>
-              <a:ea typeface="맑은 고딕"/>
-              <a:cs typeface="맑은 고딕"/>
-            </a:endParaRPr>
           </a:p>
         </p:txBody>
       </p:sp>
@@ -9405,7 +9116,7 @@
             <a:r>
               <a:rPr lang="ko-KR" altLang="en-US" sz="2900" b="1">
                 <a:solidFill>
-                  <a:srgbClr val="1f2637"/>
+                  <a:srgbClr val="1F2637"/>
                 </a:solidFill>
                 <a:latin typeface="맑은 고딕"/>
                 <a:ea typeface="맑은 고딕"/>
@@ -9413,14 +9124,6 @@
               </a:rPr>
               <a:t>방마다 다른 몹 구성으로 전투에 변화를 준다</a:t>
             </a:r>
-            <a:endParaRPr lang="ko-KR" altLang="en-US" sz="2900" b="1">
-              <a:solidFill>
-                <a:srgbClr val="1f2637"/>
-              </a:solidFill>
-              <a:latin typeface="맑은 고딕"/>
-              <a:ea typeface="맑은 고딕"/>
-              <a:cs typeface="맑은 고딕"/>
-            </a:endParaRPr>
           </a:p>
         </p:txBody>
       </p:sp>
@@ -9439,15 +9142,35 @@
         <a:graphic>
           <a:graphicData uri="http://schemas.openxmlformats.org/drawingml/2006/table">
             <a:tbl>
+              <a:tblPr/>
               <a:tblGrid>
-                <a:gridCol w="1554480"/>
-                <a:gridCol w="3017520"/>
-                <a:gridCol w="2514600"/>
+                <a:gridCol w="1554480">
+                  <a:extLst>
+                    <a:ext uri="{9D8B030D-6E8A-4147-A177-3AD203B41FA5}">
+                      <a16:colId xmlns:a16="http://schemas.microsoft.com/office/drawing/2014/main" val="20000"/>
+                    </a:ext>
+                  </a:extLst>
+                </a:gridCol>
+                <a:gridCol w="3017520">
+                  <a:extLst>
+                    <a:ext uri="{9D8B030D-6E8A-4147-A177-3AD203B41FA5}">
+                      <a16:colId xmlns:a16="http://schemas.microsoft.com/office/drawing/2014/main" val="20001"/>
+                    </a:ext>
+                  </a:extLst>
+                </a:gridCol>
+                <a:gridCol w="2514600">
+                  <a:extLst>
+                    <a:ext uri="{9D8B030D-6E8A-4147-A177-3AD203B41FA5}">
+                      <a16:colId xmlns:a16="http://schemas.microsoft.com/office/drawing/2014/main" val="20002"/>
+                    </a:ext>
+                  </a:extLst>
+                </a:gridCol>
               </a:tblGrid>
               <a:tr h="310896">
                 <a:tc>
                   <a:txBody>
-                    <a:bodyPr vert="horz" lIns="91440" tIns="36576" rIns="73152" bIns="36576" anchor="ctr" anchorCtr="0"/>
+                    <a:bodyPr/>
+                    <a:lstStyle/>
                     <a:p>
                       <a:pPr marL="0" indent="0" algn="l">
                         <a:buNone/>
@@ -9456,7 +9179,7 @@
                       <a:r>
                         <a:rPr lang="ko-KR" altLang="en-US" sz="1100" b="1">
                           <a:solidFill>
-                            <a:srgbClr val="ffffff"/>
+                            <a:srgbClr val="FFFFFF"/>
                           </a:solidFill>
                           <a:latin typeface="맑은 고딕"/>
                           <a:ea typeface="맑은 고딕"/>
@@ -9464,20 +9187,12 @@
                         </a:rPr>
                         <a:t>구역</a:t>
                       </a:r>
-                      <a:endParaRPr lang="ko-KR" altLang="en-US" sz="1100" b="1">
-                        <a:solidFill>
-                          <a:srgbClr val="ffffff"/>
-                        </a:solidFill>
-                        <a:latin typeface="맑은 고딕"/>
-                        <a:ea typeface="맑은 고딕"/>
-                        <a:cs typeface="맑은 고딕"/>
-                      </a:endParaRPr>
                     </a:p>
                   </a:txBody>
-                  <a:tcPr marL="91440" marR="73152" marT="36576" marB="36576" anchor="ctr">
+                  <a:tcPr marR="73152" marT="36576" marB="36576" anchor="ctr">
                     <a:lnL w="12700" cap="flat" cmpd="sng" algn="ctr">
                       <a:solidFill>
-                        <a:srgbClr val="d9dee6"/>
+                        <a:srgbClr val="D9DEE6"/>
                       </a:solidFill>
                       <a:prstDash val="solid"/>
                       <a:round/>
@@ -9486,7 +9201,7 @@
                     </a:lnL>
                     <a:lnR w="12700" cap="flat" cmpd="sng" algn="ctr">
                       <a:solidFill>
-                        <a:srgbClr val="d9dee6"/>
+                        <a:srgbClr val="D9DEE6"/>
                       </a:solidFill>
                       <a:prstDash val="solid"/>
                       <a:round/>
@@ -9495,7 +9210,7 @@
                     </a:lnR>
                     <a:lnT w="12700" cap="flat" cmpd="sng" algn="ctr">
                       <a:solidFill>
-                        <a:srgbClr val="d9dee6"/>
+                        <a:srgbClr val="D9DEE6"/>
                       </a:solidFill>
                       <a:prstDash val="solid"/>
                       <a:round/>
@@ -9504,7 +9219,7 @@
                     </a:lnT>
                     <a:lnB w="12700" cap="flat" cmpd="sng" algn="ctr">
                       <a:solidFill>
-                        <a:srgbClr val="d9dee6"/>
+                        <a:srgbClr val="D9DEE6"/>
                       </a:solidFill>
                       <a:prstDash val="solid"/>
                       <a:round/>
@@ -9512,13 +9227,14 @@
                       <a:tailEnd w="med" len="med"/>
                     </a:lnB>
                     <a:solidFill>
-                      <a:srgbClr val="16223b"/>
+                      <a:srgbClr val="16223B"/>
                     </a:solidFill>
                   </a:tcPr>
                 </a:tc>
                 <a:tc>
                   <a:txBody>
-                    <a:bodyPr vert="horz" lIns="91440" tIns="36576" rIns="73152" bIns="36576" anchor="ctr" anchorCtr="0"/>
+                    <a:bodyPr/>
+                    <a:lstStyle/>
                     <a:p>
                       <a:pPr marL="0" indent="0" algn="l">
                         <a:buNone/>
@@ -9527,7 +9243,7 @@
                       <a:r>
                         <a:rPr lang="ko-KR" altLang="en-US" sz="1100" b="1">
                           <a:solidFill>
-                            <a:srgbClr val="ffffff"/>
+                            <a:srgbClr val="FFFFFF"/>
                           </a:solidFill>
                           <a:latin typeface="맑은 고딕"/>
                           <a:ea typeface="맑은 고딕"/>
@@ -9535,20 +9251,12 @@
                         </a:rPr>
                         <a:t>몹 구성</a:t>
                       </a:r>
-                      <a:endParaRPr lang="ko-KR" altLang="en-US" sz="1100" b="1">
-                        <a:solidFill>
-                          <a:srgbClr val="ffffff"/>
-                        </a:solidFill>
-                        <a:latin typeface="맑은 고딕"/>
-                        <a:ea typeface="맑은 고딕"/>
-                        <a:cs typeface="맑은 고딕"/>
-                      </a:endParaRPr>
                     </a:p>
                   </a:txBody>
-                  <a:tcPr marL="91440" marR="73152" marT="36576" marB="36576" anchor="ctr">
+                  <a:tcPr marR="73152" marT="36576" marB="36576" anchor="ctr">
                     <a:lnL w="12700" cap="flat" cmpd="sng" algn="ctr">
                       <a:solidFill>
-                        <a:srgbClr val="d9dee6"/>
+                        <a:srgbClr val="D9DEE6"/>
                       </a:solidFill>
                       <a:prstDash val="solid"/>
                       <a:round/>
@@ -9557,7 +9265,7 @@
                     </a:lnL>
                     <a:lnR w="12700" cap="flat" cmpd="sng" algn="ctr">
                       <a:solidFill>
-                        <a:srgbClr val="d9dee6"/>
+                        <a:srgbClr val="D9DEE6"/>
                       </a:solidFill>
                       <a:prstDash val="solid"/>
                       <a:round/>
@@ -9566,7 +9274,7 @@
                     </a:lnR>
                     <a:lnT w="12700" cap="flat" cmpd="sng" algn="ctr">
                       <a:solidFill>
-                        <a:srgbClr val="d9dee6"/>
+                        <a:srgbClr val="D9DEE6"/>
                       </a:solidFill>
                       <a:prstDash val="solid"/>
                       <a:round/>
@@ -9575,7 +9283,7 @@
                     </a:lnT>
                     <a:lnB w="12700" cap="flat" cmpd="sng" algn="ctr">
                       <a:solidFill>
-                        <a:srgbClr val="d9dee6"/>
+                        <a:srgbClr val="D9DEE6"/>
                       </a:solidFill>
                       <a:prstDash val="solid"/>
                       <a:round/>
@@ -9583,13 +9291,14 @@
                       <a:tailEnd w="med" len="med"/>
                     </a:lnB>
                     <a:solidFill>
-                      <a:srgbClr val="16223b"/>
+                      <a:srgbClr val="16223B"/>
                     </a:solidFill>
                   </a:tcPr>
                 </a:tc>
                 <a:tc>
                   <a:txBody>
-                    <a:bodyPr vert="horz" lIns="91440" tIns="36576" rIns="73152" bIns="36576" anchor="ctr" anchorCtr="0"/>
+                    <a:bodyPr/>
+                    <a:lstStyle/>
                     <a:p>
                       <a:pPr marL="0" indent="0" algn="l">
                         <a:buNone/>
@@ -9598,7 +9307,7 @@
                       <a:r>
                         <a:rPr lang="ko-KR" altLang="en-US" sz="1100" b="1">
                           <a:solidFill>
-                            <a:srgbClr val="ffffff"/>
+                            <a:srgbClr val="FFFFFF"/>
                           </a:solidFill>
                           <a:latin typeface="맑은 고딕"/>
                           <a:ea typeface="맑은 고딕"/>
@@ -9606,20 +9315,12 @@
                         </a:rPr>
                         <a:t>배치 의도</a:t>
                       </a:r>
-                      <a:endParaRPr lang="ko-KR" altLang="en-US" sz="1100" b="1">
-                        <a:solidFill>
-                          <a:srgbClr val="ffffff"/>
-                        </a:solidFill>
-                        <a:latin typeface="맑은 고딕"/>
-                        <a:ea typeface="맑은 고딕"/>
-                        <a:cs typeface="맑은 고딕"/>
-                      </a:endParaRPr>
                     </a:p>
                   </a:txBody>
-                  <a:tcPr marL="91440" marR="73152" marT="36576" marB="36576" anchor="ctr">
+                  <a:tcPr marR="73152" marT="36576" marB="36576" anchor="ctr">
                     <a:lnL w="12700" cap="flat" cmpd="sng" algn="ctr">
                       <a:solidFill>
-                        <a:srgbClr val="d9dee6"/>
+                        <a:srgbClr val="D9DEE6"/>
                       </a:solidFill>
                       <a:prstDash val="solid"/>
                       <a:round/>
@@ -9628,7 +9329,7 @@
                     </a:lnL>
                     <a:lnR w="12700" cap="flat" cmpd="sng" algn="ctr">
                       <a:solidFill>
-                        <a:srgbClr val="d9dee6"/>
+                        <a:srgbClr val="D9DEE6"/>
                       </a:solidFill>
                       <a:prstDash val="solid"/>
                       <a:round/>
@@ -9637,7 +9338,7 @@
                     </a:lnR>
                     <a:lnT w="12700" cap="flat" cmpd="sng" algn="ctr">
                       <a:solidFill>
-                        <a:srgbClr val="d9dee6"/>
+                        <a:srgbClr val="D9DEE6"/>
                       </a:solidFill>
                       <a:prstDash val="solid"/>
                       <a:round/>
@@ -9646,7 +9347,7 @@
                     </a:lnT>
                     <a:lnB w="12700" cap="flat" cmpd="sng" algn="ctr">
                       <a:solidFill>
-                        <a:srgbClr val="d9dee6"/>
+                        <a:srgbClr val="D9DEE6"/>
                       </a:solidFill>
                       <a:prstDash val="solid"/>
                       <a:round/>
@@ -9654,15 +9355,21 @@
                       <a:tailEnd w="med" len="med"/>
                     </a:lnB>
                     <a:solidFill>
-                      <a:srgbClr val="16223b"/>
+                      <a:srgbClr val="16223B"/>
                     </a:solidFill>
                   </a:tcPr>
                 </a:tc>
+                <a:extLst>
+                  <a:ext uri="{0D108BD9-81ED-4DB2-BD59-A6C34878D82A}">
+                    <a16:rowId xmlns:a16="http://schemas.microsoft.com/office/drawing/2014/main" val="10000"/>
+                  </a:ext>
+                </a:extLst>
               </a:tr>
               <a:tr h="493776">
                 <a:tc>
                   <a:txBody>
-                    <a:bodyPr vert="horz" lIns="91440" tIns="36576" rIns="73152" bIns="36576" anchor="ctr" anchorCtr="0"/>
+                    <a:bodyPr/>
+                    <a:lstStyle/>
                     <a:p>
                       <a:pPr marL="0" indent="0" algn="l">
                         <a:buNone/>
@@ -9671,7 +9378,7 @@
                       <a:r>
                         <a:rPr lang="ko-KR" altLang="en-US" sz="1100" b="1">
                           <a:solidFill>
-                            <a:srgbClr val="1f2637"/>
+                            <a:srgbClr val="1F2637"/>
                           </a:solidFill>
                           <a:latin typeface="맑은 고딕"/>
                           <a:ea typeface="맑은 고딕"/>
@@ -9679,20 +9386,12 @@
                         </a:rPr>
                         <a:t>1층 입구 · 대기실</a:t>
                       </a:r>
-                      <a:endParaRPr lang="ko-KR" altLang="en-US" sz="1100" b="1">
-                        <a:solidFill>
-                          <a:srgbClr val="1f2637"/>
-                        </a:solidFill>
-                        <a:latin typeface="맑은 고딕"/>
-                        <a:ea typeface="맑은 고딕"/>
-                        <a:cs typeface="맑은 고딕"/>
-                      </a:endParaRPr>
                     </a:p>
                   </a:txBody>
-                  <a:tcPr marL="91440" marR="73152" marT="36576" marB="36576" anchor="ctr">
+                  <a:tcPr marR="73152" marT="36576" marB="36576" anchor="ctr">
                     <a:lnL w="12700" cap="flat" cmpd="sng" algn="ctr">
                       <a:solidFill>
-                        <a:srgbClr val="d9dee6"/>
+                        <a:srgbClr val="D9DEE6"/>
                       </a:solidFill>
                       <a:prstDash val="solid"/>
                       <a:round/>
@@ -9701,7 +9400,7 @@
                     </a:lnL>
                     <a:lnR w="12700" cap="flat" cmpd="sng" algn="ctr">
                       <a:solidFill>
-                        <a:srgbClr val="d9dee6"/>
+                        <a:srgbClr val="D9DEE6"/>
                       </a:solidFill>
                       <a:prstDash val="solid"/>
                       <a:round/>
@@ -9710,7 +9409,7 @@
                     </a:lnR>
                     <a:lnT w="12700" cap="flat" cmpd="sng" algn="ctr">
                       <a:solidFill>
-                        <a:srgbClr val="d9dee6"/>
+                        <a:srgbClr val="D9DEE6"/>
                       </a:solidFill>
                       <a:prstDash val="solid"/>
                       <a:round/>
@@ -9719,7 +9418,7 @@
                     </a:lnT>
                     <a:lnB w="12700" cap="flat" cmpd="sng" algn="ctr">
                       <a:solidFill>
-                        <a:srgbClr val="d9dee6"/>
+                        <a:srgbClr val="D9DEE6"/>
                       </a:solidFill>
                       <a:prstDash val="solid"/>
                       <a:round/>
@@ -9727,13 +9426,14 @@
                       <a:tailEnd w="med" len="med"/>
                     </a:lnB>
                     <a:solidFill>
-                      <a:srgbClr val="f4f6fa"/>
+                      <a:srgbClr val="F4F6FA"/>
                     </a:solidFill>
                   </a:tcPr>
                 </a:tc>
                 <a:tc>
                   <a:txBody>
-                    <a:bodyPr vert="horz" lIns="91440" tIns="36576" rIns="73152" bIns="36576" anchor="ctr" anchorCtr="0"/>
+                    <a:bodyPr/>
+                    <a:lstStyle/>
                     <a:p>
                       <a:pPr marL="0" indent="0" algn="l">
                         <a:lnSpc>
@@ -9745,7 +9445,7 @@
                       <a:r>
                         <a:rPr lang="ko-KR" altLang="en-US" sz="1050">
                           <a:solidFill>
-                            <a:srgbClr val="1f2637"/>
+                            <a:srgbClr val="1F2637"/>
                           </a:solidFill>
                           <a:latin typeface="맑은 고딕"/>
                           <a:ea typeface="맑은 고딕"/>
@@ -9756,7 +9456,7 @@
                       <a:r>
                         <a:rPr lang="en-US" altLang="ko-KR" sz="1050">
                           <a:solidFill>
-                            <a:srgbClr val="1f2637"/>
+                            <a:srgbClr val="1F2637"/>
                           </a:solidFill>
                           <a:latin typeface="맑은 고딕"/>
                           <a:ea typeface="맑은 고딕"/>
@@ -9767,7 +9467,7 @@
                       <a:r>
                         <a:rPr lang="ko-KR" altLang="en-US" sz="1050">
                           <a:solidFill>
-                            <a:srgbClr val="1f2637"/>
+                            <a:srgbClr val="1F2637"/>
                           </a:solidFill>
                           <a:latin typeface="맑은 고딕"/>
                           <a:ea typeface="맑은 고딕"/>
@@ -9775,20 +9475,12 @@
                         </a:rPr>
                         <a:t>4</a:t>
                       </a:r>
-                      <a:endParaRPr lang="ko-KR" altLang="en-US" sz="1050">
-                        <a:solidFill>
-                          <a:srgbClr val="1f2637"/>
-                        </a:solidFill>
-                        <a:latin typeface="맑은 고딕"/>
-                        <a:ea typeface="맑은 고딕"/>
-                        <a:cs typeface="맑은 고딕"/>
-                      </a:endParaRPr>
                     </a:p>
                   </a:txBody>
-                  <a:tcPr marL="91440" marR="73152" marT="36576" marB="36576" anchor="ctr">
+                  <a:tcPr marR="73152" marT="36576" marB="36576" anchor="ctr">
                     <a:lnL w="12700" cap="flat" cmpd="sng" algn="ctr">
                       <a:solidFill>
-                        <a:srgbClr val="d9dee6"/>
+                        <a:srgbClr val="D9DEE6"/>
                       </a:solidFill>
                       <a:prstDash val="solid"/>
                       <a:round/>
@@ -9797,7 +9489,7 @@
                     </a:lnL>
                     <a:lnR w="12700" cap="flat" cmpd="sng" algn="ctr">
                       <a:solidFill>
-                        <a:srgbClr val="d9dee6"/>
+                        <a:srgbClr val="D9DEE6"/>
                       </a:solidFill>
                       <a:prstDash val="solid"/>
                       <a:round/>
@@ -9806,7 +9498,7 @@
                     </a:lnR>
                     <a:lnT w="12700" cap="flat" cmpd="sng" algn="ctr">
                       <a:solidFill>
-                        <a:srgbClr val="d9dee6"/>
+                        <a:srgbClr val="D9DEE6"/>
                       </a:solidFill>
                       <a:prstDash val="solid"/>
                       <a:round/>
@@ -9815,7 +9507,7 @@
                     </a:lnT>
                     <a:lnB w="12700" cap="flat" cmpd="sng" algn="ctr">
                       <a:solidFill>
-                        <a:srgbClr val="d9dee6"/>
+                        <a:srgbClr val="D9DEE6"/>
                       </a:solidFill>
                       <a:prstDash val="solid"/>
                       <a:round/>
@@ -9823,13 +9515,14 @@
                       <a:tailEnd w="med" len="med"/>
                     </a:lnB>
                     <a:solidFill>
-                      <a:srgbClr val="ffffff"/>
+                      <a:srgbClr val="FFFFFF"/>
                     </a:solidFill>
                   </a:tcPr>
                 </a:tc>
                 <a:tc>
                   <a:txBody>
-                    <a:bodyPr vert="horz" lIns="91440" tIns="36576" rIns="73152" bIns="36576" anchor="ctr" anchorCtr="0"/>
+                    <a:bodyPr/>
+                    <a:lstStyle/>
                     <a:p>
                       <a:pPr marL="0" indent="0" algn="l">
                         <a:lnSpc>
@@ -9841,7 +9534,7 @@
                       <a:r>
                         <a:rPr lang="ko-KR" altLang="en-US" sz="1050">
                           <a:solidFill>
-                            <a:srgbClr val="1f2637"/>
+                            <a:srgbClr val="1F2637"/>
                           </a:solidFill>
                           <a:latin typeface="맑은 고딕"/>
                           <a:ea typeface="맑은 고딕"/>
@@ -9849,20 +9542,12 @@
                         </a:rPr>
                         <a:t>첫 전투</a:t>
                       </a:r>
-                      <a:endParaRPr lang="ko-KR" altLang="en-US" sz="1050">
-                        <a:solidFill>
-                          <a:srgbClr val="1f2637"/>
-                        </a:solidFill>
-                        <a:latin typeface="맑은 고딕"/>
-                        <a:ea typeface="맑은 고딕"/>
-                        <a:cs typeface="맑은 고딕"/>
-                      </a:endParaRPr>
                     </a:p>
                   </a:txBody>
-                  <a:tcPr marL="91440" marR="73152" marT="36576" marB="36576" anchor="ctr">
+                  <a:tcPr marR="73152" marT="36576" marB="36576" anchor="ctr">
                     <a:lnL w="12700" cap="flat" cmpd="sng" algn="ctr">
                       <a:solidFill>
-                        <a:srgbClr val="d9dee6"/>
+                        <a:srgbClr val="D9DEE6"/>
                       </a:solidFill>
                       <a:prstDash val="solid"/>
                       <a:round/>
@@ -9871,7 +9556,7 @@
                     </a:lnL>
                     <a:lnR w="12700" cap="flat" cmpd="sng" algn="ctr">
                       <a:solidFill>
-                        <a:srgbClr val="d9dee6"/>
+                        <a:srgbClr val="D9DEE6"/>
                       </a:solidFill>
                       <a:prstDash val="solid"/>
                       <a:round/>
@@ -9880,7 +9565,7 @@
                     </a:lnR>
                     <a:lnT w="12700" cap="flat" cmpd="sng" algn="ctr">
                       <a:solidFill>
-                        <a:srgbClr val="d9dee6"/>
+                        <a:srgbClr val="D9DEE6"/>
                       </a:solidFill>
                       <a:prstDash val="solid"/>
                       <a:round/>
@@ -9889,7 +9574,7 @@
                     </a:lnT>
                     <a:lnB w="12700" cap="flat" cmpd="sng" algn="ctr">
                       <a:solidFill>
-                        <a:srgbClr val="d9dee6"/>
+                        <a:srgbClr val="D9DEE6"/>
                       </a:solidFill>
                       <a:prstDash val="solid"/>
                       <a:round/>
@@ -9897,15 +9582,21 @@
                       <a:tailEnd w="med" len="med"/>
                     </a:lnB>
                     <a:solidFill>
-                      <a:srgbClr val="ffffff"/>
+                      <a:srgbClr val="FFFFFF"/>
                     </a:solidFill>
                   </a:tcPr>
                 </a:tc>
+                <a:extLst>
+                  <a:ext uri="{0D108BD9-81ED-4DB2-BD59-A6C34878D82A}">
+                    <a16:rowId xmlns:a16="http://schemas.microsoft.com/office/drawing/2014/main" val="10001"/>
+                  </a:ext>
+                </a:extLst>
               </a:tr>
               <a:tr h="493776">
                 <a:tc>
                   <a:txBody>
-                    <a:bodyPr vert="horz" lIns="91440" tIns="36576" rIns="73152" bIns="36576" anchor="ctr" anchorCtr="0"/>
+                    <a:bodyPr/>
+                    <a:lstStyle/>
                     <a:p>
                       <a:pPr marL="0" indent="0" algn="l">
                         <a:buNone/>
@@ -9914,7 +9605,7 @@
                       <a:r>
                         <a:rPr lang="ko-KR" altLang="en-US" sz="1100" b="1">
                           <a:solidFill>
-                            <a:srgbClr val="1f2637"/>
+                            <a:srgbClr val="1F2637"/>
                           </a:solidFill>
                           <a:latin typeface="맑은 고딕"/>
                           <a:ea typeface="맑은 고딕"/>
@@ -9922,20 +9613,12 @@
                         </a:rPr>
                         <a:t>1층 광장</a:t>
                       </a:r>
-                      <a:endParaRPr lang="ko-KR" altLang="en-US" sz="1100" b="1">
-                        <a:solidFill>
-                          <a:srgbClr val="1f2637"/>
-                        </a:solidFill>
-                        <a:latin typeface="맑은 고딕"/>
-                        <a:ea typeface="맑은 고딕"/>
-                        <a:cs typeface="맑은 고딕"/>
-                      </a:endParaRPr>
                     </a:p>
                   </a:txBody>
-                  <a:tcPr marL="91440" marR="73152" marT="36576" marB="36576" anchor="ctr">
+                  <a:tcPr marR="73152" marT="36576" marB="36576" anchor="ctr">
                     <a:lnL w="12700" cap="flat" cmpd="sng" algn="ctr">
                       <a:solidFill>
-                        <a:srgbClr val="d9dee6"/>
+                        <a:srgbClr val="D9DEE6"/>
                       </a:solidFill>
                       <a:prstDash val="solid"/>
                       <a:round/>
@@ -9944,7 +9627,7 @@
                     </a:lnL>
                     <a:lnR w="12700" cap="flat" cmpd="sng" algn="ctr">
                       <a:solidFill>
-                        <a:srgbClr val="d9dee6"/>
+                        <a:srgbClr val="D9DEE6"/>
                       </a:solidFill>
                       <a:prstDash val="solid"/>
                       <a:round/>
@@ -9953,7 +9636,7 @@
                     </a:lnR>
                     <a:lnT w="12700" cap="flat" cmpd="sng" algn="ctr">
                       <a:solidFill>
-                        <a:srgbClr val="d9dee6"/>
+                        <a:srgbClr val="D9DEE6"/>
                       </a:solidFill>
                       <a:prstDash val="solid"/>
                       <a:round/>
@@ -9962,7 +9645,7 @@
                     </a:lnT>
                     <a:lnB w="12700" cap="flat" cmpd="sng" algn="ctr">
                       <a:solidFill>
-                        <a:srgbClr val="d9dee6"/>
+                        <a:srgbClr val="D9DEE6"/>
                       </a:solidFill>
                       <a:prstDash val="solid"/>
                       <a:round/>
@@ -9970,13 +9653,14 @@
                       <a:tailEnd w="med" len="med"/>
                     </a:lnB>
                     <a:solidFill>
-                      <a:srgbClr val="f4f6fa"/>
+                      <a:srgbClr val="F4F6FA"/>
                     </a:solidFill>
                   </a:tcPr>
                 </a:tc>
                 <a:tc>
                   <a:txBody>
-                    <a:bodyPr vert="horz" lIns="91440" tIns="36576" rIns="73152" bIns="36576" anchor="ctr" anchorCtr="0"/>
+                    <a:bodyPr/>
+                    <a:lstStyle/>
                     <a:p>
                       <a:pPr marL="0" indent="0" algn="l">
                         <a:lnSpc>
@@ -9988,7 +9672,7 @@
                       <a:r>
                         <a:rPr lang="ko-KR" altLang="en-US" sz="1050">
                           <a:solidFill>
-                            <a:srgbClr val="1f2637"/>
+                            <a:srgbClr val="1F2637"/>
                           </a:solidFill>
                           <a:latin typeface="맑은 고딕"/>
                           <a:ea typeface="맑은 고딕"/>
@@ -9999,7 +9683,7 @@
                       <a:r>
                         <a:rPr lang="en-US" altLang="ko-KR" sz="1050">
                           <a:solidFill>
-                            <a:srgbClr val="1f2637"/>
+                            <a:srgbClr val="1F2637"/>
                           </a:solidFill>
                           <a:latin typeface="맑은 고딕"/>
                           <a:ea typeface="맑은 고딕"/>
@@ -10010,7 +9694,7 @@
                       <a:r>
                         <a:rPr lang="ko-KR" altLang="en-US" sz="1050">
                           <a:solidFill>
-                            <a:srgbClr val="1f2637"/>
+                            <a:srgbClr val="1F2637"/>
                           </a:solidFill>
                           <a:latin typeface="맑은 고딕"/>
                           <a:ea typeface="맑은 고딕"/>
@@ -10021,7 +9705,7 @@
                       <a:r>
                         <a:rPr lang="en-US" altLang="ko-KR" sz="1050">
                           <a:solidFill>
-                            <a:srgbClr val="1f2637"/>
+                            <a:srgbClr val="1F2637"/>
                           </a:solidFill>
                           <a:latin typeface="맑은 고딕"/>
                           <a:ea typeface="맑은 고딕"/>
@@ -10029,20 +9713,12 @@
                         </a:rPr>
                         <a:t>3</a:t>
                       </a:r>
-                      <a:endParaRPr lang="en-US" altLang="ko-KR" sz="1050">
-                        <a:solidFill>
-                          <a:srgbClr val="1f2637"/>
-                        </a:solidFill>
-                        <a:latin typeface="맑은 고딕"/>
-                        <a:ea typeface="맑은 고딕"/>
-                        <a:cs typeface="맑은 고딕"/>
-                      </a:endParaRPr>
                     </a:p>
                   </a:txBody>
-                  <a:tcPr marL="91440" marR="73152" marT="36576" marB="36576" anchor="ctr">
+                  <a:tcPr marR="73152" marT="36576" marB="36576" anchor="ctr">
                     <a:lnL w="12700" cap="flat" cmpd="sng" algn="ctr">
                       <a:solidFill>
-                        <a:srgbClr val="d9dee6"/>
+                        <a:srgbClr val="D9DEE6"/>
                       </a:solidFill>
                       <a:prstDash val="solid"/>
                       <a:round/>
@@ -10051,7 +9727,7 @@
                     </a:lnL>
                     <a:lnR w="12700" cap="flat" cmpd="sng" algn="ctr">
                       <a:solidFill>
-                        <a:srgbClr val="d9dee6"/>
+                        <a:srgbClr val="D9DEE6"/>
                       </a:solidFill>
                       <a:prstDash val="solid"/>
                       <a:round/>
@@ -10060,7 +9736,7 @@
                     </a:lnR>
                     <a:lnT w="12700" cap="flat" cmpd="sng" algn="ctr">
                       <a:solidFill>
-                        <a:srgbClr val="d9dee6"/>
+                        <a:srgbClr val="D9DEE6"/>
                       </a:solidFill>
                       <a:prstDash val="solid"/>
                       <a:round/>
@@ -10069,7 +9745,7 @@
                     </a:lnT>
                     <a:lnB w="12700" cap="flat" cmpd="sng" algn="ctr">
                       <a:solidFill>
-                        <a:srgbClr val="d9dee6"/>
+                        <a:srgbClr val="D9DEE6"/>
                       </a:solidFill>
                       <a:prstDash val="solid"/>
                       <a:round/>
@@ -10077,13 +9753,14 @@
                       <a:tailEnd w="med" len="med"/>
                     </a:lnB>
                     <a:solidFill>
-                      <a:srgbClr val="ffffff"/>
+                      <a:srgbClr val="FFFFFF"/>
                     </a:solidFill>
                   </a:tcPr>
                 </a:tc>
                 <a:tc>
                   <a:txBody>
-                    <a:bodyPr vert="horz" lIns="91440" tIns="36576" rIns="73152" bIns="36576" anchor="ctr" anchorCtr="0"/>
+                    <a:bodyPr/>
+                    <a:lstStyle/>
                     <a:p>
                       <a:pPr marL="0" indent="0" algn="l">
                         <a:lnSpc>
@@ -10095,7 +9772,7 @@
                       <a:r>
                         <a:rPr lang="ko-KR" altLang="en-US" sz="1050">
                           <a:solidFill>
-                            <a:srgbClr val="1f2637"/>
+                            <a:srgbClr val="1F2637"/>
                           </a:solidFill>
                           <a:latin typeface="맑은 고딕"/>
                           <a:ea typeface="맑은 고딕"/>
@@ -10103,20 +9780,12 @@
                         </a:rPr>
                         <a:t>1층 최대 규모의 전투</a:t>
                       </a:r>
-                      <a:endParaRPr lang="ko-KR" altLang="en-US" sz="1050">
-                        <a:solidFill>
-                          <a:srgbClr val="1f2637"/>
-                        </a:solidFill>
-                        <a:latin typeface="맑은 고딕"/>
-                        <a:ea typeface="맑은 고딕"/>
-                        <a:cs typeface="맑은 고딕"/>
-                      </a:endParaRPr>
                     </a:p>
                   </a:txBody>
-                  <a:tcPr marL="91440" marR="73152" marT="36576" marB="36576" anchor="ctr">
+                  <a:tcPr marR="73152" marT="36576" marB="36576" anchor="ctr">
                     <a:lnL w="12700" cap="flat" cmpd="sng" algn="ctr">
                       <a:solidFill>
-                        <a:srgbClr val="d9dee6"/>
+                        <a:srgbClr val="D9DEE6"/>
                       </a:solidFill>
                       <a:prstDash val="solid"/>
                       <a:round/>
@@ -10125,7 +9794,7 @@
                     </a:lnL>
                     <a:lnR w="12700" cap="flat" cmpd="sng" algn="ctr">
                       <a:solidFill>
-                        <a:srgbClr val="d9dee6"/>
+                        <a:srgbClr val="D9DEE6"/>
                       </a:solidFill>
                       <a:prstDash val="solid"/>
                       <a:round/>
@@ -10134,7 +9803,7 @@
                     </a:lnR>
                     <a:lnT w="12700" cap="flat" cmpd="sng" algn="ctr">
                       <a:solidFill>
-                        <a:srgbClr val="d9dee6"/>
+                        <a:srgbClr val="D9DEE6"/>
                       </a:solidFill>
                       <a:prstDash val="solid"/>
                       <a:round/>
@@ -10143,7 +9812,7 @@
                     </a:lnT>
                     <a:lnB w="12700" cap="flat" cmpd="sng" algn="ctr">
                       <a:solidFill>
-                        <a:srgbClr val="d9dee6"/>
+                        <a:srgbClr val="D9DEE6"/>
                       </a:solidFill>
                       <a:prstDash val="solid"/>
                       <a:round/>
@@ -10151,15 +9820,21 @@
                       <a:tailEnd w="med" len="med"/>
                     </a:lnB>
                     <a:solidFill>
-                      <a:srgbClr val="ffffff"/>
+                      <a:srgbClr val="FFFFFF"/>
                     </a:solidFill>
                   </a:tcPr>
                 </a:tc>
+                <a:extLst>
+                  <a:ext uri="{0D108BD9-81ED-4DB2-BD59-A6C34878D82A}">
+                    <a16:rowId xmlns:a16="http://schemas.microsoft.com/office/drawing/2014/main" val="10002"/>
+                  </a:ext>
+                </a:extLst>
               </a:tr>
               <a:tr h="493776">
                 <a:tc>
                   <a:txBody>
-                    <a:bodyPr vert="horz" lIns="91440" tIns="36576" rIns="73152" bIns="36576" anchor="ctr" anchorCtr="0"/>
+                    <a:bodyPr/>
+                    <a:lstStyle/>
                     <a:p>
                       <a:pPr marL="0" indent="0" algn="l">
                         <a:buNone/>
@@ -10168,7 +9843,7 @@
                       <a:r>
                         <a:rPr lang="ko-KR" altLang="en-US" sz="1100" b="1">
                           <a:solidFill>
-                            <a:srgbClr val="1f2637"/>
+                            <a:srgbClr val="1F2637"/>
                           </a:solidFill>
                           <a:latin typeface="맑은 고딕"/>
                           <a:ea typeface="맑은 고딕"/>
@@ -10176,20 +9851,12 @@
                         </a:rPr>
                         <a:t>2층 왼쪽 방</a:t>
                       </a:r>
-                      <a:endParaRPr lang="ko-KR" altLang="en-US" sz="1100" b="1">
-                        <a:solidFill>
-                          <a:srgbClr val="1f2637"/>
-                        </a:solidFill>
-                        <a:latin typeface="맑은 고딕"/>
-                        <a:ea typeface="맑은 고딕"/>
-                        <a:cs typeface="맑은 고딕"/>
-                      </a:endParaRPr>
                     </a:p>
                   </a:txBody>
-                  <a:tcPr marL="91440" marR="73152" marT="36576" marB="36576" anchor="ctr">
+                  <a:tcPr marR="73152" marT="36576" marB="36576" anchor="ctr">
                     <a:lnL w="12700" cap="flat" cmpd="sng" algn="ctr">
                       <a:solidFill>
-                        <a:srgbClr val="d9dee6"/>
+                        <a:srgbClr val="D9DEE6"/>
                       </a:solidFill>
                       <a:prstDash val="solid"/>
                       <a:round/>
@@ -10198,7 +9865,7 @@
                     </a:lnL>
                     <a:lnR w="12700" cap="flat" cmpd="sng" algn="ctr">
                       <a:solidFill>
-                        <a:srgbClr val="d9dee6"/>
+                        <a:srgbClr val="D9DEE6"/>
                       </a:solidFill>
                       <a:prstDash val="solid"/>
                       <a:round/>
@@ -10207,7 +9874,7 @@
                     </a:lnR>
                     <a:lnT w="12700" cap="flat" cmpd="sng" algn="ctr">
                       <a:solidFill>
-                        <a:srgbClr val="d9dee6"/>
+                        <a:srgbClr val="D9DEE6"/>
                       </a:solidFill>
                       <a:prstDash val="solid"/>
                       <a:round/>
@@ -10216,7 +9883,7 @@
                     </a:lnT>
                     <a:lnB w="12700" cap="flat" cmpd="sng" algn="ctr">
                       <a:solidFill>
-                        <a:srgbClr val="d9dee6"/>
+                        <a:srgbClr val="D9DEE6"/>
                       </a:solidFill>
                       <a:prstDash val="solid"/>
                       <a:round/>
@@ -10224,13 +9891,14 @@
                       <a:tailEnd w="med" len="med"/>
                     </a:lnB>
                     <a:solidFill>
-                      <a:srgbClr val="f4f6fa"/>
+                      <a:srgbClr val="F4F6FA"/>
                     </a:solidFill>
                   </a:tcPr>
                 </a:tc>
                 <a:tc>
                   <a:txBody>
-                    <a:bodyPr vert="horz" lIns="91440" tIns="36576" rIns="73152" bIns="36576" anchor="ctr" anchorCtr="0"/>
+                    <a:bodyPr/>
+                    <a:lstStyle/>
                     <a:p>
                       <a:pPr marL="0" indent="0" algn="l">
                         <a:lnSpc>
@@ -10242,7 +9910,7 @@
                       <a:r>
                         <a:rPr lang="ko-KR" altLang="en-US" sz="1050">
                           <a:solidFill>
-                            <a:srgbClr val="1f2637"/>
+                            <a:srgbClr val="1F2637"/>
                           </a:solidFill>
                           <a:latin typeface="맑은 고딕"/>
                           <a:ea typeface="맑은 고딕"/>
@@ -10250,14 +9918,6 @@
                         </a:rPr>
                         <a:t>경호로봇 ×3 </a:t>
                       </a:r>
-                      <a:endParaRPr lang="ko-KR" altLang="en-US" sz="1050">
-                        <a:solidFill>
-                          <a:srgbClr val="1f2637"/>
-                        </a:solidFill>
-                        <a:latin typeface="맑은 고딕"/>
-                        <a:ea typeface="맑은 고딕"/>
-                        <a:cs typeface="맑은 고딕"/>
-                      </a:endParaRPr>
                     </a:p>
                     <a:p>
                       <a:pPr marL="0" indent="0" algn="l">
@@ -10270,7 +9930,7 @@
                       <a:r>
                         <a:rPr lang="ko-KR" altLang="en-US" sz="1050">
                           <a:solidFill>
-                            <a:srgbClr val="1f2637"/>
+                            <a:srgbClr val="1F2637"/>
                           </a:solidFill>
                           <a:latin typeface="맑은 고딕"/>
                           <a:ea typeface="맑은 고딕"/>
@@ -10278,20 +9938,12 @@
                         </a:rPr>
                         <a:t>경호로봇 ×2 · 터렛 ×1</a:t>
                       </a:r>
-                      <a:endParaRPr lang="ko-KR" altLang="en-US" sz="1050">
-                        <a:solidFill>
-                          <a:srgbClr val="1f2637"/>
-                        </a:solidFill>
-                        <a:latin typeface="맑은 고딕"/>
-                        <a:ea typeface="맑은 고딕"/>
-                        <a:cs typeface="맑은 고딕"/>
-                      </a:endParaRPr>
                     </a:p>
                   </a:txBody>
-                  <a:tcPr marL="91440" marR="73152" marT="36576" marB="36576" anchor="ctr">
+                  <a:tcPr marR="73152" marT="36576" marB="36576" anchor="ctr">
                     <a:lnL w="12700" cap="flat" cmpd="sng" algn="ctr">
                       <a:solidFill>
-                        <a:srgbClr val="d9dee6"/>
+                        <a:srgbClr val="D9DEE6"/>
                       </a:solidFill>
                       <a:prstDash val="solid"/>
                       <a:round/>
@@ -10300,7 +9952,7 @@
                     </a:lnL>
                     <a:lnR w="12700" cap="flat" cmpd="sng" algn="ctr">
                       <a:solidFill>
-                        <a:srgbClr val="d9dee6"/>
+                        <a:srgbClr val="D9DEE6"/>
                       </a:solidFill>
                       <a:prstDash val="solid"/>
                       <a:round/>
@@ -10309,7 +9961,7 @@
                     </a:lnR>
                     <a:lnT w="12700" cap="flat" cmpd="sng" algn="ctr">
                       <a:solidFill>
-                        <a:srgbClr val="d9dee6"/>
+                        <a:srgbClr val="D9DEE6"/>
                       </a:solidFill>
                       <a:prstDash val="solid"/>
                       <a:round/>
@@ -10318,7 +9970,7 @@
                     </a:lnT>
                     <a:lnB w="12700" cap="flat" cmpd="sng" algn="ctr">
                       <a:solidFill>
-                        <a:srgbClr val="d9dee6"/>
+                        <a:srgbClr val="D9DEE6"/>
                       </a:solidFill>
                       <a:prstDash val="solid"/>
                       <a:round/>
@@ -10326,13 +9978,14 @@
                       <a:tailEnd w="med" len="med"/>
                     </a:lnB>
                     <a:solidFill>
-                      <a:srgbClr val="ffffff"/>
+                      <a:srgbClr val="FFFFFF"/>
                     </a:solidFill>
                   </a:tcPr>
                 </a:tc>
                 <a:tc>
                   <a:txBody>
-                    <a:bodyPr vert="horz" lIns="91440" tIns="36576" rIns="73152" bIns="36576" anchor="ctr" anchorCtr="0"/>
+                    <a:bodyPr/>
+                    <a:lstStyle/>
                     <a:p>
                       <a:pPr marL="0" indent="0" algn="l">
                         <a:lnSpc>
@@ -10344,7 +9997,7 @@
                       <a:r>
                         <a:rPr lang="ko-KR" altLang="en-US" sz="1050">
                           <a:solidFill>
-                            <a:srgbClr val="1f2637"/>
+                            <a:srgbClr val="1F2637"/>
                           </a:solidFill>
                           <a:latin typeface="맑은 고딕"/>
                           <a:ea typeface="맑은 고딕"/>
@@ -10352,20 +10005,12 @@
                         </a:rPr>
                         <a:t>일반 몹의 조합이 방마다 다르다</a:t>
                       </a:r>
-                      <a:endParaRPr lang="ko-KR" altLang="en-US" sz="1050">
-                        <a:solidFill>
-                          <a:srgbClr val="1f2637"/>
-                        </a:solidFill>
-                        <a:latin typeface="맑은 고딕"/>
-                        <a:ea typeface="맑은 고딕"/>
-                        <a:cs typeface="맑은 고딕"/>
-                      </a:endParaRPr>
                     </a:p>
                   </a:txBody>
-                  <a:tcPr marL="91440" marR="73152" marT="36576" marB="36576" anchor="ctr">
+                  <a:tcPr marR="73152" marT="36576" marB="36576" anchor="ctr">
                     <a:lnL w="12700" cap="flat" cmpd="sng" algn="ctr">
                       <a:solidFill>
-                        <a:srgbClr val="d9dee6"/>
+                        <a:srgbClr val="D9DEE6"/>
                       </a:solidFill>
                       <a:prstDash val="solid"/>
                       <a:round/>
@@ -10374,7 +10019,7 @@
                     </a:lnL>
                     <a:lnR w="12700" cap="flat" cmpd="sng" algn="ctr">
                       <a:solidFill>
-                        <a:srgbClr val="d9dee6"/>
+                        <a:srgbClr val="D9DEE6"/>
                       </a:solidFill>
                       <a:prstDash val="solid"/>
                       <a:round/>
@@ -10383,7 +10028,7 @@
                     </a:lnR>
                     <a:lnT w="12700" cap="flat" cmpd="sng" algn="ctr">
                       <a:solidFill>
-                        <a:srgbClr val="d9dee6"/>
+                        <a:srgbClr val="D9DEE6"/>
                       </a:solidFill>
                       <a:prstDash val="solid"/>
                       <a:round/>
@@ -10392,7 +10037,7 @@
                     </a:lnT>
                     <a:lnB w="12700" cap="flat" cmpd="sng" algn="ctr">
                       <a:solidFill>
-                        <a:srgbClr val="d9dee6"/>
+                        <a:srgbClr val="D9DEE6"/>
                       </a:solidFill>
                       <a:prstDash val="solid"/>
                       <a:round/>
@@ -10400,15 +10045,21 @@
                       <a:tailEnd w="med" len="med"/>
                     </a:lnB>
                     <a:solidFill>
-                      <a:srgbClr val="ffffff"/>
+                      <a:srgbClr val="FFFFFF"/>
                     </a:solidFill>
                   </a:tcPr>
                 </a:tc>
+                <a:extLst>
+                  <a:ext uri="{0D108BD9-81ED-4DB2-BD59-A6C34878D82A}">
+                    <a16:rowId xmlns:a16="http://schemas.microsoft.com/office/drawing/2014/main" val="10003"/>
+                  </a:ext>
+                </a:extLst>
               </a:tr>
               <a:tr h="493776">
                 <a:tc>
                   <a:txBody>
-                    <a:bodyPr vert="horz" lIns="91440" tIns="36576" rIns="73152" bIns="36576" anchor="ctr" anchorCtr="0"/>
+                    <a:bodyPr/>
+                    <a:lstStyle/>
                     <a:p>
                       <a:pPr marL="0" indent="0" algn="l">
                         <a:buNone/>
@@ -10417,7 +10068,7 @@
                       <a:r>
                         <a:rPr lang="ko-KR" altLang="en-US" sz="1100" b="1">
                           <a:solidFill>
-                            <a:srgbClr val="1f2637"/>
+                            <a:srgbClr val="1F2637"/>
                           </a:solidFill>
                           <a:latin typeface="맑은 고딕"/>
                           <a:ea typeface="맑은 고딕"/>
@@ -10425,20 +10076,12 @@
                         </a:rPr>
                         <a:t>2층 오른쪽 방</a:t>
                       </a:r>
-                      <a:endParaRPr lang="ko-KR" altLang="en-US" sz="1100" b="1">
-                        <a:solidFill>
-                          <a:srgbClr val="1f2637"/>
-                        </a:solidFill>
-                        <a:latin typeface="맑은 고딕"/>
-                        <a:ea typeface="맑은 고딕"/>
-                        <a:cs typeface="맑은 고딕"/>
-                      </a:endParaRPr>
                     </a:p>
                   </a:txBody>
-                  <a:tcPr marL="91440" marR="73152" marT="36576" marB="36576" anchor="ctr">
+                  <a:tcPr marR="73152" marT="36576" marB="36576" anchor="ctr">
                     <a:lnL w="12700" cap="flat" cmpd="sng" algn="ctr">
                       <a:solidFill>
-                        <a:srgbClr val="d9dee6"/>
+                        <a:srgbClr val="D9DEE6"/>
                       </a:solidFill>
                       <a:prstDash val="solid"/>
                       <a:round/>
@@ -10447,7 +10090,7 @@
                     </a:lnL>
                     <a:lnR w="12700" cap="flat" cmpd="sng" algn="ctr">
                       <a:solidFill>
-                        <a:srgbClr val="d9dee6"/>
+                        <a:srgbClr val="D9DEE6"/>
                       </a:solidFill>
                       <a:prstDash val="solid"/>
                       <a:round/>
@@ -10456,7 +10099,7 @@
                     </a:lnR>
                     <a:lnT w="12700" cap="flat" cmpd="sng" algn="ctr">
                       <a:solidFill>
-                        <a:srgbClr val="d9dee6"/>
+                        <a:srgbClr val="D9DEE6"/>
                       </a:solidFill>
                       <a:prstDash val="solid"/>
                       <a:round/>
@@ -10465,7 +10108,7 @@
                     </a:lnT>
                     <a:lnB w="12700" cap="flat" cmpd="sng" algn="ctr">
                       <a:solidFill>
-                        <a:srgbClr val="d9dee6"/>
+                        <a:srgbClr val="D9DEE6"/>
                       </a:solidFill>
                       <a:prstDash val="solid"/>
                       <a:round/>
@@ -10473,13 +10116,14 @@
                       <a:tailEnd w="med" len="med"/>
                     </a:lnB>
                     <a:solidFill>
-                      <a:srgbClr val="f4f6fa"/>
+                      <a:srgbClr val="F4F6FA"/>
                     </a:solidFill>
                   </a:tcPr>
                 </a:tc>
                 <a:tc>
                   <a:txBody>
-                    <a:bodyPr vert="horz" lIns="91440" tIns="36576" rIns="73152" bIns="36576" anchor="ctr" anchorCtr="0"/>
+                    <a:bodyPr/>
+                    <a:lstStyle/>
                     <a:p>
                       <a:pPr marL="0" indent="0" algn="l">
                         <a:lnSpc>
@@ -10491,7 +10135,7 @@
                       <a:r>
                         <a:rPr lang="ko-KR" altLang="en-US" sz="1050">
                           <a:solidFill>
-                            <a:srgbClr val="1f2637"/>
+                            <a:srgbClr val="1F2637"/>
                           </a:solidFill>
                           <a:latin typeface="맑은 고딕"/>
                           <a:ea typeface="맑은 고딕"/>
@@ -10502,7 +10146,7 @@
                       <a:r>
                         <a:rPr lang="en-US" altLang="ko-KR" sz="1050">
                           <a:solidFill>
-                            <a:srgbClr val="1f2637"/>
+                            <a:srgbClr val="1F2637"/>
                           </a:solidFill>
                           <a:latin typeface="맑은 고딕"/>
                           <a:ea typeface="맑은 고딕"/>
@@ -10513,7 +10157,7 @@
                       <a:br>
                         <a:rPr lang="en-US" altLang="ko-KR" sz="1050">
                           <a:solidFill>
-                            <a:srgbClr val="1f2637"/>
+                            <a:srgbClr val="1F2637"/>
                           </a:solidFill>
                           <a:latin typeface="맑은 고딕"/>
                           <a:ea typeface="맑은 고딕"/>
@@ -10523,7 +10167,7 @@
                       <a:r>
                         <a:rPr lang="ko-KR" altLang="en-US" sz="1050">
                           <a:solidFill>
-                            <a:srgbClr val="1f2637"/>
+                            <a:srgbClr val="1F2637"/>
                           </a:solidFill>
                           <a:latin typeface="맑은 고딕"/>
                           <a:ea typeface="맑은 고딕"/>
@@ -10534,7 +10178,7 @@
                       <a:r>
                         <a:rPr lang="en-US" altLang="ko-KR" sz="1050">
                           <a:solidFill>
-                            <a:srgbClr val="1f2637"/>
+                            <a:srgbClr val="1F2637"/>
                           </a:solidFill>
                           <a:latin typeface="맑은 고딕"/>
                           <a:ea typeface="맑은 고딕"/>
@@ -10545,7 +10189,7 @@
                       <a:r>
                         <a:rPr lang="ko-KR" altLang="en-US" sz="1050">
                           <a:solidFill>
-                            <a:srgbClr val="1f2637"/>
+                            <a:srgbClr val="1F2637"/>
                           </a:solidFill>
                           <a:latin typeface="맑은 고딕"/>
                           <a:ea typeface="맑은 고딕"/>
@@ -10556,7 +10200,7 @@
                       <a:r>
                         <a:rPr lang="en-US" altLang="ko-KR" sz="1050">
                           <a:solidFill>
-                            <a:srgbClr val="1f2637"/>
+                            <a:srgbClr val="1F2637"/>
                           </a:solidFill>
                           <a:latin typeface="맑은 고딕"/>
                           <a:ea typeface="맑은 고딕"/>
@@ -10564,20 +10208,12 @@
                         </a:rPr>
                         <a:t>x 2</a:t>
                       </a:r>
-                      <a:endParaRPr lang="en-US" altLang="ko-KR" sz="1050">
-                        <a:solidFill>
-                          <a:srgbClr val="1f2637"/>
-                        </a:solidFill>
-                        <a:latin typeface="맑은 고딕"/>
-                        <a:ea typeface="맑은 고딕"/>
-                        <a:cs typeface="맑은 고딕"/>
-                      </a:endParaRPr>
                     </a:p>
                   </a:txBody>
-                  <a:tcPr marL="91440" marR="73152" marT="36576" marB="36576" anchor="ctr">
+                  <a:tcPr marR="73152" marT="36576" marB="36576" anchor="ctr">
                     <a:lnL w="12700" cap="flat" cmpd="sng" algn="ctr">
                       <a:solidFill>
-                        <a:srgbClr val="d9dee6"/>
+                        <a:srgbClr val="D9DEE6"/>
                       </a:solidFill>
                       <a:prstDash val="solid"/>
                       <a:round/>
@@ -10586,7 +10222,7 @@
                     </a:lnL>
                     <a:lnR w="12700" cap="flat" cmpd="sng" algn="ctr">
                       <a:solidFill>
-                        <a:srgbClr val="d9dee6"/>
+                        <a:srgbClr val="D9DEE6"/>
                       </a:solidFill>
                       <a:prstDash val="solid"/>
                       <a:round/>
@@ -10595,7 +10231,7 @@
                     </a:lnR>
                     <a:lnT w="12700" cap="flat" cmpd="sng" algn="ctr">
                       <a:solidFill>
-                        <a:srgbClr val="d9dee6"/>
+                        <a:srgbClr val="D9DEE6"/>
                       </a:solidFill>
                       <a:prstDash val="solid"/>
                       <a:round/>
@@ -10604,7 +10240,7 @@
                     </a:lnT>
                     <a:lnB w="12700" cap="flat" cmpd="sng" algn="ctr">
                       <a:solidFill>
-                        <a:srgbClr val="d9dee6"/>
+                        <a:srgbClr val="D9DEE6"/>
                       </a:solidFill>
                       <a:prstDash val="solid"/>
                       <a:round/>
@@ -10612,13 +10248,14 @@
                       <a:tailEnd w="med" len="med"/>
                     </a:lnB>
                     <a:solidFill>
-                      <a:srgbClr val="ffffff"/>
+                      <a:srgbClr val="FFFFFF"/>
                     </a:solidFill>
                   </a:tcPr>
                 </a:tc>
                 <a:tc>
                   <a:txBody>
-                    <a:bodyPr vert="horz" lIns="91440" tIns="36576" rIns="73152" bIns="36576" anchor="ctr" anchorCtr="0"/>
+                    <a:bodyPr/>
+                    <a:lstStyle/>
                     <a:p>
                       <a:pPr marL="0" indent="0" algn="l">
                         <a:lnSpc>
@@ -10630,7 +10267,7 @@
                       <a:r>
                         <a:rPr lang="ko-KR" altLang="en-US" sz="1050">
                           <a:solidFill>
-                            <a:srgbClr val="1f2637"/>
+                            <a:srgbClr val="1F2637"/>
                           </a:solidFill>
                           <a:latin typeface="맑은 고딕"/>
                           <a:ea typeface="맑은 고딕"/>
@@ -10638,20 +10275,12 @@
                         </a:rPr>
                         <a:t>일반 몹의 조합이 방마다 다르다</a:t>
                       </a:r>
-                      <a:endParaRPr lang="ko-KR" altLang="en-US" sz="1050">
-                        <a:solidFill>
-                          <a:srgbClr val="1f2637"/>
-                        </a:solidFill>
-                        <a:latin typeface="맑은 고딕"/>
-                        <a:ea typeface="맑은 고딕"/>
-                        <a:cs typeface="맑은 고딕"/>
-                      </a:endParaRPr>
                     </a:p>
                   </a:txBody>
-                  <a:tcPr marL="91440" marR="73152" marT="36576" marB="36576" anchor="ctr">
+                  <a:tcPr marR="73152" marT="36576" marB="36576" anchor="ctr">
                     <a:lnL w="12700" cap="flat" cmpd="sng" algn="ctr">
                       <a:solidFill>
-                        <a:srgbClr val="d9dee6"/>
+                        <a:srgbClr val="D9DEE6"/>
                       </a:solidFill>
                       <a:prstDash val="solid"/>
                       <a:round/>
@@ -10660,7 +10289,7 @@
                     </a:lnL>
                     <a:lnR w="12700" cap="flat" cmpd="sng" algn="ctr">
                       <a:solidFill>
-                        <a:srgbClr val="d9dee6"/>
+                        <a:srgbClr val="D9DEE6"/>
                       </a:solidFill>
                       <a:prstDash val="solid"/>
                       <a:round/>
@@ -10669,7 +10298,7 @@
                     </a:lnR>
                     <a:lnT w="12700" cap="flat" cmpd="sng" algn="ctr">
                       <a:solidFill>
-                        <a:srgbClr val="d9dee6"/>
+                        <a:srgbClr val="D9DEE6"/>
                       </a:solidFill>
                       <a:prstDash val="solid"/>
                       <a:round/>
@@ -10678,7 +10307,7 @@
                     </a:lnT>
                     <a:lnB w="12700" cap="flat" cmpd="sng" algn="ctr">
                       <a:solidFill>
-                        <a:srgbClr val="d9dee6"/>
+                        <a:srgbClr val="D9DEE6"/>
                       </a:solidFill>
                       <a:prstDash val="solid"/>
                       <a:round/>
@@ -10686,15 +10315,21 @@
                       <a:tailEnd w="med" len="med"/>
                     </a:lnB>
                     <a:solidFill>
-                      <a:srgbClr val="ffffff"/>
+                      <a:srgbClr val="FFFFFF"/>
                     </a:solidFill>
                   </a:tcPr>
                 </a:tc>
+                <a:extLst>
+                  <a:ext uri="{0D108BD9-81ED-4DB2-BD59-A6C34878D82A}">
+                    <a16:rowId xmlns:a16="http://schemas.microsoft.com/office/drawing/2014/main" val="10004"/>
+                  </a:ext>
+                </a:extLst>
               </a:tr>
               <a:tr h="493776">
                 <a:tc>
                   <a:txBody>
-                    <a:bodyPr vert="horz" lIns="91440" tIns="36576" rIns="73152" bIns="36576" anchor="ctr" anchorCtr="0"/>
+                    <a:bodyPr/>
+                    <a:lstStyle/>
                     <a:p>
                       <a:pPr marL="0" indent="0" algn="l">
                         <a:buNone/>
@@ -10703,7 +10338,7 @@
                       <a:r>
                         <a:rPr lang="ko-KR" altLang="en-US" sz="1100" b="1">
                           <a:solidFill>
-                            <a:srgbClr val="1f2637"/>
+                            <a:srgbClr val="1F2637"/>
                           </a:solidFill>
                           <a:latin typeface="맑은 고딕"/>
                           <a:ea typeface="맑은 고딕"/>
@@ -10711,20 +10346,12 @@
                         </a:rPr>
                         <a:t>2층 중앙 방</a:t>
                       </a:r>
-                      <a:endParaRPr lang="ko-KR" altLang="en-US" sz="1100" b="1">
-                        <a:solidFill>
-                          <a:srgbClr val="1f2637"/>
-                        </a:solidFill>
-                        <a:latin typeface="맑은 고딕"/>
-                        <a:ea typeface="맑은 고딕"/>
-                        <a:cs typeface="맑은 고딕"/>
-                      </a:endParaRPr>
                     </a:p>
                   </a:txBody>
-                  <a:tcPr marL="91440" marR="73152" marT="36576" marB="36576" anchor="ctr">
+                  <a:tcPr marR="73152" marT="36576" marB="36576" anchor="ctr">
                     <a:lnL w="12700" cap="flat" cmpd="sng" algn="ctr">
                       <a:solidFill>
-                        <a:srgbClr val="d9dee6"/>
+                        <a:srgbClr val="D9DEE6"/>
                       </a:solidFill>
                       <a:prstDash val="solid"/>
                       <a:round/>
@@ -10733,7 +10360,7 @@
                     </a:lnL>
                     <a:lnR w="12700" cap="flat" cmpd="sng" algn="ctr">
                       <a:solidFill>
-                        <a:srgbClr val="d9dee6"/>
+                        <a:srgbClr val="D9DEE6"/>
                       </a:solidFill>
                       <a:prstDash val="solid"/>
                       <a:round/>
@@ -10742,7 +10369,7 @@
                     </a:lnR>
                     <a:lnT w="12700" cap="flat" cmpd="sng" algn="ctr">
                       <a:solidFill>
-                        <a:srgbClr val="d9dee6"/>
+                        <a:srgbClr val="D9DEE6"/>
                       </a:solidFill>
                       <a:prstDash val="solid"/>
                       <a:round/>
@@ -10751,7 +10378,7 @@
                     </a:lnT>
                     <a:lnB w="12700" cap="flat" cmpd="sng" algn="ctr">
                       <a:solidFill>
-                        <a:srgbClr val="d9dee6"/>
+                        <a:srgbClr val="D9DEE6"/>
                       </a:solidFill>
                       <a:prstDash val="solid"/>
                       <a:round/>
@@ -10759,13 +10386,14 @@
                       <a:tailEnd w="med" len="med"/>
                     </a:lnB>
                     <a:solidFill>
-                      <a:srgbClr val="f4f6fa"/>
+                      <a:srgbClr val="F4F6FA"/>
                     </a:solidFill>
                   </a:tcPr>
                 </a:tc>
                 <a:tc>
                   <a:txBody>
-                    <a:bodyPr vert="horz" lIns="91440" tIns="36576" rIns="73152" bIns="36576" anchor="ctr" anchorCtr="0"/>
+                    <a:bodyPr/>
+                    <a:lstStyle/>
                     <a:p>
                       <a:pPr marL="0" indent="0" algn="l">
                         <a:lnSpc>
@@ -10777,7 +10405,7 @@
                       <a:r>
                         <a:rPr lang="ko-KR" altLang="en-US" sz="1050">
                           <a:solidFill>
-                            <a:srgbClr val="1f2637"/>
+                            <a:srgbClr val="1F2637"/>
                           </a:solidFill>
                           <a:latin typeface="맑은 고딕"/>
                           <a:ea typeface="맑은 고딕"/>
@@ -10788,7 +10416,7 @@
                       <a:r>
                         <a:rPr lang="en-US" altLang="ko-KR" sz="1050">
                           <a:solidFill>
-                            <a:srgbClr val="1f2637"/>
+                            <a:srgbClr val="1F2637"/>
                           </a:solidFill>
                           <a:latin typeface="맑은 고딕"/>
                           <a:ea typeface="맑은 고딕"/>
@@ -10796,20 +10424,12 @@
                         </a:rPr>
                         <a:t> 3</a:t>
                       </a:r>
-                      <a:endParaRPr lang="en-US" altLang="ko-KR" sz="1050">
-                        <a:solidFill>
-                          <a:srgbClr val="1f2637"/>
-                        </a:solidFill>
-                        <a:latin typeface="맑은 고딕"/>
-                        <a:ea typeface="맑은 고딕"/>
-                        <a:cs typeface="맑은 고딕"/>
-                      </a:endParaRPr>
                     </a:p>
                   </a:txBody>
-                  <a:tcPr marL="91440" marR="73152" marT="36576" marB="36576" anchor="ctr">
+                  <a:tcPr marR="73152" marT="36576" marB="36576" anchor="ctr">
                     <a:lnL w="12700" cap="flat" cmpd="sng" algn="ctr">
                       <a:solidFill>
-                        <a:srgbClr val="d9dee6"/>
+                        <a:srgbClr val="D9DEE6"/>
                       </a:solidFill>
                       <a:prstDash val="solid"/>
                       <a:round/>
@@ -10818,7 +10438,7 @@
                     </a:lnL>
                     <a:lnR w="12700" cap="flat" cmpd="sng" algn="ctr">
                       <a:solidFill>
-                        <a:srgbClr val="d9dee6"/>
+                        <a:srgbClr val="D9DEE6"/>
                       </a:solidFill>
                       <a:prstDash val="solid"/>
                       <a:round/>
@@ -10827,7 +10447,7 @@
                     </a:lnR>
                     <a:lnT w="12700" cap="flat" cmpd="sng" algn="ctr">
                       <a:solidFill>
-                        <a:srgbClr val="d9dee6"/>
+                        <a:srgbClr val="D9DEE6"/>
                       </a:solidFill>
                       <a:prstDash val="solid"/>
                       <a:round/>
@@ -10836,7 +10456,7 @@
                     </a:lnT>
                     <a:lnB w="12700" cap="flat" cmpd="sng" algn="ctr">
                       <a:solidFill>
-                        <a:srgbClr val="d9dee6"/>
+                        <a:srgbClr val="D9DEE6"/>
                       </a:solidFill>
                       <a:prstDash val="solid"/>
                       <a:round/>
@@ -10844,13 +10464,14 @@
                       <a:tailEnd w="med" len="med"/>
                     </a:lnB>
                     <a:solidFill>
-                      <a:srgbClr val="ffffff"/>
+                      <a:srgbClr val="FFFFFF"/>
                     </a:solidFill>
                   </a:tcPr>
                 </a:tc>
                 <a:tc>
                   <a:txBody>
-                    <a:bodyPr vert="horz" lIns="91440" tIns="36576" rIns="73152" bIns="36576" anchor="ctr" anchorCtr="0"/>
+                    <a:bodyPr/>
+                    <a:lstStyle/>
                     <a:p>
                       <a:pPr marL="0" indent="0" algn="l">
                         <a:lnSpc>
@@ -10862,7 +10483,7 @@
                       <a:r>
                         <a:rPr lang="ko-KR" altLang="en-US" sz="1050">
                           <a:solidFill>
-                            <a:srgbClr val="1f2637"/>
+                            <a:srgbClr val="1F2637"/>
                           </a:solidFill>
                           <a:latin typeface="맑은 고딕"/>
                           <a:ea typeface="맑은 고딕"/>
@@ -10870,20 +10491,12 @@
                         </a:rPr>
                         <a:t>몹이 가장 많은 방</a:t>
                       </a:r>
-                      <a:endParaRPr lang="ko-KR" altLang="en-US" sz="1050">
-                        <a:solidFill>
-                          <a:srgbClr val="1f2637"/>
-                        </a:solidFill>
-                        <a:latin typeface="맑은 고딕"/>
-                        <a:ea typeface="맑은 고딕"/>
-                        <a:cs typeface="맑은 고딕"/>
-                      </a:endParaRPr>
                     </a:p>
                   </a:txBody>
-                  <a:tcPr marL="91440" marR="73152" marT="36576" marB="36576" anchor="ctr">
+                  <a:tcPr marR="73152" marT="36576" marB="36576" anchor="ctr">
                     <a:lnL w="12700" cap="flat" cmpd="sng" algn="ctr">
                       <a:solidFill>
-                        <a:srgbClr val="d9dee6"/>
+                        <a:srgbClr val="D9DEE6"/>
                       </a:solidFill>
                       <a:prstDash val="solid"/>
                       <a:round/>
@@ -10892,7 +10505,7 @@
                     </a:lnL>
                     <a:lnR w="12700" cap="flat" cmpd="sng" algn="ctr">
                       <a:solidFill>
-                        <a:srgbClr val="d9dee6"/>
+                        <a:srgbClr val="D9DEE6"/>
                       </a:solidFill>
                       <a:prstDash val="solid"/>
                       <a:round/>
@@ -10901,7 +10514,7 @@
                     </a:lnR>
                     <a:lnT w="12700" cap="flat" cmpd="sng" algn="ctr">
                       <a:solidFill>
-                        <a:srgbClr val="d9dee6"/>
+                        <a:srgbClr val="D9DEE6"/>
                       </a:solidFill>
                       <a:prstDash val="solid"/>
                       <a:round/>
@@ -10910,7 +10523,7 @@
                     </a:lnT>
                     <a:lnB w="12700" cap="flat" cmpd="sng" algn="ctr">
                       <a:solidFill>
-                        <a:srgbClr val="d9dee6"/>
+                        <a:srgbClr val="D9DEE6"/>
                       </a:solidFill>
                       <a:prstDash val="solid"/>
                       <a:round/>
@@ -10918,15 +10531,21 @@
                       <a:tailEnd w="med" len="med"/>
                     </a:lnB>
                     <a:solidFill>
-                      <a:srgbClr val="ffffff"/>
+                      <a:srgbClr val="FFFFFF"/>
                     </a:solidFill>
                   </a:tcPr>
                 </a:tc>
+                <a:extLst>
+                  <a:ext uri="{0D108BD9-81ED-4DB2-BD59-A6C34878D82A}">
+                    <a16:rowId xmlns:a16="http://schemas.microsoft.com/office/drawing/2014/main" val="10005"/>
+                  </a:ext>
+                </a:extLst>
               </a:tr>
               <a:tr h="493776">
                 <a:tc>
                   <a:txBody>
-                    <a:bodyPr vert="horz" lIns="91440" tIns="36576" rIns="73152" bIns="36576" anchor="ctr" anchorCtr="0"/>
+                    <a:bodyPr/>
+                    <a:lstStyle/>
                     <a:p>
                       <a:pPr marL="0" indent="0" algn="l">
                         <a:buNone/>
@@ -10935,7 +10554,7 @@
                       <a:r>
                         <a:rPr lang="ko-KR" altLang="en-US" sz="1100" b="1">
                           <a:solidFill>
-                            <a:srgbClr val="1f2637"/>
+                            <a:srgbClr val="1F2637"/>
                           </a:solidFill>
                           <a:latin typeface="맑은 고딕"/>
                           <a:ea typeface="맑은 고딕"/>
@@ -10943,20 +10562,12 @@
                         </a:rPr>
                         <a:t>보스방</a:t>
                       </a:r>
-                      <a:endParaRPr lang="ko-KR" altLang="en-US" sz="1100" b="1">
-                        <a:solidFill>
-                          <a:srgbClr val="1f2637"/>
-                        </a:solidFill>
-                        <a:latin typeface="맑은 고딕"/>
-                        <a:ea typeface="맑은 고딕"/>
-                        <a:cs typeface="맑은 고딕"/>
-                      </a:endParaRPr>
                     </a:p>
                   </a:txBody>
-                  <a:tcPr marL="91440" marR="73152" marT="36576" marB="36576" anchor="ctr">
+                  <a:tcPr marR="73152" marT="36576" marB="36576" anchor="ctr">
                     <a:lnL w="12700" cap="flat" cmpd="sng" algn="ctr">
                       <a:solidFill>
-                        <a:srgbClr val="d9dee6"/>
+                        <a:srgbClr val="D9DEE6"/>
                       </a:solidFill>
                       <a:prstDash val="solid"/>
                       <a:round/>
@@ -10965,7 +10576,7 @@
                     </a:lnL>
                     <a:lnR w="12700" cap="flat" cmpd="sng" algn="ctr">
                       <a:solidFill>
-                        <a:srgbClr val="d9dee6"/>
+                        <a:srgbClr val="D9DEE6"/>
                       </a:solidFill>
                       <a:prstDash val="solid"/>
                       <a:round/>
@@ -10974,7 +10585,7 @@
                     </a:lnR>
                     <a:lnT w="12700" cap="flat" cmpd="sng" algn="ctr">
                       <a:solidFill>
-                        <a:srgbClr val="d9dee6"/>
+                        <a:srgbClr val="D9DEE6"/>
                       </a:solidFill>
                       <a:prstDash val="solid"/>
                       <a:round/>
@@ -10983,7 +10594,7 @@
                     </a:lnT>
                     <a:lnB w="12700" cap="flat" cmpd="sng" algn="ctr">
                       <a:solidFill>
-                        <a:srgbClr val="d9dee6"/>
+                        <a:srgbClr val="D9DEE6"/>
                       </a:solidFill>
                       <a:prstDash val="solid"/>
                       <a:round/>
@@ -10991,13 +10602,14 @@
                       <a:tailEnd w="med" len="med"/>
                     </a:lnB>
                     <a:solidFill>
-                      <a:srgbClr val="f4f6fa"/>
+                      <a:srgbClr val="F4F6FA"/>
                     </a:solidFill>
                   </a:tcPr>
                 </a:tc>
                 <a:tc>
                   <a:txBody>
-                    <a:bodyPr vert="horz" lIns="91440" tIns="36576" rIns="73152" bIns="36576" anchor="ctr" anchorCtr="0"/>
+                    <a:bodyPr/>
+                    <a:lstStyle/>
                     <a:p>
                       <a:pPr marL="0" indent="0" algn="l">
                         <a:lnSpc>
@@ -11009,7 +10621,7 @@
                       <a:r>
                         <a:rPr lang="ko-KR" altLang="en-US" sz="1050">
                           <a:solidFill>
-                            <a:srgbClr val="1f2637"/>
+                            <a:srgbClr val="1F2637"/>
                           </a:solidFill>
                           <a:latin typeface="맑은 고딕"/>
                           <a:ea typeface="맑은 고딕"/>
@@ -11020,7 +10632,7 @@
                       <a:r>
                         <a:rPr lang="en-US" altLang="ko-KR" sz="1050">
                           <a:solidFill>
-                            <a:srgbClr val="1f2637"/>
+                            <a:srgbClr val="1F2637"/>
                           </a:solidFill>
                           <a:latin typeface="맑은 고딕"/>
                           <a:ea typeface="맑은 고딕"/>
@@ -11031,7 +10643,7 @@
                       <a:r>
                         <a:rPr lang="ko-KR" altLang="en-US" sz="1050">
                           <a:solidFill>
-                            <a:srgbClr val="1f2637"/>
+                            <a:srgbClr val="1F2637"/>
                           </a:solidFill>
                           <a:latin typeface="맑은 고딕"/>
                           <a:ea typeface="맑은 고딕"/>
@@ -11042,7 +10654,7 @@
                       <a:r>
                         <a:rPr lang="en-US" altLang="ko-KR" sz="1050">
                           <a:solidFill>
-                            <a:srgbClr val="1f2637"/>
+                            <a:srgbClr val="1F2637"/>
                           </a:solidFill>
                           <a:latin typeface="맑은 고딕"/>
                           <a:ea typeface="맑은 고딕"/>
@@ -11052,7 +10664,7 @@
                       </a:r>
                       <a:endParaRPr lang="ko-KR" altLang="en-US" sz="1050">
                         <a:solidFill>
-                          <a:srgbClr val="1f2637"/>
+                          <a:srgbClr val="1F2637"/>
                         </a:solidFill>
                         <a:latin typeface="맑은 고딕"/>
                         <a:ea typeface="맑은 고딕"/>
@@ -11060,10 +10672,10 @@
                       </a:endParaRPr>
                     </a:p>
                   </a:txBody>
-                  <a:tcPr marL="91440" marR="73152" marT="36576" marB="36576" anchor="ctr">
+                  <a:tcPr marR="73152" marT="36576" marB="36576" anchor="ctr">
                     <a:lnL w="12700" cap="flat" cmpd="sng" algn="ctr">
                       <a:solidFill>
-                        <a:srgbClr val="d9dee6"/>
+                        <a:srgbClr val="D9DEE6"/>
                       </a:solidFill>
                       <a:prstDash val="solid"/>
                       <a:round/>
@@ -11072,7 +10684,7 @@
                     </a:lnL>
                     <a:lnR w="12700" cap="flat" cmpd="sng" algn="ctr">
                       <a:solidFill>
-                        <a:srgbClr val="d9dee6"/>
+                        <a:srgbClr val="D9DEE6"/>
                       </a:solidFill>
                       <a:prstDash val="solid"/>
                       <a:round/>
@@ -11081,7 +10693,7 @@
                     </a:lnR>
                     <a:lnT w="12700" cap="flat" cmpd="sng" algn="ctr">
                       <a:solidFill>
-                        <a:srgbClr val="d9dee6"/>
+                        <a:srgbClr val="D9DEE6"/>
                       </a:solidFill>
                       <a:prstDash val="solid"/>
                       <a:round/>
@@ -11090,7 +10702,7 @@
                     </a:lnT>
                     <a:lnB w="12700" cap="flat" cmpd="sng" algn="ctr">
                       <a:solidFill>
-                        <a:srgbClr val="d9dee6"/>
+                        <a:srgbClr val="D9DEE6"/>
                       </a:solidFill>
                       <a:prstDash val="solid"/>
                       <a:round/>
@@ -11098,13 +10710,14 @@
                       <a:tailEnd w="med" len="med"/>
                     </a:lnB>
                     <a:solidFill>
-                      <a:srgbClr val="ffffff"/>
+                      <a:srgbClr val="FFFFFF"/>
                     </a:solidFill>
                   </a:tcPr>
                 </a:tc>
                 <a:tc>
                   <a:txBody>
-                    <a:bodyPr vert="horz" lIns="91440" tIns="36576" rIns="73152" bIns="36576" anchor="ctr" anchorCtr="0"/>
+                    <a:bodyPr/>
+                    <a:lstStyle/>
                     <a:p>
                       <a:pPr marL="0" indent="0" algn="l">
                         <a:lnSpc>
@@ -11116,7 +10729,7 @@
                       <a:r>
                         <a:rPr lang="ko-KR" altLang="en-US" sz="1050">
                           <a:solidFill>
-                            <a:srgbClr val="1f2637"/>
+                            <a:srgbClr val="1F2637"/>
                           </a:solidFill>
                           <a:latin typeface="맑은 고딕"/>
                           <a:ea typeface="맑은 고딕"/>
@@ -11124,20 +10737,12 @@
                         </a:rPr>
                         <a:t>코어 3개 파괴 후 보스 타격 가능</a:t>
                       </a:r>
-                      <a:endParaRPr lang="ko-KR" altLang="en-US" sz="1050">
-                        <a:solidFill>
-                          <a:srgbClr val="1f2637"/>
-                        </a:solidFill>
-                        <a:latin typeface="맑은 고딕"/>
-                        <a:ea typeface="맑은 고딕"/>
-                        <a:cs typeface="맑은 고딕"/>
-                      </a:endParaRPr>
                     </a:p>
                   </a:txBody>
-                  <a:tcPr marL="91440" marR="73152" marT="36576" marB="36576" anchor="ctr">
+                  <a:tcPr marR="73152" marT="36576" marB="36576" anchor="ctr">
                     <a:lnL w="12700" cap="flat" cmpd="sng" algn="ctr">
                       <a:solidFill>
-                        <a:srgbClr val="d9dee6"/>
+                        <a:srgbClr val="D9DEE6"/>
                       </a:solidFill>
                       <a:prstDash val="solid"/>
                       <a:round/>
@@ -11146,7 +10751,7 @@
                     </a:lnL>
                     <a:lnR w="12700" cap="flat" cmpd="sng" algn="ctr">
                       <a:solidFill>
-                        <a:srgbClr val="d9dee6"/>
+                        <a:srgbClr val="D9DEE6"/>
                       </a:solidFill>
                       <a:prstDash val="solid"/>
                       <a:round/>
@@ -11155,7 +10760,7 @@
                     </a:lnR>
                     <a:lnT w="12700" cap="flat" cmpd="sng" algn="ctr">
                       <a:solidFill>
-                        <a:srgbClr val="d9dee6"/>
+                        <a:srgbClr val="D9DEE6"/>
                       </a:solidFill>
                       <a:prstDash val="solid"/>
                       <a:round/>
@@ -11164,7 +10769,7 @@
                     </a:lnT>
                     <a:lnB w="12700" cap="flat" cmpd="sng" algn="ctr">
                       <a:solidFill>
-                        <a:srgbClr val="d9dee6"/>
+                        <a:srgbClr val="D9DEE6"/>
                       </a:solidFill>
                       <a:prstDash val="solid"/>
                       <a:round/>
@@ -11172,10 +10777,15 @@
                       <a:tailEnd w="med" len="med"/>
                     </a:lnB>
                     <a:solidFill>
-                      <a:srgbClr val="ffffff"/>
+                      <a:srgbClr val="FFFFFF"/>
                     </a:solidFill>
                   </a:tcPr>
                 </a:tc>
+                <a:extLst>
+                  <a:ext uri="{0D108BD9-81ED-4DB2-BD59-A6C34878D82A}">
+                    <a16:rowId xmlns:a16="http://schemas.microsoft.com/office/drawing/2014/main" val="10006"/>
+                  </a:ext>
+                </a:extLst>
               </a:tr>
             </a:tbl>
           </a:graphicData>
@@ -11209,7 +10819,7 @@
             <a:r>
               <a:rPr lang="ko-KR" altLang="en-US" sz="1100" b="1">
                 <a:solidFill>
-                  <a:srgbClr val="1f2637"/>
+                  <a:srgbClr val="1F2637"/>
                 </a:solidFill>
                 <a:latin typeface="맑은 고딕"/>
                 <a:ea typeface="맑은 고딕"/>
@@ -11217,14 +10827,6 @@
               </a:rPr>
               <a:t>몬스터 4종</a:t>
             </a:r>
-            <a:endParaRPr lang="ko-KR" altLang="en-US" sz="1100" b="1">
-              <a:solidFill>
-                <a:srgbClr val="1f2637"/>
-              </a:solidFill>
-              <a:latin typeface="맑은 고딕"/>
-              <a:ea typeface="맑은 고딕"/>
-              <a:cs typeface="맑은 고딕"/>
-            </a:endParaRPr>
           </a:p>
         </p:txBody>
       </p:sp>
@@ -11245,11 +10847,11 @@
             </a:avLst>
           </a:prstGeom>
           <a:solidFill>
-            <a:srgbClr val="f4f6fa"/>
+            <a:srgbClr val="F4F6FA"/>
           </a:solidFill>
           <a:ln w="12700">
             <a:solidFill>
-              <a:srgbClr val="d9dee6"/>
+              <a:srgbClr val="D9DEE6"/>
             </a:solidFill>
             <a:prstDash val="solid"/>
           </a:ln>
@@ -11324,7 +10926,7 @@
             <a:r>
               <a:rPr lang="ko-KR" altLang="en-US" sz="1200" b="1">
                 <a:solidFill>
-                  <a:srgbClr val="c8622e"/>
+                  <a:srgbClr val="C8622E"/>
                 </a:solidFill>
                 <a:latin typeface="맑은 고딕"/>
                 <a:ea typeface="맑은 고딕"/>
@@ -11332,14 +10934,6 @@
               </a:rPr>
               <a:t>경호로봇</a:t>
             </a:r>
-            <a:endParaRPr lang="ko-KR" altLang="en-US" sz="1200" b="1">
-              <a:solidFill>
-                <a:srgbClr val="c8622e"/>
-              </a:solidFill>
-              <a:latin typeface="맑은 고딕"/>
-              <a:ea typeface="맑은 고딕"/>
-              <a:cs typeface="맑은 고딕"/>
-            </a:endParaRPr>
           </a:p>
         </p:txBody>
       </p:sp>
@@ -11374,7 +10968,7 @@
             <a:r>
               <a:rPr lang="ko-KR" altLang="en-US" sz="950">
                 <a:solidFill>
-                  <a:srgbClr val="24324f"/>
+                  <a:srgbClr val="24324F"/>
                 </a:solidFill>
                 <a:latin typeface="맑은 고딕"/>
                 <a:ea typeface="맑은 고딕"/>
@@ -11382,14 +10976,6 @@
               </a:rPr>
               <a:t>표준 스탯의 기본 몹 (체력 · 화력 · 속도 중간)</a:t>
             </a:r>
-            <a:endParaRPr lang="ko-KR" altLang="en-US" sz="950">
-              <a:solidFill>
-                <a:srgbClr val="24324f"/>
-              </a:solidFill>
-              <a:latin typeface="맑은 고딕"/>
-              <a:ea typeface="맑은 고딕"/>
-              <a:cs typeface="맑은 고딕"/>
-            </a:endParaRPr>
           </a:p>
         </p:txBody>
       </p:sp>
@@ -11410,11 +10996,11 @@
             </a:avLst>
           </a:prstGeom>
           <a:solidFill>
-            <a:srgbClr val="f4f6fa"/>
+            <a:srgbClr val="F4F6FA"/>
           </a:solidFill>
           <a:ln w="12700">
             <a:solidFill>
-              <a:srgbClr val="d9dee6"/>
+              <a:srgbClr val="D9DEE6"/>
             </a:solidFill>
             <a:prstDash val="solid"/>
           </a:ln>
@@ -11489,7 +11075,7 @@
             <a:r>
               <a:rPr lang="ko-KR" altLang="en-US" sz="1200" b="1">
                 <a:solidFill>
-                  <a:srgbClr val="c8622e"/>
+                  <a:srgbClr val="C8622E"/>
                 </a:solidFill>
                 <a:latin typeface="맑은 고딕"/>
                 <a:ea typeface="맑은 고딕"/>
@@ -11497,14 +11083,6 @@
               </a:rPr>
               <a:t>터렛</a:t>
             </a:r>
-            <a:endParaRPr lang="ko-KR" altLang="en-US" sz="1200" b="1">
-              <a:solidFill>
-                <a:srgbClr val="c8622e"/>
-              </a:solidFill>
-              <a:latin typeface="맑은 고딕"/>
-              <a:ea typeface="맑은 고딕"/>
-              <a:cs typeface="맑은 고딕"/>
-            </a:endParaRPr>
           </a:p>
         </p:txBody>
       </p:sp>
@@ -11539,7 +11117,7 @@
             <a:r>
               <a:rPr lang="ko-KR" altLang="en-US" sz="950">
                 <a:solidFill>
-                  <a:srgbClr val="24324f"/>
+                  <a:srgbClr val="24324F"/>
                 </a:solidFill>
                 <a:latin typeface="맑은 고딕"/>
                 <a:ea typeface="맑은 고딕"/>
@@ -11547,14 +11125,6 @@
               </a:rPr>
               <a:t>고정형 · 고화력</a:t>
             </a:r>
-            <a:endParaRPr lang="ko-KR" altLang="en-US" sz="950">
-              <a:solidFill>
-                <a:srgbClr val="24324f"/>
-              </a:solidFill>
-              <a:latin typeface="맑은 고딕"/>
-              <a:ea typeface="맑은 고딕"/>
-              <a:cs typeface="맑은 고딕"/>
-            </a:endParaRPr>
           </a:p>
         </p:txBody>
       </p:sp>
@@ -11575,11 +11145,11 @@
             </a:avLst>
           </a:prstGeom>
           <a:solidFill>
-            <a:srgbClr val="16223b"/>
+            <a:srgbClr val="16223B"/>
           </a:solidFill>
           <a:ln w="12700">
             <a:solidFill>
-              <a:srgbClr val="d9dee6"/>
+              <a:srgbClr val="D9DEE6"/>
             </a:solidFill>
             <a:prstDash val="solid"/>
           </a:ln>
@@ -11626,7 +11196,7 @@
             <a:r>
               <a:rPr lang="ko-KR" altLang="en-US" sz="1200" b="1">
                 <a:solidFill>
-                  <a:srgbClr val="e0a15a"/>
+                  <a:srgbClr val="E0A15A"/>
                 </a:solidFill>
                 <a:latin typeface="맑은 고딕"/>
                 <a:ea typeface="맑은 고딕"/>
@@ -11637,7 +11207,7 @@
             <a:r>
               <a:rPr lang="ko-KR" altLang="en-US" sz="1200">
                 <a:solidFill>
-                  <a:srgbClr val="eaf0fa"/>
+                  <a:srgbClr val="EAF0FA"/>
                 </a:solidFill>
                 <a:latin typeface="맑은 고딕"/>
                 <a:ea typeface="맑은 고딕"/>
@@ -11645,14 +11215,6 @@
               </a:rPr>
               <a:t>플레이어는 층의 모든 몬스터를 없애야 다음 층으로 올라갈수있기 때문에 방 마다 요구하는 전투 유형을 달리하였다</a:t>
             </a:r>
-            <a:endParaRPr lang="ko-KR" altLang="en-US" sz="1200">
-              <a:solidFill>
-                <a:srgbClr val="eaf0fa"/>
-              </a:solidFill>
-              <a:latin typeface="맑은 고딕"/>
-              <a:ea typeface="맑은 고딕"/>
-              <a:cs typeface="맑은 고딕"/>
-            </a:endParaRPr>
           </a:p>
         </p:txBody>
       </p:sp>
@@ -11684,7 +11246,7 @@
             <a:r>
               <a:rPr lang="ko-KR" altLang="en-US" sz="900">
                 <a:solidFill>
-                  <a:srgbClr val="6c7686"/>
+                  <a:srgbClr val="6C7686"/>
                 </a:solidFill>
                 <a:latin typeface="맑은 고딕"/>
                 <a:ea typeface="맑은 고딕"/>
@@ -11692,14 +11254,6 @@
               </a:rPr>
               <a:t>진성준  ·  게임 시스템 기획 포트폴리오</a:t>
             </a:r>
-            <a:endParaRPr lang="ko-KR" altLang="en-US" sz="900">
-              <a:solidFill>
-                <a:srgbClr val="6c7686"/>
-              </a:solidFill>
-              <a:latin typeface="맑은 고딕"/>
-              <a:ea typeface="맑은 고딕"/>
-              <a:cs typeface="맑은 고딕"/>
-            </a:endParaRPr>
           </a:p>
         </p:txBody>
       </p:sp>
@@ -11731,7 +11285,7 @@
             <a:r>
               <a:rPr lang="ko-KR" altLang="en-US" sz="900">
                 <a:solidFill>
-                  <a:srgbClr val="6c7686"/>
+                  <a:srgbClr val="6C7686"/>
                 </a:solidFill>
                 <a:latin typeface="맑은 고딕"/>
                 <a:ea typeface="맑은 고딕"/>
@@ -11739,14 +11293,6 @@
               </a:rPr>
               <a:t>17</a:t>
             </a:r>
-            <a:endParaRPr lang="ko-KR" altLang="en-US" sz="900">
-              <a:solidFill>
-                <a:srgbClr val="6c7686"/>
-              </a:solidFill>
-              <a:latin typeface="맑은 고딕"/>
-              <a:ea typeface="맑은 고딕"/>
-              <a:cs typeface="맑은 고딕"/>
-            </a:endParaRPr>
           </a:p>
         </p:txBody>
       </p:sp>
@@ -11755,11 +11301,11 @@
   <p:clrMapOvr>
     <a:masterClrMapping/>
   </p:clrMapOvr>
-  <mc:AlternateContent xmlns:mc="http://schemas.openxmlformats.org/markup-compatibility/2006">
-    <mc:Choice xmlns:p14="http://schemas.microsoft.com/office/powerpoint/2010/main" Requires="p14">
-      <p:transition xmlns:mc="http://schemas.openxmlformats.org/markup-compatibility/2006" xmlns:p14="http://schemas.microsoft.com/office/powerpoint/2010/main" mc:Ignorable="p14" p14:dur="500"/>
+  <mc:AlternateContent xmlns:mc="http://schemas.openxmlformats.org/markup-compatibility/2006" xmlns:p14="http://schemas.microsoft.com/office/powerpoint/2010/main">
+    <mc:Choice Requires="p14">
+      <p:transition/>
     </mc:Choice>
-    <mc:Fallback>
+    <mc:Fallback xmlns:dsp="http://schemas.microsoft.com/office/drawing/2008/diagram" xmlns:dgm="http://schemas.openxmlformats.org/drawingml/2006/diagram" xmlns:c="http://schemas.openxmlformats.org/drawingml/2006/chart" xmlns="">
       <p:transition/>
     </mc:Fallback>
   </mc:AlternateContent>
@@ -12305,7 +11851,7 @@
                 <a:ea typeface="맑은 고딕"/>
                 <a:cs typeface="맑은 고딕"/>
               </a:rPr>
-              <a:t>얼음 스킬과 패링으로 버티는 근접 탱커</a:t>
+              <a:t>얼음 스킬과 무적으로 버티는 근접 탱커</a:t>
             </a:r>
           </a:p>
         </p:txBody>
@@ -12748,7 +12294,29 @@
                 <a:ea typeface="맑은 고딕"/>
                 <a:cs typeface="맑은 고딕"/>
               </a:rPr>
-              <a:t>드론 3기로 아군을 지원하고 전장을 정찰</a:t>
+              <a:t>드론 </a:t>
+            </a:r>
+            <a:r>
+              <a:rPr lang="en-US" altLang="ko-KR" sz="1050">
+                <a:solidFill>
+                  <a:srgbClr val="24324F"/>
+                </a:solidFill>
+                <a:latin typeface="맑은 고딕"/>
+                <a:ea typeface="맑은 고딕"/>
+                <a:cs typeface="맑은 고딕"/>
+              </a:rPr>
+              <a:t>2</a:t>
+            </a:r>
+            <a:r>
+              <a:rPr lang="ko-KR" altLang="en-US" sz="1050">
+                <a:solidFill>
+                  <a:srgbClr val="24324F"/>
+                </a:solidFill>
+                <a:latin typeface="맑은 고딕"/>
+                <a:ea typeface="맑은 고딕"/>
+                <a:cs typeface="맑은 고딕"/>
+              </a:rPr>
+              <a:t>기로 아군을 지원하고 전장을 정찰</a:t>
             </a:r>
           </a:p>
         </p:txBody>
@@ -12909,7 +12477,7 @@
                 <a:ea typeface="맑은 고딕"/>
                 <a:cs typeface="맑은 고딕"/>
               </a:rPr>
-              <a:t>해킹과 홀로그램으로 적을 기만하는 트릭스터</a:t>
+              <a:t>해킹으로 적을 기만하는 트릭스터</a:t>
             </a:r>
           </a:p>
         </p:txBody>
@@ -14597,7 +14165,7 @@
     <mc:Choice Requires="p14">
       <p:transition/>
     </mc:Choice>
-    <mc:Fallback xmlns:dsp="http://schemas.microsoft.com/office/drawing/2008/diagram" xmlns:dgm="http://schemas.openxmlformats.org/drawingml/2006/diagram" xmlns:c="http://schemas.openxmlformats.org/drawingml/2006/chart" xmlns="">
+    <mc:Fallback xmlns="" xmlns:c="http://schemas.openxmlformats.org/drawingml/2006/chart" xmlns:dgm="http://schemas.openxmlformats.org/drawingml/2006/diagram" xmlns:dsp="http://schemas.microsoft.com/office/drawing/2008/diagram">
       <p:transition/>
     </mc:Fallback>
   </mc:AlternateContent>
@@ -15613,7 +15181,7 @@
     <mc:Choice Requires="p14">
       <p:transition/>
     </mc:Choice>
-    <mc:Fallback xmlns:dsp="http://schemas.microsoft.com/office/drawing/2008/diagram" xmlns:dgm="http://schemas.openxmlformats.org/drawingml/2006/diagram" xmlns:c="http://schemas.openxmlformats.org/drawingml/2006/chart" xmlns="">
+    <mc:Fallback xmlns="" xmlns:c="http://schemas.openxmlformats.org/drawingml/2006/chart" xmlns:dgm="http://schemas.openxmlformats.org/drawingml/2006/diagram" xmlns:dsp="http://schemas.microsoft.com/office/drawing/2008/diagram">
       <p:transition/>
     </mc:Fallback>
   </mc:AlternateContent>
@@ -15828,7 +15396,7 @@
     <mc:Choice Requires="p14">
       <p:transition/>
     </mc:Choice>
-    <mc:Fallback xmlns:dsp="http://schemas.microsoft.com/office/drawing/2008/diagram" xmlns:dgm="http://schemas.openxmlformats.org/drawingml/2006/diagram" xmlns:c="http://schemas.openxmlformats.org/drawingml/2006/chart" xmlns="">
+    <mc:Fallback xmlns="" xmlns:c="http://schemas.openxmlformats.org/drawingml/2006/chart" xmlns:dgm="http://schemas.openxmlformats.org/drawingml/2006/diagram" xmlns:dsp="http://schemas.microsoft.com/office/drawing/2008/diagram">
       <p:transition/>
     </mc:Fallback>
   </mc:AlternateContent>
@@ -15836,13 +15404,14 @@
 </file>
 
 <file path=ppt/slides/slide3.xml><?xml version="1.0" encoding="utf-8"?>
-<p:sld xmlns:r="http://schemas.openxmlformats.org/officeDocument/2006/relationships" xmlns:c="http://schemas.openxmlformats.org/drawingml/2006/chart" xmlns:a="http://schemas.openxmlformats.org/drawingml/2006/main" xmlns:dgm="http://schemas.openxmlformats.org/drawingml/2006/diagram" xmlns:dsp="http://schemas.microsoft.com/office/drawing/2008/diagram" xmlns:p="http://schemas.openxmlformats.org/presentationml/2006/main">
+<p:sld xmlns:a="http://schemas.openxmlformats.org/drawingml/2006/main" xmlns:r="http://schemas.openxmlformats.org/officeDocument/2006/relationships" xmlns:p="http://schemas.openxmlformats.org/presentationml/2006/main">
   <p:cSld name="Slide 3">
     <p:bg>
-      <p:bgPr shadeToTitle="0">
+      <p:bgPr>
         <a:solidFill>
-          <a:srgbClr val="ffffff"/>
+          <a:srgbClr val="FFFFFF"/>
         </a:solidFill>
+        <a:effectLst/>
       </p:bgPr>
     </p:bg>
     <p:spTree>
@@ -15887,7 +15456,7 @@
             <a:r>
               <a:rPr lang="en-US" sz="1200" b="1" kern="0" spc="200">
                 <a:solidFill>
-                  <a:srgbClr val="c8622e"/>
+                  <a:srgbClr val="C8622E"/>
                 </a:solidFill>
                 <a:latin typeface="맑은 고딕"/>
                 <a:ea typeface="맑은 고딕"/>
@@ -15927,7 +15496,7 @@
             <a:r>
               <a:rPr lang="en-US" sz="2900" b="1">
                 <a:solidFill>
-                  <a:srgbClr val="1f2637"/>
+                  <a:srgbClr val="1F2637"/>
                 </a:solidFill>
                 <a:latin typeface="맑은 고딕"/>
                 <a:ea typeface="맑은 고딕"/>
@@ -15956,11 +15525,11 @@
             </a:avLst>
           </a:prstGeom>
           <a:solidFill>
-            <a:srgbClr val="16223b"/>
+            <a:srgbClr val="16223B"/>
           </a:solidFill>
           <a:ln w="12700">
             <a:solidFill>
-              <a:srgbClr val="d9dee6"/>
+              <a:srgbClr val="D9DEE6"/>
             </a:solidFill>
             <a:prstDash val="solid"/>
           </a:ln>
@@ -16011,7 +15580,7 @@
             <a:r>
               <a:rPr lang="en-US" sz="2600" b="1">
                 <a:solidFill>
-                  <a:srgbClr val="ffffff"/>
+                  <a:srgbClr val="FFFFFF"/>
                 </a:solidFill>
                 <a:latin typeface="맑은 고딕"/>
                 <a:ea typeface="맑은 고딕"/>
@@ -16051,7 +15620,7 @@
             <a:r>
               <a:rPr lang="en-US" sz="1200">
                 <a:solidFill>
-                  <a:srgbClr val="e0a15a"/>
+                  <a:srgbClr val="E0A15A"/>
                 </a:solidFill>
                 <a:latin typeface="Arial"/>
                 <a:ea typeface="Arial"/>
@@ -16090,7 +15659,7 @@
             </a:pPr>
             <a:endParaRPr lang="en-US" sz="1350" i="1">
               <a:solidFill>
-                <a:srgbClr val="eaf0fa"/>
+                <a:srgbClr val="EAF0FA"/>
               </a:solidFill>
               <a:latin typeface="맑은 고딕"/>
               <a:ea typeface="맑은 고딕"/>
@@ -16130,7 +15699,7 @@
             <a:r>
               <a:rPr lang="en-US" sz="1200" b="1">
                 <a:solidFill>
-                  <a:srgbClr val="e0a15a"/>
+                  <a:srgbClr val="E0A15A"/>
                 </a:solidFill>
                 <a:latin typeface="맑은 고딕"/>
                 <a:ea typeface="맑은 고딕"/>
@@ -16138,14 +15707,6 @@
               </a:rPr>
               <a:t>학력</a:t>
             </a:r>
-            <a:endParaRPr lang="en-US" sz="1200" b="1">
-              <a:solidFill>
-                <a:srgbClr val="e0a15a"/>
-              </a:solidFill>
-              <a:latin typeface="맑은 고딕"/>
-              <a:ea typeface="맑은 고딕"/>
-              <a:cs typeface="맑은 고딕"/>
-            </a:endParaRPr>
           </a:p>
           <a:p>
             <a:pPr marL="0" indent="0">
@@ -16158,7 +15719,7 @@
             <a:r>
               <a:rPr lang="en-US" sz="1200">
                 <a:solidFill>
-                  <a:srgbClr val="ffffff"/>
+                  <a:srgbClr val="FFFFFF"/>
                 </a:solidFill>
                 <a:latin typeface="맑은 고딕"/>
                 <a:ea typeface="맑은 고딕"/>
@@ -16166,14 +15727,6 @@
               </a:rPr>
               <a:t>한국공학대학교 게임공학과</a:t>
             </a:r>
-            <a:endParaRPr lang="en-US" sz="1200">
-              <a:solidFill>
-                <a:srgbClr val="ffffff"/>
-              </a:solidFill>
-              <a:latin typeface="맑은 고딕"/>
-              <a:ea typeface="맑은 고딕"/>
-              <a:cs typeface="맑은 고딕"/>
-            </a:endParaRPr>
           </a:p>
           <a:p>
             <a:pPr marL="0" indent="0">
@@ -16186,7 +15739,7 @@
             <a:r>
               <a:rPr lang="en-US" sz="1100">
                 <a:solidFill>
-                  <a:srgbClr val="eaf0fa"/>
+                  <a:srgbClr val="EAF0FA"/>
                 </a:solidFill>
                 <a:latin typeface="맑은 고딕"/>
                 <a:ea typeface="맑은 고딕"/>
@@ -16194,14 +15747,6 @@
               </a:rPr>
               <a:t>2026.02 졸업예정</a:t>
             </a:r>
-            <a:endParaRPr lang="en-US" sz="1100">
-              <a:solidFill>
-                <a:srgbClr val="eaf0fa"/>
-              </a:solidFill>
-              <a:latin typeface="맑은 고딕"/>
-              <a:ea typeface="맑은 고딕"/>
-              <a:cs typeface="맑은 고딕"/>
-            </a:endParaRPr>
           </a:p>
           <a:p>
             <a:pPr marL="0" indent="0">
@@ -16222,14 +15767,6 @@
               </a:rPr>
               <a:t> </a:t>
             </a:r>
-            <a:endParaRPr lang="en-US" sz="600">
-              <a:solidFill>
-                <a:srgbClr val="000000"/>
-              </a:solidFill>
-              <a:latin typeface="맑은 고딕"/>
-              <a:ea typeface="맑은 고딕"/>
-              <a:cs typeface="맑은 고딕"/>
-            </a:endParaRPr>
           </a:p>
           <a:p>
             <a:pPr marL="0" indent="0">
@@ -16242,7 +15779,7 @@
             <a:r>
               <a:rPr lang="en-US" sz="1200" b="1">
                 <a:solidFill>
-                  <a:srgbClr val="e0a15a"/>
+                  <a:srgbClr val="E0A15A"/>
                 </a:solidFill>
                 <a:latin typeface="맑은 고딕"/>
                 <a:ea typeface="맑은 고딕"/>
@@ -16250,14 +15787,6 @@
               </a:rPr>
               <a:t>연락처</a:t>
             </a:r>
-            <a:endParaRPr lang="en-US" sz="1200" b="1">
-              <a:solidFill>
-                <a:srgbClr val="e0a15a"/>
-              </a:solidFill>
-              <a:latin typeface="맑은 고딕"/>
-              <a:ea typeface="맑은 고딕"/>
-              <a:cs typeface="맑은 고딕"/>
-            </a:endParaRPr>
           </a:p>
           <a:p>
             <a:pPr marL="0" indent="0">
@@ -16270,7 +15799,7 @@
             <a:r>
               <a:rPr lang="en-US" sz="1200">
                 <a:solidFill>
-                  <a:srgbClr val="ffffff"/>
+                  <a:srgbClr val="FFFFFF"/>
                 </a:solidFill>
                 <a:latin typeface="맑은 고딕"/>
                 <a:ea typeface="맑은 고딕"/>
@@ -16278,14 +15807,6 @@
               </a:rPr>
               <a:t>010-7770-2108</a:t>
             </a:r>
-            <a:endParaRPr lang="en-US" sz="1200">
-              <a:solidFill>
-                <a:srgbClr val="ffffff"/>
-              </a:solidFill>
-              <a:latin typeface="맑은 고딕"/>
-              <a:ea typeface="맑은 고딕"/>
-              <a:cs typeface="맑은 고딕"/>
-            </a:endParaRPr>
           </a:p>
           <a:p>
             <a:pPr marL="0" indent="0">
@@ -16298,7 +15819,7 @@
             <a:r>
               <a:rPr lang="en-US" altLang="ko-KR" sz="1150">
                 <a:solidFill>
-                  <a:srgbClr val="ffffff"/>
+                  <a:srgbClr val="FFFFFF"/>
                 </a:solidFill>
                 <a:latin typeface="맑은 고딕"/>
                 <a:ea typeface="맑은 고딕"/>
@@ -16309,7 +15830,7 @@
             <a:r>
               <a:rPr lang="en-US" sz="1150">
                 <a:solidFill>
-                  <a:srgbClr val="ffffff"/>
+                  <a:srgbClr val="FFFFFF"/>
                 </a:solidFill>
                 <a:latin typeface="맑은 고딕"/>
                 <a:ea typeface="맑은 고딕"/>
@@ -16317,14 +15838,6 @@
               </a:rPr>
               <a:t>@naver.com</a:t>
             </a:r>
-            <a:endParaRPr lang="en-US" sz="1150">
-              <a:solidFill>
-                <a:srgbClr val="ffffff"/>
-              </a:solidFill>
-              <a:latin typeface="맑은 고딕"/>
-              <a:ea typeface="맑은 고딕"/>
-              <a:cs typeface="맑은 고딕"/>
-            </a:endParaRPr>
           </a:p>
         </p:txBody>
       </p:sp>
@@ -16356,7 +15869,7 @@
             <a:r>
               <a:rPr lang="en-US" sz="1600" b="1">
                 <a:solidFill>
-                  <a:srgbClr val="1f2637"/>
+                  <a:srgbClr val="1F2637"/>
                 </a:solidFill>
                 <a:latin typeface="맑은 고딕"/>
                 <a:ea typeface="맑은 고딕"/>
@@ -16385,11 +15898,11 @@
             </a:avLst>
           </a:prstGeom>
           <a:solidFill>
-            <a:srgbClr val="f4f6fa"/>
+            <a:srgbClr val="F4F6FA"/>
           </a:solidFill>
           <a:ln w="12700">
             <a:solidFill>
-              <a:srgbClr val="d9dee6"/>
+              <a:srgbClr val="D9DEE6"/>
             </a:solidFill>
             <a:prstDash val="solid"/>
           </a:ln>
@@ -16433,7 +15946,7 @@
             <a:r>
               <a:rPr lang="en-US" sz="1250" b="1">
                 <a:solidFill>
-                  <a:srgbClr val="c8622e"/>
+                  <a:srgbClr val="C8622E"/>
                 </a:solidFill>
                 <a:latin typeface="맑은 고딕"/>
                 <a:ea typeface="맑은 고딕"/>
@@ -16473,7 +15986,7 @@
             <a:r>
               <a:rPr lang="en-US" sz="1250">
                 <a:solidFill>
-                  <a:srgbClr val="1f2637"/>
+                  <a:srgbClr val="1F2637"/>
                 </a:solidFill>
                 <a:latin typeface="맑은 고딕"/>
                 <a:ea typeface="맑은 고딕"/>
@@ -16484,7 +15997,7 @@
             <a:r>
               <a:rPr lang="en-US" altLang="ko-KR" sz="1250">
                 <a:solidFill>
-                  <a:srgbClr val="1f2637"/>
+                  <a:srgbClr val="1F2637"/>
                 </a:solidFill>
                 <a:latin typeface="맑은 고딕"/>
                 <a:ea typeface="맑은 고딕"/>
@@ -16495,7 +16008,7 @@
             <a:r>
               <a:rPr lang="en-US" sz="1250">
                 <a:solidFill>
-                  <a:srgbClr val="1f2637"/>
+                  <a:srgbClr val="1F2637"/>
                 </a:solidFill>
                 <a:latin typeface="맑은 고딕"/>
                 <a:ea typeface="맑은 고딕"/>
@@ -16503,14 +16016,6 @@
               </a:rPr>
               <a:t>플레이어 경험 설계</a:t>
             </a:r>
-            <a:endParaRPr lang="en-US" sz="1250">
-              <a:solidFill>
-                <a:srgbClr val="1f2637"/>
-              </a:solidFill>
-              <a:latin typeface="맑은 고딕"/>
-              <a:ea typeface="맑은 고딕"/>
-              <a:cs typeface="맑은 고딕"/>
-            </a:endParaRPr>
           </a:p>
         </p:txBody>
       </p:sp>
@@ -16531,11 +16036,11 @@
             </a:avLst>
           </a:prstGeom>
           <a:solidFill>
-            <a:srgbClr val="f4f6fa"/>
+            <a:srgbClr val="F4F6FA"/>
           </a:solidFill>
           <a:ln w="12700">
             <a:solidFill>
-              <a:srgbClr val="d9dee6"/>
+              <a:srgbClr val="D9DEE6"/>
             </a:solidFill>
             <a:prstDash val="solid"/>
           </a:ln>
@@ -16579,7 +16084,7 @@
             <a:r>
               <a:rPr lang="en-US" sz="1250" b="1">
                 <a:solidFill>
-                  <a:srgbClr val="c8622e"/>
+                  <a:srgbClr val="C8622E"/>
                 </a:solidFill>
                 <a:latin typeface="맑은 고딕"/>
                 <a:ea typeface="맑은 고딕"/>
@@ -16619,7 +16124,7 @@
             <a:r>
               <a:rPr lang="en-US" sz="1250">
                 <a:solidFill>
-                  <a:srgbClr val="1f2637"/>
+                  <a:srgbClr val="1F2637"/>
                 </a:solidFill>
                 <a:latin typeface="맑은 고딕"/>
                 <a:ea typeface="맑은 고딕"/>
@@ -16648,11 +16153,11 @@
             </a:avLst>
           </a:prstGeom>
           <a:solidFill>
-            <a:srgbClr val="f4f6fa"/>
+            <a:srgbClr val="F4F6FA"/>
           </a:solidFill>
           <a:ln w="12700">
             <a:solidFill>
-              <a:srgbClr val="d9dee6"/>
+              <a:srgbClr val="D9DEE6"/>
             </a:solidFill>
             <a:prstDash val="solid"/>
           </a:ln>
@@ -16696,7 +16201,7 @@
             <a:r>
               <a:rPr lang="en-US" sz="1250" b="1">
                 <a:solidFill>
-                  <a:srgbClr val="c8622e"/>
+                  <a:srgbClr val="C8622E"/>
                 </a:solidFill>
                 <a:latin typeface="맑은 고딕"/>
                 <a:ea typeface="맑은 고딕"/>
@@ -16736,7 +16241,7 @@
             <a:r>
               <a:rPr lang="en-US" sz="1250">
                 <a:solidFill>
-                  <a:srgbClr val="1f2637"/>
+                  <a:srgbClr val="1F2637"/>
                 </a:solidFill>
                 <a:latin typeface="맑은 고딕"/>
                 <a:ea typeface="맑은 고딕"/>
@@ -16744,14 +16249,6 @@
               </a:rPr>
               <a:t>C++ · 게임 서버(Zone 분산·프로토콜 설계)</a:t>
             </a:r>
-            <a:endParaRPr lang="en-US" sz="1250">
-              <a:solidFill>
-                <a:srgbClr val="1f2637"/>
-              </a:solidFill>
-              <a:latin typeface="맑은 고딕"/>
-              <a:ea typeface="맑은 고딕"/>
-              <a:cs typeface="맑은 고딕"/>
-            </a:endParaRPr>
           </a:p>
         </p:txBody>
       </p:sp>
@@ -16772,11 +16269,11 @@
             </a:avLst>
           </a:prstGeom>
           <a:solidFill>
-            <a:srgbClr val="f4f6fa"/>
+            <a:srgbClr val="F4F6FA"/>
           </a:solidFill>
           <a:ln w="12700">
             <a:solidFill>
-              <a:srgbClr val="d9dee6"/>
+              <a:srgbClr val="D9DEE6"/>
             </a:solidFill>
             <a:prstDash val="solid"/>
           </a:ln>
@@ -16820,7 +16317,7 @@
             <a:r>
               <a:rPr lang="en-US" sz="1250" b="1">
                 <a:solidFill>
-                  <a:srgbClr val="c8622e"/>
+                  <a:srgbClr val="C8622E"/>
                 </a:solidFill>
                 <a:latin typeface="맑은 고딕"/>
                 <a:ea typeface="맑은 고딕"/>
@@ -16860,7 +16357,7 @@
             <a:r>
               <a:rPr lang="en-US" sz="1250">
                 <a:solidFill>
-                  <a:srgbClr val="1f2637"/>
+                  <a:srgbClr val="1F2637"/>
                 </a:solidFill>
                 <a:latin typeface="맑은 고딕"/>
                 <a:ea typeface="맑은 고딕"/>
@@ -16900,7 +16397,7 @@
             <a:r>
               <a:rPr lang="en-US" sz="1600" b="1">
                 <a:solidFill>
-                  <a:srgbClr val="1f2637"/>
+                  <a:srgbClr val="1F2637"/>
                 </a:solidFill>
                 <a:latin typeface="맑은 고딕"/>
                 <a:ea typeface="맑은 고딕"/>
@@ -16943,7 +16440,7 @@
             <a:r>
               <a:rPr lang="en-US" sz="1250" b="1">
                 <a:solidFill>
-                  <a:srgbClr val="1f2637"/>
+                  <a:srgbClr val="1F2637"/>
                 </a:solidFill>
                 <a:latin typeface="맑은 고딕"/>
                 <a:ea typeface="맑은 고딕"/>
@@ -16954,7 +16451,7 @@
             <a:r>
               <a:rPr lang="en-US" sz="1250">
                 <a:solidFill>
-                  <a:srgbClr val="6c7686"/>
+                  <a:srgbClr val="6C7686"/>
                 </a:solidFill>
                 <a:latin typeface="맑은 고딕"/>
                 <a:ea typeface="맑은 고딕"/>
@@ -16962,14 +16459,6 @@
               </a:rPr>
               <a:t>DX12 온라인 RPG · 기획 + 서버 담당 (졸업작품)</a:t>
             </a:r>
-            <a:endParaRPr lang="en-US" sz="1250">
-              <a:solidFill>
-                <a:srgbClr val="6c7686"/>
-              </a:solidFill>
-              <a:latin typeface="맑은 고딕"/>
-              <a:ea typeface="맑은 고딕"/>
-              <a:cs typeface="맑은 고딕"/>
-            </a:endParaRPr>
           </a:p>
           <a:p>
             <a:pPr marL="0" indent="0">
@@ -16982,7 +16471,7 @@
             <a:r>
               <a:rPr lang="en-US" sz="1250" b="1">
                 <a:solidFill>
-                  <a:srgbClr val="1f2637"/>
+                  <a:srgbClr val="1F2637"/>
                 </a:solidFill>
                 <a:latin typeface="맑은 고딕"/>
                 <a:ea typeface="맑은 고딕"/>
@@ -16993,7 +16482,7 @@
             <a:r>
               <a:rPr lang="en-US" sz="1250">
                 <a:solidFill>
-                  <a:srgbClr val="6c7686"/>
+                  <a:srgbClr val="6C7686"/>
                 </a:solidFill>
                 <a:latin typeface="맑은 고딕"/>
                 <a:ea typeface="맑은 고딕"/>
@@ -17001,14 +16490,6 @@
               </a:rPr>
               <a:t>소울라이크×턴제 전투 시스템 기획</a:t>
             </a:r>
-            <a:endParaRPr lang="en-US" sz="1250">
-              <a:solidFill>
-                <a:srgbClr val="6c7686"/>
-              </a:solidFill>
-              <a:latin typeface="맑은 고딕"/>
-              <a:ea typeface="맑은 고딕"/>
-              <a:cs typeface="맑은 고딕"/>
-            </a:endParaRPr>
           </a:p>
           <a:p>
             <a:pPr marL="0" indent="0">
@@ -17021,7 +16502,7 @@
             <a:r>
               <a:rPr lang="en-US" sz="1250" b="1">
                 <a:solidFill>
-                  <a:srgbClr val="1f2637"/>
+                  <a:srgbClr val="1F2637"/>
                 </a:solidFill>
                 <a:latin typeface="맑은 고딕"/>
                 <a:ea typeface="맑은 고딕"/>
@@ -17032,7 +16513,7 @@
             <a:r>
               <a:rPr lang="en-US" sz="1250">
                 <a:solidFill>
-                  <a:srgbClr val="6c7686"/>
+                  <a:srgbClr val="6C7686"/>
                 </a:solidFill>
                 <a:latin typeface="맑은 고딕"/>
                 <a:ea typeface="맑은 고딕"/>
@@ -17072,7 +16553,7 @@
             <a:r>
               <a:rPr lang="en-US" sz="900">
                 <a:solidFill>
-                  <a:srgbClr val="6c7686"/>
+                  <a:srgbClr val="6C7686"/>
                 </a:solidFill>
                 <a:latin typeface="맑은 고딕"/>
                 <a:ea typeface="맑은 고딕"/>
@@ -17112,7 +16593,7 @@
             <a:r>
               <a:rPr lang="en-US" sz="900">
                 <a:solidFill>
-                  <a:srgbClr val="6c7686"/>
+                  <a:srgbClr val="6C7686"/>
                 </a:solidFill>
                 <a:latin typeface="맑은 고딕"/>
                 <a:ea typeface="맑은 고딕"/>
@@ -17129,11 +16610,11 @@
   <p:clrMapOvr>
     <a:masterClrMapping/>
   </p:clrMapOvr>
-  <mc:AlternateContent xmlns:mc="http://schemas.openxmlformats.org/markup-compatibility/2006">
-    <mc:Choice xmlns:p14="http://schemas.microsoft.com/office/powerpoint/2010/main" Requires="p14">
-      <p:transition xmlns:mc="http://schemas.openxmlformats.org/markup-compatibility/2006" xmlns:p14="http://schemas.microsoft.com/office/powerpoint/2010/main" mc:Ignorable="p14" p14:dur="500"/>
+  <mc:AlternateContent xmlns:mc="http://schemas.openxmlformats.org/markup-compatibility/2006" xmlns:p14="http://schemas.microsoft.com/office/powerpoint/2010/main">
+    <mc:Choice Requires="p14">
+      <p:transition/>
     </mc:Choice>
-    <mc:Fallback>
+    <mc:Fallback xmlns:dsp="http://schemas.microsoft.com/office/drawing/2008/diagram" xmlns:dgm="http://schemas.openxmlformats.org/drawingml/2006/diagram" xmlns:c="http://schemas.openxmlformats.org/drawingml/2006/chart" xmlns="">
       <p:transition/>
     </mc:Fallback>
   </mc:AlternateContent>
@@ -18452,7 +17933,7 @@
     <mc:Choice Requires="p14">
       <p:transition/>
     </mc:Choice>
-    <mc:Fallback xmlns:dsp="http://schemas.microsoft.com/office/drawing/2008/diagram" xmlns:dgm="http://schemas.openxmlformats.org/drawingml/2006/diagram" xmlns:c="http://schemas.openxmlformats.org/drawingml/2006/chart" xmlns="">
+    <mc:Fallback xmlns="" xmlns:c="http://schemas.openxmlformats.org/drawingml/2006/chart" xmlns:dgm="http://schemas.openxmlformats.org/drawingml/2006/diagram" xmlns:dsp="http://schemas.microsoft.com/office/drawing/2008/diagram">
       <p:transition/>
     </mc:Fallback>
   </mc:AlternateContent>
@@ -18460,13 +17941,14 @@
 </file>
 
 <file path=ppt/slides/slide5.xml><?xml version="1.0" encoding="utf-8"?>
-<p:sld xmlns:r="http://schemas.openxmlformats.org/officeDocument/2006/relationships" xmlns:c="http://schemas.openxmlformats.org/drawingml/2006/chart" xmlns:a="http://schemas.openxmlformats.org/drawingml/2006/main" xmlns:dgm="http://schemas.openxmlformats.org/drawingml/2006/diagram" xmlns:dsp="http://schemas.microsoft.com/office/drawing/2008/diagram" xmlns:p="http://schemas.openxmlformats.org/presentationml/2006/main">
+<p:sld xmlns:a="http://schemas.openxmlformats.org/drawingml/2006/main" xmlns:r="http://schemas.openxmlformats.org/officeDocument/2006/relationships" xmlns:p="http://schemas.openxmlformats.org/presentationml/2006/main">
   <p:cSld name="Slide 5">
     <p:bg>
-      <p:bgPr shadeToTitle="0">
+      <p:bgPr>
         <a:solidFill>
-          <a:srgbClr val="ffffff"/>
+          <a:srgbClr val="FFFFFF"/>
         </a:solidFill>
+        <a:effectLst/>
       </p:bgPr>
     </p:bg>
     <p:spTree>
@@ -18511,7 +17993,7 @@
             <a:r>
               <a:rPr lang="en-US" sz="1200" b="1" kern="0" spc="200">
                 <a:solidFill>
-                  <a:srgbClr val="c8622e"/>
+                  <a:srgbClr val="C8622E"/>
                 </a:solidFill>
                 <a:latin typeface="맑은 고딕"/>
                 <a:ea typeface="맑은 고딕"/>
@@ -18551,7 +18033,7 @@
             <a:r>
               <a:rPr lang="en-US" sz="2900" b="1">
                 <a:solidFill>
-                  <a:srgbClr val="1f2637"/>
+                  <a:srgbClr val="1F2637"/>
                 </a:solidFill>
                 <a:latin typeface="맑은 고딕"/>
                 <a:ea typeface="맑은 고딕"/>
@@ -18562,7 +18044,7 @@
             <a:r>
               <a:rPr lang="ko-KR" altLang="en-US" sz="2900" b="1">
                 <a:solidFill>
-                  <a:srgbClr val="1f2637"/>
+                  <a:srgbClr val="1F2637"/>
                 </a:solidFill>
                 <a:latin typeface="맑은 고딕"/>
                 <a:ea typeface="맑은 고딕"/>
@@ -18570,14 +18052,6 @@
               </a:rPr>
               <a:t>플레이어에게 페이즈를 부여한다</a:t>
             </a:r>
-            <a:endParaRPr lang="ko-KR" altLang="en-US" sz="2900" b="1">
-              <a:solidFill>
-                <a:srgbClr val="1f2637"/>
-              </a:solidFill>
-              <a:latin typeface="맑은 고딕"/>
-              <a:ea typeface="맑은 고딕"/>
-              <a:cs typeface="맑은 고딕"/>
-            </a:endParaRPr>
           </a:p>
         </p:txBody>
       </p:sp>
@@ -18598,11 +18072,11 @@
             </a:avLst>
           </a:prstGeom>
           <a:solidFill>
-            <a:srgbClr val="f4f6fa"/>
+            <a:srgbClr val="F4F6FA"/>
           </a:solidFill>
           <a:ln w="12700">
             <a:solidFill>
-              <a:srgbClr val="d9dee6"/>
+              <a:srgbClr val="D9DEE6"/>
             </a:solidFill>
             <a:prstDash val="solid"/>
           </a:ln>
@@ -18653,7 +18127,7 @@
             <a:r>
               <a:rPr lang="en-US" sz="1400" b="1">
                 <a:solidFill>
-                  <a:srgbClr val="c8622e"/>
+                  <a:srgbClr val="C8622E"/>
                 </a:solidFill>
                 <a:latin typeface="맑은 고딕"/>
                 <a:ea typeface="맑은 고딕"/>
@@ -18661,14 +18135,6 @@
               </a:rPr>
               <a:t>문제</a:t>
             </a:r>
-            <a:endParaRPr lang="en-US" sz="1400" b="1">
-              <a:solidFill>
-                <a:srgbClr val="c8622e"/>
-              </a:solidFill>
-              <a:latin typeface="맑은 고딕"/>
-              <a:ea typeface="맑은 고딕"/>
-              <a:cs typeface="맑은 고딕"/>
-            </a:endParaRPr>
           </a:p>
         </p:txBody>
       </p:sp>
@@ -18703,7 +18169,7 @@
             <a:r>
               <a:rPr lang="en-US" sz="1300">
                 <a:solidFill>
-                  <a:srgbClr val="1f2637"/>
+                  <a:srgbClr val="1F2637"/>
                 </a:solidFill>
                 <a:latin typeface="맑은 고딕"/>
                 <a:ea typeface="맑은 고딕"/>
@@ -18711,14 +18177,6 @@
               </a:rPr>
               <a:t>소울라이크의 속도감과 턴제의 전략성을 한 번에? </a:t>
             </a:r>
-            <a:endParaRPr lang="en-US" sz="1300">
-              <a:solidFill>
-                <a:srgbClr val="1f2637"/>
-              </a:solidFill>
-              <a:latin typeface="맑은 고딕"/>
-              <a:ea typeface="맑은 고딕"/>
-              <a:cs typeface="맑은 고딕"/>
-            </a:endParaRPr>
           </a:p>
           <a:p>
             <a:pPr marL="0" indent="0">
@@ -18731,7 +18189,7 @@
             <a:r>
               <a:rPr lang="en-US" sz="1300">
                 <a:solidFill>
-                  <a:srgbClr val="1f2637"/>
+                  <a:srgbClr val="1F2637"/>
                 </a:solidFill>
                 <a:latin typeface="맑은 고딕"/>
                 <a:ea typeface="맑은 고딕"/>
@@ -18771,7 +18229,7 @@
             <a:r>
               <a:rPr lang="en-US" sz="3400" b="1">
                 <a:solidFill>
-                  <a:srgbClr val="c8622e"/>
+                  <a:srgbClr val="C8622E"/>
                 </a:solidFill>
                 <a:latin typeface="Arial"/>
                 <a:ea typeface="Arial"/>
@@ -18800,11 +18258,11 @@
             </a:avLst>
           </a:prstGeom>
           <a:solidFill>
-            <a:srgbClr val="16223b"/>
+            <a:srgbClr val="16223B"/>
           </a:solidFill>
           <a:ln w="12700">
             <a:solidFill>
-              <a:srgbClr val="d9dee6"/>
+              <a:srgbClr val="D9DEE6"/>
             </a:solidFill>
             <a:prstDash val="solid"/>
           </a:ln>
@@ -18855,7 +18313,7 @@
             <a:r>
               <a:rPr lang="en-US" sz="1400" b="1">
                 <a:solidFill>
-                  <a:srgbClr val="e0a15a"/>
+                  <a:srgbClr val="E0A15A"/>
                 </a:solidFill>
                 <a:latin typeface="맑은 고딕"/>
                 <a:ea typeface="맑은 고딕"/>
@@ -18863,14 +18321,6 @@
               </a:rPr>
               <a:t>해결</a:t>
             </a:r>
-            <a:endParaRPr lang="en-US" sz="1400" b="1">
-              <a:solidFill>
-                <a:srgbClr val="e0a15a"/>
-              </a:solidFill>
-              <a:latin typeface="맑은 고딕"/>
-              <a:ea typeface="맑은 고딕"/>
-              <a:cs typeface="맑은 고딕"/>
-            </a:endParaRPr>
           </a:p>
         </p:txBody>
       </p:sp>
@@ -18905,7 +18355,7 @@
             <a:r>
               <a:rPr lang="en-US" sz="1300">
                 <a:solidFill>
-                  <a:srgbClr val="ffffff"/>
+                  <a:srgbClr val="FFFFFF"/>
                 </a:solidFill>
                 <a:latin typeface="맑은 고딕"/>
                 <a:ea typeface="맑은 고딕"/>
@@ -18916,7 +18366,7 @@
             <a:r>
               <a:rPr lang="ko-KR" altLang="en-US" sz="1300">
                 <a:solidFill>
-                  <a:srgbClr val="ffffff"/>
+                  <a:srgbClr val="FFFFFF"/>
                 </a:solidFill>
                 <a:latin typeface="맑은 고딕"/>
                 <a:ea typeface="맑은 고딕"/>
@@ -18927,7 +18377,7 @@
             <a:r>
               <a:rPr lang="en-US" sz="1300">
                 <a:solidFill>
-                  <a:srgbClr val="ffffff"/>
+                  <a:srgbClr val="FFFFFF"/>
                 </a:solidFill>
                 <a:latin typeface="맑은 고딕"/>
                 <a:ea typeface="맑은 고딕"/>
@@ -18938,7 +18388,7 @@
             <a:r>
               <a:rPr lang="ko-KR" altLang="en-US" sz="1300">
                 <a:solidFill>
-                  <a:srgbClr val="ffffff"/>
+                  <a:srgbClr val="FFFFFF"/>
                 </a:solidFill>
                 <a:latin typeface="맑은 고딕"/>
                 <a:ea typeface="맑은 고딕"/>
@@ -18949,7 +18399,7 @@
             <a:r>
               <a:rPr lang="en-US" sz="1300">
                 <a:solidFill>
-                  <a:srgbClr val="ffffff"/>
+                  <a:srgbClr val="FFFFFF"/>
                 </a:solidFill>
                 <a:latin typeface="맑은 고딕"/>
                 <a:ea typeface="맑은 고딕"/>
@@ -18957,14 +18407,6 @@
               </a:rPr>
               <a:t> 플레이어에게만 부여. </a:t>
             </a:r>
-            <a:endParaRPr lang="en-US" sz="1300">
-              <a:solidFill>
-                <a:srgbClr val="ffffff"/>
-              </a:solidFill>
-              <a:latin typeface="맑은 고딕"/>
-              <a:ea typeface="맑은 고딕"/>
-              <a:cs typeface="맑은 고딕"/>
-            </a:endParaRPr>
           </a:p>
           <a:p>
             <a:pPr marL="0" indent="0">
@@ -18977,7 +18419,7 @@
             <a:r>
               <a:rPr lang="en-US" sz="1300">
                 <a:solidFill>
-                  <a:srgbClr val="ffffff"/>
+                  <a:srgbClr val="FFFFFF"/>
                 </a:solidFill>
                 <a:latin typeface="맑은 고딕"/>
                 <a:ea typeface="맑은 고딕"/>
@@ -18988,7 +18430,7 @@
             <a:r>
               <a:rPr lang="ko-KR" altLang="en-US" sz="1300">
                 <a:solidFill>
-                  <a:srgbClr val="ffffff"/>
+                  <a:srgbClr val="FFFFFF"/>
                 </a:solidFill>
                 <a:latin typeface="맑은 고딕"/>
                 <a:ea typeface="맑은 고딕"/>
@@ -18999,7 +18441,7 @@
             <a:r>
               <a:rPr lang="en-US" sz="1300">
                 <a:solidFill>
-                  <a:srgbClr val="ffffff"/>
+                  <a:srgbClr val="FFFFFF"/>
                 </a:solidFill>
                 <a:latin typeface="맑은 고딕"/>
                 <a:ea typeface="맑은 고딕"/>
@@ -19007,14 +18449,6 @@
               </a:rPr>
               <a:t> 없이 자기 패턴대로 실시간 행동 → </a:t>
             </a:r>
-            <a:endParaRPr lang="en-US" sz="1300">
-              <a:solidFill>
-                <a:srgbClr val="ffffff"/>
-              </a:solidFill>
-              <a:latin typeface="맑은 고딕"/>
-              <a:ea typeface="맑은 고딕"/>
-              <a:cs typeface="맑은 고딕"/>
-            </a:endParaRPr>
           </a:p>
           <a:p>
             <a:pPr marL="0" indent="0">
@@ -19027,7 +18461,7 @@
             <a:r>
               <a:rPr lang="en-US" sz="1300">
                 <a:solidFill>
-                  <a:srgbClr val="ffffff"/>
+                  <a:srgbClr val="FFFFFF"/>
                 </a:solidFill>
                 <a:latin typeface="맑은 고딕"/>
                 <a:ea typeface="맑은 고딕"/>
@@ -19056,11 +18490,11 @@
             </a:avLst>
           </a:prstGeom>
           <a:solidFill>
-            <a:srgbClr val="f4f6fa"/>
+            <a:srgbClr val="F4F6FA"/>
           </a:solidFill>
           <a:ln w="12700">
             <a:solidFill>
-              <a:srgbClr val="d9dee6"/>
+              <a:srgbClr val="D9DEE6"/>
             </a:solidFill>
             <a:prstDash val="solid"/>
           </a:ln>
@@ -19111,7 +18545,7 @@
             <a:r>
               <a:rPr lang="en-US" sz="2600" b="1">
                 <a:solidFill>
-                  <a:srgbClr val="c8622e"/>
+                  <a:srgbClr val="C8622E"/>
                 </a:solidFill>
                 <a:latin typeface="Arial"/>
                 <a:ea typeface="Arial"/>
@@ -19151,7 +18585,7 @@
             <a:r>
               <a:rPr lang="ko-KR" altLang="en-US" sz="1400" b="1">
                 <a:solidFill>
-                  <a:srgbClr val="1f2637"/>
+                  <a:srgbClr val="1F2637"/>
                 </a:solidFill>
                 <a:latin typeface="맑은 고딕"/>
                 <a:ea typeface="맑은 고딕"/>
@@ -19162,7 +18596,7 @@
             <a:r>
               <a:rPr lang="en-US" sz="1400" b="1">
                 <a:solidFill>
-                  <a:srgbClr val="1f2637"/>
+                  <a:srgbClr val="1F2637"/>
                 </a:solidFill>
                 <a:latin typeface="맑은 고딕"/>
                 <a:ea typeface="맑은 고딕"/>
@@ -19170,14 +18604,6 @@
               </a:rPr>
               <a:t> 플레이어에게만</a:t>
             </a:r>
-            <a:endParaRPr lang="en-US" sz="1400" b="1">
-              <a:solidFill>
-                <a:srgbClr val="1f2637"/>
-              </a:solidFill>
-              <a:latin typeface="맑은 고딕"/>
-              <a:ea typeface="맑은 고딕"/>
-              <a:cs typeface="맑은 고딕"/>
-            </a:endParaRPr>
           </a:p>
         </p:txBody>
       </p:sp>
@@ -19212,7 +18638,7 @@
             <a:r>
               <a:rPr lang="en-US" sz="1200">
                 <a:solidFill>
-                  <a:srgbClr val="6c7686"/>
+                  <a:srgbClr val="6C7686"/>
                 </a:solidFill>
                 <a:latin typeface="맑은 고딕"/>
                 <a:ea typeface="맑은 고딕"/>
@@ -19223,7 +18649,7 @@
             <a:r>
               <a:rPr lang="ko-KR" altLang="en-US" sz="1200">
                 <a:solidFill>
-                  <a:srgbClr val="6c7686"/>
+                  <a:srgbClr val="6C7686"/>
                 </a:solidFill>
                 <a:latin typeface="맑은 고딕"/>
                 <a:ea typeface="맑은 고딕"/>
@@ -19234,7 +18660,7 @@
             <a:r>
               <a:rPr lang="en-US" sz="1200">
                 <a:solidFill>
-                  <a:srgbClr val="6c7686"/>
+                  <a:srgbClr val="6C7686"/>
                 </a:solidFill>
                 <a:latin typeface="맑은 고딕"/>
                 <a:ea typeface="맑은 고딕"/>
@@ -19245,7 +18671,7 @@
             <a:r>
               <a:rPr lang="ko-KR" altLang="en-US" sz="1200">
                 <a:solidFill>
-                  <a:srgbClr val="6c7686"/>
+                  <a:srgbClr val="6C7686"/>
                 </a:solidFill>
                 <a:latin typeface="맑은 고딕"/>
                 <a:ea typeface="맑은 고딕"/>
@@ -19256,7 +18682,7 @@
             <a:r>
               <a:rPr lang="en-US" sz="1200">
                 <a:solidFill>
-                  <a:srgbClr val="6c7686"/>
+                  <a:srgbClr val="6C7686"/>
                 </a:solidFill>
                 <a:latin typeface="맑은 고딕"/>
                 <a:ea typeface="맑은 고딕"/>
@@ -19264,14 +18690,6 @@
               </a:rPr>
               <a:t>로 분리</a:t>
             </a:r>
-            <a:endParaRPr lang="en-US" sz="1200">
-              <a:solidFill>
-                <a:srgbClr val="6c7686"/>
-              </a:solidFill>
-              <a:latin typeface="맑은 고딕"/>
-              <a:ea typeface="맑은 고딕"/>
-              <a:cs typeface="맑은 고딕"/>
-            </a:endParaRPr>
           </a:p>
         </p:txBody>
       </p:sp>
@@ -19292,11 +18710,11 @@
             </a:avLst>
           </a:prstGeom>
           <a:solidFill>
-            <a:srgbClr val="f4f6fa"/>
+            <a:srgbClr val="F4F6FA"/>
           </a:solidFill>
           <a:ln w="12700">
             <a:solidFill>
-              <a:srgbClr val="d9dee6"/>
+              <a:srgbClr val="D9DEE6"/>
             </a:solidFill>
             <a:prstDash val="solid"/>
           </a:ln>
@@ -19347,7 +18765,7 @@
             <a:r>
               <a:rPr lang="en-US" sz="2600" b="1">
                 <a:solidFill>
-                  <a:srgbClr val="c8622e"/>
+                  <a:srgbClr val="C8622E"/>
                 </a:solidFill>
                 <a:latin typeface="Arial"/>
                 <a:ea typeface="Arial"/>
@@ -19387,7 +18805,7 @@
             <a:r>
               <a:rPr lang="en-US" sz="1400" b="1">
                 <a:solidFill>
-                  <a:srgbClr val="1f2637"/>
+                  <a:srgbClr val="1F2637"/>
                 </a:solidFill>
                 <a:latin typeface="맑은 고딕"/>
                 <a:ea typeface="맑은 고딕"/>
@@ -19430,7 +18848,7 @@
             <a:r>
               <a:rPr lang="ko-KR" altLang="en-US" sz="1200">
                 <a:solidFill>
-                  <a:srgbClr val="6c7686"/>
+                  <a:srgbClr val="6C7686"/>
                 </a:solidFill>
                 <a:latin typeface="맑은 고딕"/>
                 <a:ea typeface="맑은 고딕"/>
@@ -19441,7 +18859,7 @@
             <a:r>
               <a:rPr lang="en-US" sz="1200">
                 <a:solidFill>
-                  <a:srgbClr val="6c7686"/>
+                  <a:srgbClr val="6C7686"/>
                 </a:solidFill>
                 <a:latin typeface="맑은 고딕"/>
                 <a:ea typeface="맑은 고딕"/>
@@ -19452,7 +18870,7 @@
             <a:r>
               <a:rPr lang="ko-KR" altLang="en-US" sz="1200">
                 <a:solidFill>
-                  <a:srgbClr val="6c7686"/>
+                  <a:srgbClr val="6C7686"/>
                 </a:solidFill>
                 <a:latin typeface="맑은 고딕"/>
                 <a:ea typeface="맑은 고딕"/>
@@ -19463,7 +18881,7 @@
             <a:r>
               <a:rPr lang="en-US" sz="1200">
                 <a:solidFill>
-                  <a:srgbClr val="6c7686"/>
+                  <a:srgbClr val="6C7686"/>
                 </a:solidFill>
                 <a:latin typeface="맑은 고딕"/>
                 <a:ea typeface="맑은 고딕"/>
@@ -19471,14 +18889,6 @@
               </a:rPr>
               <a:t> 위협감</a:t>
             </a:r>
-            <a:endParaRPr lang="en-US" sz="1200">
-              <a:solidFill>
-                <a:srgbClr val="6c7686"/>
-              </a:solidFill>
-              <a:latin typeface="맑은 고딕"/>
-              <a:ea typeface="맑은 고딕"/>
-              <a:cs typeface="맑은 고딕"/>
-            </a:endParaRPr>
           </a:p>
         </p:txBody>
       </p:sp>
@@ -19499,11 +18909,11 @@
             </a:avLst>
           </a:prstGeom>
           <a:solidFill>
-            <a:srgbClr val="f4f6fa"/>
+            <a:srgbClr val="F4F6FA"/>
           </a:solidFill>
           <a:ln w="12700">
             <a:solidFill>
-              <a:srgbClr val="d9dee6"/>
+              <a:srgbClr val="D9DEE6"/>
             </a:solidFill>
             <a:prstDash val="solid"/>
           </a:ln>
@@ -19554,7 +18964,7 @@
             <a:r>
               <a:rPr lang="en-US" sz="2600" b="1">
                 <a:solidFill>
-                  <a:srgbClr val="c8622e"/>
+                  <a:srgbClr val="C8622E"/>
                 </a:solidFill>
                 <a:latin typeface="Arial"/>
                 <a:ea typeface="Arial"/>
@@ -19594,7 +19004,7 @@
             <a:r>
               <a:rPr lang="en-US" sz="1400" b="1">
                 <a:solidFill>
-                  <a:srgbClr val="1f2637"/>
+                  <a:srgbClr val="1F2637"/>
                 </a:solidFill>
                 <a:latin typeface="맑은 고딕"/>
                 <a:ea typeface="맑은 고딕"/>
@@ -19637,7 +19047,7 @@
             <a:r>
               <a:rPr lang="en-US" sz="1200">
                 <a:solidFill>
-                  <a:srgbClr val="6c7686"/>
+                  <a:srgbClr val="6C7686"/>
                 </a:solidFill>
                 <a:latin typeface="맑은 고딕"/>
                 <a:ea typeface="맑은 고딕"/>
@@ -19677,7 +19087,7 @@
             <a:r>
               <a:rPr lang="en-US" sz="900">
                 <a:solidFill>
-                  <a:srgbClr val="6c7686"/>
+                  <a:srgbClr val="6C7686"/>
                 </a:solidFill>
                 <a:latin typeface="맑은 고딕"/>
                 <a:ea typeface="맑은 고딕"/>
@@ -19717,7 +19127,7 @@
             <a:r>
               <a:rPr lang="en-US" sz="900">
                 <a:solidFill>
-                  <a:srgbClr val="6c7686"/>
+                  <a:srgbClr val="6C7686"/>
                 </a:solidFill>
                 <a:latin typeface="맑은 고딕"/>
                 <a:ea typeface="맑은 고딕"/>
@@ -19734,11 +19144,11 @@
   <p:clrMapOvr>
     <a:masterClrMapping/>
   </p:clrMapOvr>
-  <mc:AlternateContent xmlns:mc="http://schemas.openxmlformats.org/markup-compatibility/2006">
-    <mc:Choice xmlns:p14="http://schemas.microsoft.com/office/powerpoint/2010/main" Requires="p14">
-      <p:transition xmlns:mc="http://schemas.openxmlformats.org/markup-compatibility/2006" xmlns:p14="http://schemas.microsoft.com/office/powerpoint/2010/main" mc:Ignorable="p14" p14:dur="500"/>
+  <mc:AlternateContent xmlns:mc="http://schemas.openxmlformats.org/markup-compatibility/2006" xmlns:p14="http://schemas.microsoft.com/office/powerpoint/2010/main">
+    <mc:Choice Requires="p14">
+      <p:transition/>
     </mc:Choice>
-    <mc:Fallback>
+    <mc:Fallback xmlns:dsp="http://schemas.microsoft.com/office/drawing/2008/diagram" xmlns:dgm="http://schemas.openxmlformats.org/drawingml/2006/diagram" xmlns:c="http://schemas.openxmlformats.org/drawingml/2006/chart" xmlns="">
       <p:transition/>
     </mc:Fallback>
   </mc:AlternateContent>
@@ -19746,13 +19156,14 @@
 </file>
 
 <file path=ppt/slides/slide6.xml><?xml version="1.0" encoding="utf-8"?>
-<p:sld xmlns:r="http://schemas.openxmlformats.org/officeDocument/2006/relationships" xmlns:c="http://schemas.openxmlformats.org/drawingml/2006/chart" xmlns:a="http://schemas.openxmlformats.org/drawingml/2006/main" xmlns:dgm="http://schemas.openxmlformats.org/drawingml/2006/diagram" xmlns:dsp="http://schemas.microsoft.com/office/drawing/2008/diagram" xmlns:p="http://schemas.openxmlformats.org/presentationml/2006/main">
+<p:sld xmlns:a="http://schemas.openxmlformats.org/drawingml/2006/main" xmlns:r="http://schemas.openxmlformats.org/officeDocument/2006/relationships" xmlns:p="http://schemas.openxmlformats.org/presentationml/2006/main">
   <p:cSld name="Slide 6">
     <p:bg>
-      <p:bgPr shadeToTitle="0">
+      <p:bgPr>
         <a:solidFill>
-          <a:srgbClr val="ffffff"/>
+          <a:srgbClr val="FFFFFF"/>
         </a:solidFill>
+        <a:effectLst/>
       </p:bgPr>
     </p:bg>
     <p:spTree>
@@ -19797,7 +19208,7 @@
             <a:r>
               <a:rPr lang="en-US" sz="1200" b="1" kern="0" spc="200">
                 <a:solidFill>
-                  <a:srgbClr val="c8622e"/>
+                  <a:srgbClr val="C8622E"/>
                 </a:solidFill>
                 <a:latin typeface="맑은 고딕"/>
                 <a:ea typeface="맑은 고딕"/>
@@ -19837,7 +19248,7 @@
             <a:r>
               <a:rPr lang="en-US" sz="2900" b="1">
                 <a:solidFill>
-                  <a:srgbClr val="1f2637"/>
+                  <a:srgbClr val="1F2637"/>
                 </a:solidFill>
                 <a:latin typeface="맑은 고딕"/>
                 <a:ea typeface="맑은 고딕"/>
@@ -19848,7 +19259,7 @@
             <a:r>
               <a:rPr lang="ko-KR" altLang="en-US" sz="2900" b="1">
                 <a:solidFill>
-                  <a:srgbClr val="1f2637"/>
+                  <a:srgbClr val="1F2637"/>
                 </a:solidFill>
                 <a:latin typeface="맑은 고딕"/>
                 <a:ea typeface="맑은 고딕"/>
@@ -19859,7 +19270,7 @@
             <a:r>
               <a:rPr lang="en-US" sz="2900" b="1">
                 <a:solidFill>
-                  <a:srgbClr val="1f2637"/>
+                  <a:srgbClr val="1F2637"/>
                 </a:solidFill>
                 <a:latin typeface="맑은 고딕"/>
                 <a:ea typeface="맑은 고딕"/>
@@ -19870,7 +19281,7 @@
             <a:r>
               <a:rPr lang="ko-KR" altLang="en-US" sz="2900" b="1">
                 <a:solidFill>
-                  <a:srgbClr val="1f2637"/>
+                  <a:srgbClr val="1F2637"/>
                 </a:solidFill>
                 <a:latin typeface="맑은 고딕"/>
                 <a:ea typeface="맑은 고딕"/>
@@ -19881,7 +19292,7 @@
             <a:r>
               <a:rPr lang="en-US" sz="2900" b="1">
                 <a:solidFill>
-                  <a:srgbClr val="1f2637"/>
+                  <a:srgbClr val="1F2637"/>
                 </a:solidFill>
                 <a:latin typeface="맑은 고딕"/>
                 <a:ea typeface="맑은 고딕"/>
@@ -19889,14 +19300,6 @@
               </a:rPr>
               <a:t> · 약점 간파 · 동료 연계</a:t>
             </a:r>
-            <a:endParaRPr lang="en-US" sz="2900" b="1">
-              <a:solidFill>
-                <a:srgbClr val="1f2637"/>
-              </a:solidFill>
-              <a:latin typeface="맑은 고딕"/>
-              <a:ea typeface="맑은 고딕"/>
-              <a:cs typeface="맑은 고딕"/>
-            </a:endParaRPr>
           </a:p>
         </p:txBody>
       </p:sp>
@@ -19917,11 +19320,11 @@
             </a:avLst>
           </a:prstGeom>
           <a:solidFill>
-            <a:srgbClr val="16223b"/>
+            <a:srgbClr val="16223B"/>
           </a:solidFill>
           <a:ln w="12700">
             <a:solidFill>
-              <a:srgbClr val="d9dee6"/>
+              <a:srgbClr val="D9DEE6"/>
             </a:solidFill>
             <a:prstDash val="solid"/>
           </a:ln>
@@ -19972,7 +19375,7 @@
             <a:r>
               <a:rPr lang="en-US" sz="1600" b="1">
                 <a:solidFill>
-                  <a:srgbClr val="ffffff"/>
+                  <a:srgbClr val="FFFFFF"/>
                 </a:solidFill>
                 <a:latin typeface="맑은 고딕"/>
                 <a:ea typeface="맑은 고딕"/>
@@ -19983,7 +19386,7 @@
             <a:r>
               <a:rPr lang="ko-KR" altLang="en-US" sz="1600" b="1">
                 <a:solidFill>
-                  <a:srgbClr val="ffffff"/>
+                  <a:srgbClr val="FFFFFF"/>
                 </a:solidFill>
                 <a:latin typeface="맑은 고딕"/>
                 <a:ea typeface="맑은 고딕"/>
@@ -19994,7 +19397,7 @@
             <a:r>
               <a:rPr lang="en-US" sz="1600" b="1">
                 <a:solidFill>
-                  <a:srgbClr val="ffffff"/>
+                  <a:srgbClr val="FFFFFF"/>
                 </a:solidFill>
                 <a:latin typeface="맑은 고딕"/>
                 <a:ea typeface="맑은 고딕"/>
@@ -20005,7 +19408,7 @@
             <a:r>
               <a:rPr lang="ko-KR" altLang="en-US" sz="1600" b="1">
                 <a:solidFill>
-                  <a:srgbClr val="ffffff"/>
+                  <a:srgbClr val="FFFFFF"/>
                 </a:solidFill>
                 <a:latin typeface="맑은 고딕"/>
                 <a:ea typeface="맑은 고딕"/>
@@ -20013,14 +19416,6 @@
               </a:rPr>
               <a:t> 페이즈</a:t>
             </a:r>
-            <a:endParaRPr lang="ko-KR" altLang="en-US" sz="1600" b="1">
-              <a:solidFill>
-                <a:srgbClr val="ffffff"/>
-              </a:solidFill>
-              <a:latin typeface="맑은 고딕"/>
-              <a:ea typeface="맑은 고딕"/>
-              <a:cs typeface="맑은 고딕"/>
-            </a:endParaRPr>
           </a:p>
         </p:txBody>
       </p:sp>
@@ -20055,7 +19450,7 @@
             <a:r>
               <a:rPr lang="en-US" sz="1300">
                 <a:solidFill>
-                  <a:srgbClr val="eaf0fa"/>
+                  <a:srgbClr val="EAF0FA"/>
                 </a:solidFill>
                 <a:latin typeface="맑은 고딕"/>
                 <a:ea typeface="맑은 고딕"/>
@@ -20066,7 +19461,7 @@
             <a:r>
               <a:rPr lang="ko-KR" altLang="en-US" sz="1300">
                 <a:solidFill>
-                  <a:srgbClr val="eaf0fa"/>
+                  <a:srgbClr val="EAF0FA"/>
                 </a:solidFill>
                 <a:latin typeface="맑은 고딕"/>
                 <a:ea typeface="맑은 고딕"/>
@@ -20077,7 +19472,7 @@
             <a:r>
               <a:rPr lang="en-US" sz="1300">
                 <a:solidFill>
-                  <a:srgbClr val="eaf0fa"/>
+                  <a:srgbClr val="EAF0FA"/>
                 </a:solidFill>
                 <a:latin typeface="맑은 고딕"/>
                 <a:ea typeface="맑은 고딕"/>
@@ -20085,14 +19480,6 @@
               </a:rPr>
               <a:t> 고유 에너지를 소모. 소진 시 반대 턴으로 자동 스위치. </a:t>
             </a:r>
-            <a:endParaRPr lang="en-US" sz="1300">
-              <a:solidFill>
-                <a:srgbClr val="eaf0fa"/>
-              </a:solidFill>
-              <a:latin typeface="맑은 고딕"/>
-              <a:ea typeface="맑은 고딕"/>
-              <a:cs typeface="맑은 고딕"/>
-            </a:endParaRPr>
           </a:p>
           <a:p>
             <a:pPr marL="0" indent="0">
@@ -20105,7 +19492,7 @@
             <a:r>
               <a:rPr lang="en-US" sz="1300">
                 <a:solidFill>
-                  <a:srgbClr val="eaf0fa"/>
+                  <a:srgbClr val="EAF0FA"/>
                 </a:solidFill>
                 <a:latin typeface="맑은 고딕"/>
                 <a:ea typeface="맑은 고딕"/>
@@ -20134,11 +19521,11 @@
             </a:avLst>
           </a:prstGeom>
           <a:solidFill>
-            <a:srgbClr val="f4f6fa"/>
+            <a:srgbClr val="F4F6FA"/>
           </a:solidFill>
           <a:ln w="12700">
             <a:solidFill>
-              <a:srgbClr val="d9dee6"/>
+              <a:srgbClr val="D9DEE6"/>
             </a:solidFill>
             <a:prstDash val="solid"/>
           </a:ln>
@@ -20189,7 +19576,7 @@
             <a:r>
               <a:rPr lang="en-US" sz="1600" b="1">
                 <a:solidFill>
-                  <a:srgbClr val="c8622e"/>
+                  <a:srgbClr val="C8622E"/>
                 </a:solidFill>
                 <a:latin typeface="맑은 고딕"/>
                 <a:ea typeface="맑은 고딕"/>
@@ -20232,7 +19619,7 @@
             <a:r>
               <a:rPr lang="en-US" sz="1300">
                 <a:solidFill>
-                  <a:srgbClr val="1f2637"/>
+                  <a:srgbClr val="1F2637"/>
                 </a:solidFill>
                 <a:latin typeface="맑은 고딕"/>
                 <a:ea typeface="맑은 고딕"/>
@@ -20243,7 +19630,7 @@
             <a:r>
               <a:rPr lang="ko-KR" altLang="en-US" sz="1300">
                 <a:solidFill>
-                  <a:srgbClr val="1f2637"/>
+                  <a:srgbClr val="1F2637"/>
                 </a:solidFill>
                 <a:latin typeface="맑은 고딕"/>
                 <a:ea typeface="맑은 고딕"/>
@@ -20254,7 +19641,7 @@
             <a:r>
               <a:rPr lang="en-US" sz="1300">
                 <a:solidFill>
-                  <a:srgbClr val="1f2637"/>
+                  <a:srgbClr val="1F2637"/>
                 </a:solidFill>
                 <a:latin typeface="맑은 고딕"/>
                 <a:ea typeface="맑은 고딕"/>
@@ -20262,14 +19649,6 @@
               </a:rPr>
               <a:t>. </a:t>
             </a:r>
-            <a:endParaRPr lang="en-US" sz="1300">
-              <a:solidFill>
-                <a:srgbClr val="1f2637"/>
-              </a:solidFill>
-              <a:latin typeface="맑은 고딕"/>
-              <a:ea typeface="맑은 고딕"/>
-              <a:cs typeface="맑은 고딕"/>
-            </a:endParaRPr>
           </a:p>
           <a:p>
             <a:pPr marL="0" indent="0">
@@ -20282,7 +19661,7 @@
             <a:r>
               <a:rPr lang="ko-KR" altLang="en-US" sz="1300">
                 <a:solidFill>
-                  <a:srgbClr val="1f2637"/>
+                  <a:srgbClr val="1F2637"/>
                 </a:solidFill>
                 <a:latin typeface="맑은 고딕"/>
                 <a:ea typeface="맑은 고딕"/>
@@ -20293,7 +19672,7 @@
             <a:r>
               <a:rPr lang="en-US" sz="1300">
                 <a:solidFill>
-                  <a:srgbClr val="1f2637"/>
+                  <a:srgbClr val="1F2637"/>
                 </a:solidFill>
                 <a:latin typeface="맑은 고딕"/>
                 <a:ea typeface="맑은 고딕"/>
@@ -20304,7 +19683,7 @@
             <a:r>
               <a:rPr lang="ko-KR" altLang="en-US" sz="1300">
                 <a:solidFill>
-                  <a:srgbClr val="1f2637"/>
+                  <a:srgbClr val="1F2637"/>
                 </a:solidFill>
                 <a:latin typeface="맑은 고딕"/>
                 <a:ea typeface="맑은 고딕"/>
@@ -20315,7 +19694,7 @@
             <a:r>
               <a:rPr lang="en-US" sz="1300">
                 <a:solidFill>
-                  <a:srgbClr val="1f2637"/>
+                  <a:srgbClr val="1F2637"/>
                 </a:solidFill>
                 <a:latin typeface="맑은 고딕"/>
                 <a:ea typeface="맑은 고딕"/>
@@ -20326,7 +19705,7 @@
             <a:r>
               <a:rPr lang="ko-KR" altLang="en-US" sz="1300">
                 <a:solidFill>
-                  <a:srgbClr val="1f2637"/>
+                  <a:srgbClr val="1F2637"/>
                 </a:solidFill>
                 <a:latin typeface="맑은 고딕"/>
                 <a:ea typeface="맑은 고딕"/>
@@ -20337,7 +19716,7 @@
             <a:r>
               <a:rPr lang="en-US" sz="1300">
                 <a:solidFill>
-                  <a:srgbClr val="1f2637"/>
+                  <a:srgbClr val="1F2637"/>
                 </a:solidFill>
                 <a:latin typeface="맑은 고딕"/>
                 <a:ea typeface="맑은 고딕"/>
@@ -20345,14 +19724,6 @@
               </a:rPr>
               <a:t>회복 + 추가 턴.</a:t>
             </a:r>
-            <a:endParaRPr lang="en-US" sz="1300">
-              <a:solidFill>
-                <a:srgbClr val="1f2637"/>
-              </a:solidFill>
-              <a:latin typeface="맑은 고딕"/>
-              <a:ea typeface="맑은 고딕"/>
-              <a:cs typeface="맑은 고딕"/>
-            </a:endParaRPr>
           </a:p>
         </p:txBody>
       </p:sp>
@@ -20373,11 +19744,11 @@
             </a:avLst>
           </a:prstGeom>
           <a:solidFill>
-            <a:srgbClr val="f4f6fa"/>
+            <a:srgbClr val="F4F6FA"/>
           </a:solidFill>
           <a:ln w="12700">
             <a:solidFill>
-              <a:srgbClr val="d9dee6"/>
+              <a:srgbClr val="D9DEE6"/>
             </a:solidFill>
             <a:prstDash val="solid"/>
           </a:ln>
@@ -20428,7 +19799,7 @@
             <a:r>
               <a:rPr lang="en-US" sz="1600" b="1">
                 <a:solidFill>
-                  <a:srgbClr val="c8622e"/>
+                  <a:srgbClr val="C8622E"/>
                 </a:solidFill>
                 <a:latin typeface="맑은 고딕"/>
                 <a:ea typeface="맑은 고딕"/>
@@ -20471,7 +19842,7 @@
             <a:r>
               <a:rPr lang="en-US" sz="1300">
                 <a:solidFill>
-                  <a:srgbClr val="1f2637"/>
+                  <a:srgbClr val="1F2637"/>
                 </a:solidFill>
                 <a:latin typeface="맑은 고딕"/>
                 <a:ea typeface="맑은 고딕"/>
@@ -20479,9 +19850,37 @@
               </a:rPr>
               <a:t>패링·약점 간파 등 특정 조건 달성 시 동료가 순간 개입해 추가타/버프. </a:t>
             </a:r>
-            <a:endParaRPr lang="en-US" sz="1300">
+          </a:p>
+        </p:txBody>
+      </p:sp>
+      <p:sp>
+        <p:nvSpPr>
+          <p:cNvPr id="13" name="Text 11"/>
+          <p:cNvSpPr/>
+          <p:nvPr/>
+        </p:nvSpPr>
+        <p:spPr>
+          <a:xfrm>
+            <a:off x="566928" y="6190488"/>
+            <a:ext cx="11057839" cy="274320"/>
+          </a:xfrm>
+          <a:prstGeom prst="rect">
+            <a:avLst/>
+          </a:prstGeom>
+          <a:noFill/>
+          <a:ln/>
+        </p:spPr>
+        <p:txBody>
+          <a:bodyPr wrap="square" lIns="0" tIns="0" rIns="0" bIns="0" anchor="ctr"/>
+          <a:lstStyle/>
+          <a:p>
+            <a:pPr marL="0" indent="0">
+              <a:buNone/>
+              <a:defRPr/>
+            </a:pPr>
+            <a:endParaRPr lang="en-US" sz="1050" i="1">
               <a:solidFill>
-                <a:srgbClr val="1f2637"/>
+                <a:srgbClr val="6C7686"/>
               </a:solidFill>
               <a:latin typeface="맑은 고딕"/>
               <a:ea typeface="맑은 고딕"/>
@@ -20492,42 +19891,6 @@
       </p:sp>
       <p:sp>
         <p:nvSpPr>
-          <p:cNvPr id="13" name="Text 11"/>
-          <p:cNvSpPr/>
-          <p:nvPr/>
-        </p:nvSpPr>
-        <p:spPr>
-          <a:xfrm>
-            <a:off x="566928" y="6190488"/>
-            <a:ext cx="11057839" cy="274320"/>
-          </a:xfrm>
-          <a:prstGeom prst="rect">
-            <a:avLst/>
-          </a:prstGeom>
-          <a:noFill/>
-          <a:ln/>
-        </p:spPr>
-        <p:txBody>
-          <a:bodyPr wrap="square" lIns="0" tIns="0" rIns="0" bIns="0" anchor="ctr"/>
-          <a:lstStyle/>
-          <a:p>
-            <a:pPr marL="0" indent="0">
-              <a:buNone/>
-              <a:defRPr/>
-            </a:pPr>
-            <a:endParaRPr lang="en-US" sz="1050" i="1">
-              <a:solidFill>
-                <a:srgbClr val="6c7686"/>
-              </a:solidFill>
-              <a:latin typeface="맑은 고딕"/>
-              <a:ea typeface="맑은 고딕"/>
-              <a:cs typeface="맑은 고딕"/>
-            </a:endParaRPr>
-          </a:p>
-        </p:txBody>
-      </p:sp>
-      <p:sp>
-        <p:nvSpPr>
           <p:cNvPr id="14" name="Text 12"/>
           <p:cNvSpPr/>
           <p:nvPr/>
@@ -20554,7 +19917,7 @@
             <a:r>
               <a:rPr lang="en-US" sz="900">
                 <a:solidFill>
-                  <a:srgbClr val="6c7686"/>
+                  <a:srgbClr val="6C7686"/>
                 </a:solidFill>
                 <a:latin typeface="맑은 고딕"/>
                 <a:ea typeface="맑은 고딕"/>
@@ -20594,7 +19957,7 @@
             <a:r>
               <a:rPr lang="en-US" sz="900">
                 <a:solidFill>
-                  <a:srgbClr val="6c7686"/>
+                  <a:srgbClr val="6C7686"/>
                 </a:solidFill>
                 <a:latin typeface="맑은 고딕"/>
                 <a:ea typeface="맑은 고딕"/>
@@ -20611,11 +19974,11 @@
   <p:clrMapOvr>
     <a:masterClrMapping/>
   </p:clrMapOvr>
-  <mc:AlternateContent xmlns:mc="http://schemas.openxmlformats.org/markup-compatibility/2006">
-    <mc:Choice xmlns:p14="http://schemas.microsoft.com/office/powerpoint/2010/main" Requires="p14">
-      <p:transition xmlns:mc="http://schemas.openxmlformats.org/markup-compatibility/2006" xmlns:p14="http://schemas.microsoft.com/office/powerpoint/2010/main" mc:Ignorable="p14" p14:dur="500"/>
+  <mc:AlternateContent xmlns:mc="http://schemas.openxmlformats.org/markup-compatibility/2006" xmlns:p14="http://schemas.microsoft.com/office/powerpoint/2010/main">
+    <mc:Choice Requires="p14">
+      <p:transition/>
     </mc:Choice>
-    <mc:Fallback>
+    <mc:Fallback xmlns:dsp="http://schemas.microsoft.com/office/drawing/2008/diagram" xmlns:dgm="http://schemas.openxmlformats.org/drawingml/2006/diagram" xmlns:c="http://schemas.openxmlformats.org/drawingml/2006/chart" xmlns="">
       <p:transition/>
     </mc:Fallback>
   </mc:AlternateContent>
@@ -22046,7 +21409,7 @@
     <mc:Choice Requires="p14">
       <p:transition/>
     </mc:Choice>
-    <mc:Fallback xmlns:dsp="http://schemas.microsoft.com/office/drawing/2008/diagram" xmlns:dgm="http://schemas.openxmlformats.org/drawingml/2006/diagram" xmlns:c="http://schemas.openxmlformats.org/drawingml/2006/chart" xmlns="">
+    <mc:Fallback xmlns="" xmlns:c="http://schemas.openxmlformats.org/drawingml/2006/chart" xmlns:dgm="http://schemas.openxmlformats.org/drawingml/2006/diagram" xmlns:dsp="http://schemas.microsoft.com/office/drawing/2008/diagram">
       <p:transition/>
     </mc:Fallback>
   </mc:AlternateContent>
@@ -22054,13 +21417,14 @@
 </file>
 
 <file path=ppt/slides/slide9.xml><?xml version="1.0" encoding="utf-8"?>
-<p:sld xmlns:r="http://schemas.openxmlformats.org/officeDocument/2006/relationships" xmlns:c="http://schemas.openxmlformats.org/drawingml/2006/chart" xmlns:a="http://schemas.openxmlformats.org/drawingml/2006/main" xmlns:dgm="http://schemas.openxmlformats.org/drawingml/2006/diagram" xmlns:dsp="http://schemas.microsoft.com/office/drawing/2008/diagram" xmlns:p="http://schemas.openxmlformats.org/presentationml/2006/main">
+<p:sld xmlns:a="http://schemas.openxmlformats.org/drawingml/2006/main" xmlns:r="http://schemas.openxmlformats.org/officeDocument/2006/relationships" xmlns:p="http://schemas.openxmlformats.org/presentationml/2006/main">
   <p:cSld name="Slide 10">
     <p:bg>
-      <p:bgPr shadeToTitle="0">
+      <p:bgPr>
         <a:solidFill>
-          <a:srgbClr val="16223b"/>
+          <a:srgbClr val="16223B"/>
         </a:solidFill>
+        <a:effectLst/>
       </p:bgPr>
     </p:bg>
     <p:spTree>
@@ -22105,7 +21469,7 @@
             <a:r>
               <a:rPr lang="en-US" sz="1200" b="1" kern="0" spc="200">
                 <a:solidFill>
-                  <a:srgbClr val="e0a15a"/>
+                  <a:srgbClr val="E0A15A"/>
                 </a:solidFill>
                 <a:latin typeface="맑은 고딕"/>
                 <a:ea typeface="맑은 고딕"/>
@@ -22145,7 +21509,7 @@
             <a:r>
               <a:rPr lang="en-US" sz="2600" b="1">
                 <a:solidFill>
-                  <a:srgbClr val="ffffff"/>
+                  <a:srgbClr val="FFFFFF"/>
                 </a:solidFill>
                 <a:latin typeface="맑은 고딕"/>
                 <a:ea typeface="맑은 고딕"/>
@@ -22156,7 +21520,7 @@
             <a:r>
               <a:rPr lang="ko-KR" altLang="en-US" sz="2600" b="1">
                 <a:solidFill>
-                  <a:srgbClr val="ffffff"/>
+                  <a:srgbClr val="FFFFFF"/>
                 </a:solidFill>
                 <a:latin typeface="맑은 고딕"/>
                 <a:ea typeface="맑은 고딕"/>
@@ -22167,7 +21531,7 @@
             <a:r>
               <a:rPr lang="en-US" sz="2600" b="1">
                 <a:solidFill>
-                  <a:srgbClr val="ffffff"/>
+                  <a:srgbClr val="FFFFFF"/>
                 </a:solidFill>
                 <a:latin typeface="맑은 고딕"/>
                 <a:ea typeface="맑은 고딕"/>
@@ -22175,14 +21539,6 @@
               </a:rPr>
               <a:t> 경험'에서</a:t>
             </a:r>
-            <a:endParaRPr lang="en-US" sz="2600" b="1">
-              <a:solidFill>
-                <a:srgbClr val="ffffff"/>
-              </a:solidFill>
-              <a:latin typeface="맑은 고딕"/>
-              <a:ea typeface="맑은 고딕"/>
-              <a:cs typeface="맑은 고딕"/>
-            </a:endParaRPr>
           </a:p>
         </p:txBody>
       </p:sp>
@@ -22203,11 +21559,11 @@
             </a:avLst>
           </a:prstGeom>
           <a:solidFill>
-            <a:srgbClr val="24324f"/>
+            <a:srgbClr val="24324F"/>
           </a:solidFill>
           <a:ln w="12700">
             <a:solidFill>
-              <a:srgbClr val="d9dee6"/>
+              <a:srgbClr val="D9DEE6"/>
             </a:solidFill>
             <a:prstDash val="solid"/>
           </a:ln>
@@ -22258,7 +21614,7 @@
             <a:r>
               <a:rPr lang="en-US" sz="1500" b="1">
                 <a:solidFill>
-                  <a:srgbClr val="e0a15a"/>
+                  <a:srgbClr val="E0A15A"/>
                 </a:solidFill>
                 <a:latin typeface="맑은 고딕"/>
                 <a:ea typeface="맑은 고딕"/>
@@ -22269,7 +21625,7 @@
             <a:r>
               <a:rPr lang="ko-KR" altLang="en-US" sz="1500" b="1">
                 <a:solidFill>
-                  <a:srgbClr val="e0a15a"/>
+                  <a:srgbClr val="E0A15A"/>
                 </a:solidFill>
                 <a:latin typeface="맑은 고딕"/>
                 <a:ea typeface="맑은 고딕"/>
@@ -22280,7 +21636,7 @@
             <a:r>
               <a:rPr lang="en-US" sz="1500" b="1">
                 <a:solidFill>
-                  <a:srgbClr val="e0a15a"/>
+                  <a:srgbClr val="E0A15A"/>
                 </a:solidFill>
                 <a:latin typeface="맑은 고딕"/>
                 <a:ea typeface="맑은 고딕"/>
@@ -22288,14 +21644,6 @@
               </a:rPr>
               <a:t>자원</a:t>
             </a:r>
-            <a:endParaRPr lang="en-US" sz="1500" b="1">
-              <a:solidFill>
-                <a:srgbClr val="e0a15a"/>
-              </a:solidFill>
-              <a:latin typeface="맑은 고딕"/>
-              <a:ea typeface="맑은 고딕"/>
-              <a:cs typeface="맑은 고딕"/>
-            </a:endParaRPr>
           </a:p>
         </p:txBody>
       </p:sp>
@@ -22330,7 +21678,7 @@
             <a:r>
               <a:rPr lang="en-US" sz="1250">
                 <a:solidFill>
-                  <a:srgbClr val="eaf0fa"/>
+                  <a:srgbClr val="EAF0FA"/>
                 </a:solidFill>
                 <a:latin typeface="맑은 고딕"/>
                 <a:ea typeface="맑은 고딕"/>
@@ -22359,11 +21707,11 @@
             </a:avLst>
           </a:prstGeom>
           <a:solidFill>
-            <a:srgbClr val="24324f"/>
+            <a:srgbClr val="24324F"/>
           </a:solidFill>
           <a:ln w="12700">
             <a:solidFill>
-              <a:srgbClr val="d9dee6"/>
+              <a:srgbClr val="D9DEE6"/>
             </a:solidFill>
             <a:prstDash val="solid"/>
           </a:ln>
@@ -22414,7 +21762,7 @@
             <a:r>
               <a:rPr lang="en-US" sz="1500" b="1">
                 <a:solidFill>
-                  <a:srgbClr val="e0a15a"/>
+                  <a:srgbClr val="E0A15A"/>
                 </a:solidFill>
                 <a:latin typeface="맑은 고딕"/>
                 <a:ea typeface="맑은 고딕"/>
@@ -22457,7 +21805,7 @@
             <a:r>
               <a:rPr lang="en-US" sz="1250">
                 <a:solidFill>
-                  <a:srgbClr val="eaf0fa"/>
+                  <a:srgbClr val="EAF0FA"/>
                 </a:solidFill>
                 <a:latin typeface="맑은 고딕"/>
                 <a:ea typeface="맑은 고딕"/>
@@ -22486,11 +21834,11 @@
             </a:avLst>
           </a:prstGeom>
           <a:solidFill>
-            <a:srgbClr val="24324f"/>
+            <a:srgbClr val="24324F"/>
           </a:solidFill>
           <a:ln w="12700">
             <a:solidFill>
-              <a:srgbClr val="d9dee6"/>
+              <a:srgbClr val="D9DEE6"/>
             </a:solidFill>
             <a:prstDash val="solid"/>
           </a:ln>
@@ -22541,7 +21889,7 @@
             <a:r>
               <a:rPr lang="en-US" sz="1500" b="1">
                 <a:solidFill>
-                  <a:srgbClr val="e0a15a"/>
+                  <a:srgbClr val="E0A15A"/>
                 </a:solidFill>
                 <a:latin typeface="맑은 고딕"/>
                 <a:ea typeface="맑은 고딕"/>
@@ -22584,7 +21932,7 @@
             <a:r>
               <a:rPr lang="en-US" sz="1250">
                 <a:solidFill>
-                  <a:srgbClr val="eaf0fa"/>
+                  <a:srgbClr val="EAF0FA"/>
                 </a:solidFill>
                 <a:latin typeface="맑은 고딕"/>
                 <a:ea typeface="맑은 고딕"/>
@@ -22613,11 +21961,11 @@
             </a:avLst>
           </a:prstGeom>
           <a:solidFill>
-            <a:srgbClr val="24324f"/>
+            <a:srgbClr val="24324F"/>
           </a:solidFill>
           <a:ln w="12700">
             <a:solidFill>
-              <a:srgbClr val="d9dee6"/>
+              <a:srgbClr val="D9DEE6"/>
             </a:solidFill>
             <a:prstDash val="solid"/>
           </a:ln>
@@ -22668,7 +22016,7 @@
             <a:r>
               <a:rPr lang="en-US" sz="1500" b="1">
                 <a:solidFill>
-                  <a:srgbClr val="e0a15a"/>
+                  <a:srgbClr val="E0A15A"/>
                 </a:solidFill>
                 <a:latin typeface="맑은 고딕"/>
                 <a:ea typeface="맑은 고딕"/>
@@ -22711,7 +22059,7 @@
             <a:r>
               <a:rPr lang="en-US" sz="1250">
                 <a:solidFill>
-                  <a:srgbClr val="eaf0fa"/>
+                  <a:srgbClr val="EAF0FA"/>
                 </a:solidFill>
                 <a:latin typeface="맑은 고딕"/>
                 <a:ea typeface="맑은 고딕"/>
@@ -22740,11 +22088,11 @@
             </a:avLst>
           </a:prstGeom>
           <a:solidFill>
-            <a:srgbClr val="24324f"/>
+            <a:srgbClr val="24324F"/>
           </a:solidFill>
           <a:ln w="12700">
             <a:solidFill>
-              <a:srgbClr val="d9dee6"/>
+              <a:srgbClr val="D9DEE6"/>
             </a:solidFill>
             <a:prstDash val="solid"/>
           </a:ln>
@@ -22795,7 +22143,7 @@
             <a:r>
               <a:rPr lang="en-US" sz="1500" b="1">
                 <a:solidFill>
-                  <a:srgbClr val="e0a15a"/>
+                  <a:srgbClr val="E0A15A"/>
                 </a:solidFill>
                 <a:latin typeface="맑은 고딕"/>
                 <a:ea typeface="맑은 고딕"/>
@@ -22838,7 +22186,7 @@
             <a:r>
               <a:rPr lang="en-US" sz="1250">
                 <a:solidFill>
-                  <a:srgbClr val="eaf0fa"/>
+                  <a:srgbClr val="EAF0FA"/>
                 </a:solidFill>
                 <a:latin typeface="맑은 고딕"/>
                 <a:ea typeface="맑은 고딕"/>
@@ -22867,11 +22215,11 @@
             </a:avLst>
           </a:prstGeom>
           <a:solidFill>
-            <a:srgbClr val="24324f"/>
+            <a:srgbClr val="24324F"/>
           </a:solidFill>
           <a:ln w="12700">
             <a:solidFill>
-              <a:srgbClr val="d9dee6"/>
+              <a:srgbClr val="D9DEE6"/>
             </a:solidFill>
             <a:prstDash val="solid"/>
           </a:ln>
@@ -22922,7 +22270,7 @@
             <a:r>
               <a:rPr lang="en-US" sz="1500" b="1">
                 <a:solidFill>
-                  <a:srgbClr val="e0a15a"/>
+                  <a:srgbClr val="E0A15A"/>
                 </a:solidFill>
                 <a:latin typeface="맑은 고딕"/>
                 <a:ea typeface="맑은 고딕"/>
@@ -22965,7 +22313,7 @@
             <a:r>
               <a:rPr lang="ko-KR" altLang="en-US" sz="1250">
                 <a:solidFill>
-                  <a:srgbClr val="eaf0fa"/>
+                  <a:srgbClr val="EAF0FA"/>
                 </a:solidFill>
                 <a:latin typeface="맑은 고딕"/>
                 <a:ea typeface="맑은 고딕"/>
@@ -22973,14 +22321,6 @@
               </a:rPr>
               <a:t>공격할 기회를 알려수는 수단</a:t>
             </a:r>
-            <a:endParaRPr lang="ko-KR" altLang="en-US" sz="1250">
-              <a:solidFill>
-                <a:srgbClr val="eaf0fa"/>
-              </a:solidFill>
-              <a:latin typeface="맑은 고딕"/>
-              <a:ea typeface="맑은 고딕"/>
-              <a:cs typeface="맑은 고딕"/>
-            </a:endParaRPr>
           </a:p>
         </p:txBody>
       </p:sp>
@@ -23012,7 +22352,7 @@
             <a:r>
               <a:rPr lang="en-US" sz="900">
                 <a:solidFill>
-                  <a:srgbClr val="6c7686"/>
+                  <a:srgbClr val="6C7686"/>
                 </a:solidFill>
                 <a:latin typeface="맑은 고딕"/>
                 <a:ea typeface="맑은 고딕"/>
@@ -23052,7 +22392,7 @@
             <a:r>
               <a:rPr lang="en-US" sz="900">
                 <a:solidFill>
-                  <a:srgbClr val="6c7686"/>
+                  <a:srgbClr val="6C7686"/>
                 </a:solidFill>
                 <a:latin typeface="맑은 고딕"/>
                 <a:ea typeface="맑은 고딕"/>
@@ -23069,11 +22409,11 @@
   <p:clrMapOvr>
     <a:masterClrMapping/>
   </p:clrMapOvr>
-  <mc:AlternateContent xmlns:mc="http://schemas.openxmlformats.org/markup-compatibility/2006">
-    <mc:Choice xmlns:p14="http://schemas.microsoft.com/office/powerpoint/2010/main" Requires="p14">
-      <p:transition xmlns:mc="http://schemas.openxmlformats.org/markup-compatibility/2006" xmlns:p14="http://schemas.microsoft.com/office/powerpoint/2010/main" mc:Ignorable="p14" p14:dur="500"/>
+  <mc:AlternateContent xmlns:mc="http://schemas.openxmlformats.org/markup-compatibility/2006" xmlns:p14="http://schemas.microsoft.com/office/powerpoint/2010/main">
+    <mc:Choice Requires="p14">
+      <p:transition/>
     </mc:Choice>
-    <mc:Fallback>
+    <mc:Fallback xmlns:dsp="http://schemas.microsoft.com/office/drawing/2008/diagram" xmlns:dgm="http://schemas.openxmlformats.org/drawingml/2006/diagram" xmlns:c="http://schemas.openxmlformats.org/drawingml/2006/chart" xmlns="">
       <p:transition/>
     </mc:Fallback>
   </mc:AlternateContent>
@@ -23081,44 +22421,44 @@
 </file>
 
 <file path=ppt/theme/theme1.xml><?xml version="1.0" encoding="utf-8"?>
-<a:theme xmlns:r="http://schemas.openxmlformats.org/officeDocument/2006/relationships" xmlns:c="http://schemas.openxmlformats.org/drawingml/2006/chart" xmlns:dgm="http://schemas.openxmlformats.org/drawingml/2006/diagram" xmlns:dsp="http://schemas.microsoft.com/office/drawing/2008/diagram" xmlns:a="http://schemas.openxmlformats.org/drawingml/2006/main" xmlns:pic="http://schemas.openxmlformats.org/drawingml/2006/picture" xmlns:wp="http://schemas.openxmlformats.org/drawingml/2006/wordprocessingDrawing" xmlns:xdr="http://schemas.openxmlformats.org/drawingml/2006/spreadsheetDrawing" xmlns:lc="http://schemas.openxmlformats.org/drawingml/2006/lockedCanvas" xmlns:p="http://schemas.openxmlformats.org/presentationml/2006/main" name="Office Theme">
+<a:theme xmlns:a="http://schemas.openxmlformats.org/drawingml/2006/main" name="Office Theme">
   <a:themeElements>
     <a:clrScheme name="Office">
       <a:dk1>
         <a:sysClr val="windowText" lastClr="000000"/>
       </a:dk1>
       <a:lt1>
-        <a:sysClr val="window" lastClr="ffffff"/>
+        <a:sysClr val="window" lastClr="FFFFFF"/>
       </a:lt1>
       <a:dk2>
-        <a:srgbClr val="44546a"/>
+        <a:srgbClr val="44546A"/>
       </a:dk2>
       <a:lt2>
-        <a:srgbClr val="e7e6e6"/>
+        <a:srgbClr val="E7E6E6"/>
       </a:lt2>
       <a:accent1>
-        <a:srgbClr val="4472c4"/>
+        <a:srgbClr val="4472C4"/>
       </a:accent1>
       <a:accent2>
-        <a:srgbClr val="ed7d31"/>
+        <a:srgbClr val="ED7D31"/>
       </a:accent2>
       <a:accent3>
-        <a:srgbClr val="a5a5a5"/>
+        <a:srgbClr val="A5A5A5"/>
       </a:accent3>
       <a:accent4>
-        <a:srgbClr val="ffc000"/>
+        <a:srgbClr val="FFC000"/>
       </a:accent4>
       <a:accent5>
-        <a:srgbClr val="5b9bd5"/>
+        <a:srgbClr val="5B9BD5"/>
       </a:accent5>
       <a:accent6>
-        <a:srgbClr val="70ad47"/>
+        <a:srgbClr val="70AD47"/>
       </a:accent6>
       <a:hlink>
-        <a:srgbClr val="0563c1"/>
+        <a:srgbClr val="0563C1"/>
       </a:hlink>
       <a:folHlink>
-        <a:srgbClr val="954f72"/>
+        <a:srgbClr val="954F72"/>
       </a:folHlink>
     </a:clrScheme>
     <a:fontScheme name="Office">
@@ -23365,45 +22705,47 @@
       </a:bgFillStyleLst>
     </a:fmtScheme>
   </a:themeElements>
+  <a:objectDefaults/>
+  <a:extraClrSchemeLst/>
 </a:theme>
 </file>
 
 <file path=ppt/theme/theme2.xml><?xml version="1.0" encoding="utf-8"?>
-<a:theme xmlns:r="http://schemas.openxmlformats.org/officeDocument/2006/relationships" xmlns:c="http://schemas.openxmlformats.org/drawingml/2006/chart" xmlns:dgm="http://schemas.openxmlformats.org/drawingml/2006/diagram" xmlns:dsp="http://schemas.microsoft.com/office/drawing/2008/diagram" xmlns:a="http://schemas.openxmlformats.org/drawingml/2006/main" xmlns:pic="http://schemas.openxmlformats.org/drawingml/2006/picture" xmlns:wp="http://schemas.openxmlformats.org/drawingml/2006/wordprocessingDrawing" xmlns:xdr="http://schemas.openxmlformats.org/drawingml/2006/spreadsheetDrawing" xmlns:lc="http://schemas.openxmlformats.org/drawingml/2006/lockedCanvas" xmlns:p="http://schemas.openxmlformats.org/presentationml/2006/main" name="한컴오피스">
+<a:theme xmlns:a="http://schemas.openxmlformats.org/drawingml/2006/main" name="한컴오피스">
   <a:themeElements>
     <a:clrScheme name="한컴오피스">
       <a:dk1>
         <a:sysClr val="windowText" lastClr="000000"/>
       </a:dk1>
       <a:lt1>
-        <a:sysClr val="window" lastClr="ffffff"/>
+        <a:sysClr val="window" lastClr="FFFFFF"/>
       </a:lt1>
       <a:dk2>
-        <a:srgbClr val="3a3c84"/>
+        <a:srgbClr val="3A3C84"/>
       </a:dk2>
       <a:lt2>
-        <a:srgbClr val="faf3db"/>
+        <a:srgbClr val="FAF3DB"/>
       </a:lt2>
       <a:accent1>
-        <a:srgbClr val="6182d6"/>
+        <a:srgbClr val="6182D6"/>
       </a:accent1>
       <a:accent2>
-        <a:srgbClr val="ff843a"/>
+        <a:srgbClr val="FF843A"/>
       </a:accent2>
       <a:accent3>
-        <a:srgbClr val="b2b2b2"/>
+        <a:srgbClr val="B2B2B2"/>
       </a:accent3>
       <a:accent4>
-        <a:srgbClr val="ffd700"/>
+        <a:srgbClr val="FFD700"/>
       </a:accent4>
       <a:accent5>
-        <a:srgbClr val="289b6e"/>
+        <a:srgbClr val="289B6E"/>
       </a:accent5>
       <a:accent6>
-        <a:srgbClr val="9d5cbb"/>
+        <a:srgbClr val="9D5CBB"/>
       </a:accent6>
       <a:hlink>
-        <a:srgbClr val="0000ff"/>
+        <a:srgbClr val="0000FF"/>
       </a:hlink>
       <a:folHlink>
         <a:srgbClr val="800080"/>
@@ -23628,5 +22970,7 @@
       </a:bgFillStyleLst>
     </a:fmtScheme>
   </a:themeElements>
+  <a:objectDefaults/>
+  <a:extraClrSchemeLst/>
 </a:theme>
 </file>